--- a/lecture2/L2_Embeddings_VectorDatabases_DevOps.pptx
+++ b/lecture2/L2_Embeddings_VectorDatabases_DevOps.pptx
@@ -3140,7 +3140,14 @@
           </a:bodyPr>
           <a:lstStyle/>
           <a:p>
-            <a:pPr algn="l"/>
+            <a:pPr algn="l">
+              <a:spcBef>
+                <a:spcPts val="0"/>
+              </a:spcBef>
+              <a:spcAft>
+                <a:spcPts val="0"/>
+              </a:spcAft>
+            </a:pPr>
             <a:r>
               <a:rPr sz="1300" b="1">
                 <a:solidFill>
@@ -3175,7 +3182,14 @@
           </a:bodyPr>
           <a:lstStyle/>
           <a:p>
-            <a:pPr algn="l"/>
+            <a:pPr algn="l">
+              <a:spcBef>
+                <a:spcPts val="0"/>
+              </a:spcBef>
+              <a:spcAft>
+                <a:spcPts val="0"/>
+              </a:spcAft>
+            </a:pPr>
             <a:r>
               <a:rPr sz="4400" b="1">
                 <a:solidFill>
@@ -3210,7 +3224,14 @@
           </a:bodyPr>
           <a:lstStyle/>
           <a:p>
-            <a:pPr algn="l"/>
+            <a:pPr algn="l">
+              <a:spcBef>
+                <a:spcPts val="0"/>
+              </a:spcBef>
+              <a:spcAft>
+                <a:spcPts val="0"/>
+              </a:spcAft>
+            </a:pPr>
             <a:r>
               <a:rPr sz="1800" b="0">
                 <a:solidFill>
@@ -3245,7 +3266,14 @@
           </a:bodyPr>
           <a:lstStyle/>
           <a:p>
-            <a:pPr algn="l"/>
+            <a:pPr algn="l">
+              <a:spcBef>
+                <a:spcPts val="0"/>
+              </a:spcBef>
+              <a:spcAft>
+                <a:spcPts val="0"/>
+              </a:spcAft>
+            </a:pPr>
             <a:r>
               <a:rPr sz="2000" b="1">
                 <a:solidFill>
@@ -3280,7 +3308,14 @@
           </a:bodyPr>
           <a:lstStyle/>
           <a:p>
-            <a:pPr algn="l"/>
+            <a:pPr algn="l">
+              <a:spcBef>
+                <a:spcPts val="0"/>
+              </a:spcBef>
+              <a:spcAft>
+                <a:spcPts val="0"/>
+              </a:spcAft>
+            </a:pPr>
             <a:r>
               <a:rPr sz="1100" b="0">
                 <a:solidFill>
@@ -3315,7 +3350,14 @@
           </a:bodyPr>
           <a:lstStyle/>
           <a:p>
-            <a:pPr algn="l"/>
+            <a:pPr algn="l">
+              <a:spcBef>
+                <a:spcPts val="0"/>
+              </a:spcBef>
+              <a:spcAft>
+                <a:spcPts val="0"/>
+              </a:spcAft>
+            </a:pPr>
             <a:r>
               <a:rPr sz="2000" b="1">
                 <a:solidFill>
@@ -3350,7 +3392,14 @@
           </a:bodyPr>
           <a:lstStyle/>
           <a:p>
-            <a:pPr algn="l"/>
+            <a:pPr algn="l">
+              <a:spcBef>
+                <a:spcPts val="0"/>
+              </a:spcBef>
+              <a:spcAft>
+                <a:spcPts val="0"/>
+              </a:spcAft>
+            </a:pPr>
             <a:r>
               <a:rPr sz="1100" b="0">
                 <a:solidFill>
@@ -3385,7 +3434,14 @@
           </a:bodyPr>
           <a:lstStyle/>
           <a:p>
-            <a:pPr algn="l"/>
+            <a:pPr algn="l">
+              <a:spcBef>
+                <a:spcPts val="0"/>
+              </a:spcBef>
+              <a:spcAft>
+                <a:spcPts val="0"/>
+              </a:spcAft>
+            </a:pPr>
             <a:r>
               <a:rPr sz="2000" b="1">
                 <a:solidFill>
@@ -3420,7 +3476,14 @@
           </a:bodyPr>
           <a:lstStyle/>
           <a:p>
-            <a:pPr algn="l"/>
+            <a:pPr algn="l">
+              <a:spcBef>
+                <a:spcPts val="0"/>
+              </a:spcBef>
+              <a:spcAft>
+                <a:spcPts val="0"/>
+              </a:spcAft>
+            </a:pPr>
             <a:r>
               <a:rPr sz="1100" b="0">
                 <a:solidFill>
@@ -3455,7 +3518,14 @@
           </a:bodyPr>
           <a:lstStyle/>
           <a:p>
-            <a:pPr algn="l"/>
+            <a:pPr algn="l">
+              <a:spcBef>
+                <a:spcPts val="0"/>
+              </a:spcBef>
+              <a:spcAft>
+                <a:spcPts val="0"/>
+              </a:spcAft>
+            </a:pPr>
             <a:r>
               <a:rPr sz="2000" b="1">
                 <a:solidFill>
@@ -3490,7 +3560,14 @@
           </a:bodyPr>
           <a:lstStyle/>
           <a:p>
-            <a:pPr algn="l"/>
+            <a:pPr algn="l">
+              <a:spcBef>
+                <a:spcPts val="0"/>
+              </a:spcBef>
+              <a:spcAft>
+                <a:spcPts val="0"/>
+              </a:spcAft>
+            </a:pPr>
             <a:r>
               <a:rPr sz="1100" b="0">
                 <a:solidFill>
@@ -3525,7 +3602,14 @@
           </a:bodyPr>
           <a:lstStyle/>
           <a:p>
-            <a:pPr algn="l"/>
+            <a:pPr algn="l">
+              <a:spcBef>
+                <a:spcPts val="0"/>
+              </a:spcBef>
+              <a:spcAft>
+                <a:spcPts val="0"/>
+              </a:spcAft>
+            </a:pPr>
             <a:r>
               <a:rPr sz="1300" b="0">
                 <a:solidFill>
@@ -3560,7 +3644,14 @@
           </a:bodyPr>
           <a:lstStyle/>
           <a:p>
-            <a:pPr algn="r"/>
+            <a:pPr algn="r">
+              <a:spcBef>
+                <a:spcPts val="0"/>
+              </a:spcBef>
+              <a:spcAft>
+                <a:spcPts val="0"/>
+              </a:spcAft>
+            </a:pPr>
             <a:r>
               <a:rPr sz="900" b="0">
                 <a:solidFill>
@@ -3621,7 +3712,14 @@
           </a:bodyPr>
           <a:lstStyle/>
           <a:p>
-            <a:pPr algn="l"/>
+            <a:pPr algn="l">
+              <a:spcBef>
+                <a:spcPts val="0"/>
+              </a:spcBef>
+              <a:spcAft>
+                <a:spcPts val="0"/>
+              </a:spcAft>
+            </a:pPr>
             <a:r>
               <a:rPr sz="1300" b="1">
                 <a:solidFill>
@@ -3629,7 +3727,7 @@
                 </a:solidFill>
                 <a:latin typeface="Calibri"/>
               </a:rPr>
-              <a:t>THEORY 3  |  SLIDES 10-12</a:t>
+              <a:t>THEORY 3  |  SLIDES 11-13</a:t>
             </a:r>
           </a:p>
         </p:txBody>
@@ -3656,7 +3754,14 @@
           </a:bodyPr>
           <a:lstStyle/>
           <a:p>
-            <a:pPr algn="l"/>
+            <a:pPr algn="l">
+              <a:spcBef>
+                <a:spcPts val="0"/>
+              </a:spcBef>
+              <a:spcAft>
+                <a:spcPts val="0"/>
+              </a:spcAft>
+            </a:pPr>
             <a:r>
               <a:rPr sz="4000" b="1">
                 <a:solidFill>
@@ -3664,7 +3769,7 @@
                 </a:solidFill>
                 <a:latin typeface="Cambria"/>
               </a:rPr>
-              <a:t>Vector databases: why not just Postgres?</a:t>
+              <a:t>Vector databases: why a special store?</a:t>
             </a:r>
           </a:p>
         </p:txBody>
@@ -3691,7 +3796,14 @@
           </a:bodyPr>
           <a:lstStyle/>
           <a:p>
-            <a:pPr algn="l"/>
+            <a:pPr algn="l">
+              <a:spcBef>
+                <a:spcPts val="0"/>
+              </a:spcBef>
+              <a:spcAft>
+                <a:spcPts val="0"/>
+              </a:spcAft>
+            </a:pPr>
             <a:r>
               <a:rPr sz="1600" b="0">
                 <a:solidFill>
@@ -3699,7 +3811,7 @@
                 </a:solidFill>
                 <a:latin typeface="Cambria"/>
               </a:rPr>
-              <a:t>A purpose-built index for one query pattern: nearest-neighbour</a:t>
+              <a:t>A search index built for one job: find the closest meanings</a:t>
             </a:r>
           </a:p>
         </p:txBody>
@@ -3726,7 +3838,14 @@
           </a:bodyPr>
           <a:lstStyle/>
           <a:p>
-            <a:pPr algn="r"/>
+            <a:pPr algn="r">
+              <a:spcBef>
+                <a:spcPts val="0"/>
+              </a:spcBef>
+              <a:spcAft>
+                <a:spcPts val="0"/>
+              </a:spcAft>
+            </a:pPr>
             <a:r>
               <a:rPr sz="900" b="0">
                 <a:solidFill>
@@ -3787,7 +3906,14 @@
           </a:bodyPr>
           <a:lstStyle/>
           <a:p>
-            <a:pPr algn="l"/>
+            <a:pPr algn="l">
+              <a:spcBef>
+                <a:spcPts val="0"/>
+              </a:spcBef>
+              <a:spcAft>
+                <a:spcPts val="0"/>
+              </a:spcAft>
+            </a:pPr>
             <a:r>
               <a:rPr sz="2600" b="1">
                 <a:solidFill>
@@ -3822,7 +3948,14 @@
           </a:bodyPr>
           <a:lstStyle/>
           <a:p>
-            <a:pPr algn="l"/>
+            <a:pPr algn="l">
+              <a:spcBef>
+                <a:spcPts val="0"/>
+              </a:spcBef>
+              <a:spcAft>
+                <a:spcPts val="0"/>
+              </a:spcAft>
+            </a:pPr>
             <a:r>
               <a:rPr sz="1300" b="0">
                 <a:solidFill>
@@ -3857,7 +3990,14 @@
           </a:bodyPr>
           <a:lstStyle/>
           <a:p>
-            <a:pPr algn="r"/>
+            <a:pPr algn="r">
+              <a:spcBef>
+                <a:spcPts val="0"/>
+              </a:spcBef>
+              <a:spcAft>
+                <a:spcPts val="0"/>
+              </a:spcAft>
+            </a:pPr>
             <a:r>
               <a:rPr sz="900" b="0">
                 <a:solidFill>
@@ -3936,7 +4076,14 @@
           </a:bodyPr>
           <a:lstStyle/>
           <a:p>
-            <a:pPr algn="l"/>
+            <a:pPr algn="l">
+              <a:spcBef>
+                <a:spcPts val="0"/>
+              </a:spcBef>
+              <a:spcAft>
+                <a:spcPts val="0"/>
+              </a:spcAft>
+            </a:pPr>
             <a:r>
               <a:rPr sz="1500" b="0">
                 <a:solidFill>
@@ -3944,7 +4091,7 @@
                 </a:solidFill>
                 <a:latin typeface="Calibri"/>
               </a:rPr>
-              <a:t>Chroma stores each embedding alongside its original text and any metadata, then indexes all of it for fast nearest-neighbour search -- so you never hand-write the cosine-similarity math yourself.</a:t>
+              <a:t>Chroma is a vector database. It stores each embedding next to the original text, then finds the closest matches for a new query -- so you never hand-write the similarity math yourself.</a:t>
             </a:r>
           </a:p>
         </p:txBody>
@@ -4015,6 +4162,14 @@
           </a:bodyPr>
           <a:lstStyle/>
           <a:p>
+            <a:pPr>
+              <a:spcBef>
+                <a:spcPts val="0"/>
+              </a:spcBef>
+              <a:spcAft>
+                <a:spcPts val="0"/>
+              </a:spcAft>
+            </a:pPr>
             <a:r>
               <a:rPr sz="1300" b="0">
                 <a:solidFill>
@@ -4026,6 +4181,14 @@
             </a:r>
           </a:p>
           <a:p>
+            <a:pPr>
+              <a:spcBef>
+                <a:spcPts val="0"/>
+              </a:spcBef>
+              <a:spcAft>
+                <a:spcPts val="0"/>
+              </a:spcAft>
+            </a:pPr>
             <a:r>
               <a:rPr sz="1300" b="0">
                 <a:solidFill>
@@ -4037,6 +4200,14 @@
             </a:r>
           </a:p>
           <a:p>
+            <a:pPr>
+              <a:spcBef>
+                <a:spcPts val="0"/>
+              </a:spcBef>
+              <a:spcAft>
+                <a:spcPts val="0"/>
+              </a:spcAft>
+            </a:pPr>
             <a:r>
               <a:rPr sz="1300" b="0">
                 <a:solidFill>
@@ -4048,6 +4219,14 @@
             </a:r>
           </a:p>
           <a:p>
+            <a:pPr>
+              <a:spcBef>
+                <a:spcPts val="0"/>
+              </a:spcBef>
+              <a:spcAft>
+                <a:spcPts val="0"/>
+              </a:spcAft>
+            </a:pPr>
             <a:r>
               <a:rPr sz="1300" b="0">
                 <a:solidFill>
@@ -4082,7 +4261,14 @@
           </a:bodyPr>
           <a:lstStyle/>
           <a:p>
-            <a:pPr algn="l"/>
+            <a:pPr algn="l">
+              <a:spcBef>
+                <a:spcPts val="0"/>
+              </a:spcBef>
+              <a:spcAft>
+                <a:spcPts val="0"/>
+              </a:spcAft>
+            </a:pPr>
             <a:r>
               <a:rPr sz="1400" b="1">
                 <a:solidFill>
@@ -4143,7 +4329,14 @@
           </a:bodyPr>
           <a:lstStyle/>
           <a:p>
-            <a:pPr algn="l"/>
+            <a:pPr algn="l">
+              <a:spcBef>
+                <a:spcPts val="0"/>
+              </a:spcBef>
+              <a:spcAft>
+                <a:spcPts val="0"/>
+              </a:spcAft>
+            </a:pPr>
             <a:r>
               <a:rPr sz="2600" b="1">
                 <a:solidFill>
@@ -4178,7 +4371,14 @@
           </a:bodyPr>
           <a:lstStyle/>
           <a:p>
-            <a:pPr algn="l"/>
+            <a:pPr algn="l">
+              <a:spcBef>
+                <a:spcPts val="0"/>
+              </a:spcBef>
+              <a:spcAft>
+                <a:spcPts val="0"/>
+              </a:spcAft>
+            </a:pPr>
             <a:r>
               <a:rPr sz="1300" b="0">
                 <a:solidFill>
@@ -4186,7 +4386,7 @@
                 </a:solidFill>
                 <a:latin typeface="Calibri"/>
               </a:rPr>
-              <a:t>What actually happens inside .query()</a:t>
+              <a:t>What actually happens inside .query() -- four plain steps</a:t>
             </a:r>
           </a:p>
         </p:txBody>
@@ -4213,7 +4413,14 @@
           </a:bodyPr>
           <a:lstStyle/>
           <a:p>
-            <a:pPr algn="r"/>
+            <a:pPr algn="r">
+              <a:spcBef>
+                <a:spcPts val="0"/>
+              </a:spcBef>
+              <a:spcAft>
+                <a:spcPts val="0"/>
+              </a:spcAft>
+            </a:pPr>
             <a:r>
               <a:rPr sz="900" b="0">
                 <a:solidFill>
@@ -4288,20 +4495,27 @@
         <p:spPr>
           <a:xfrm>
             <a:off x="1554480" y="1581912"/>
-            <a:ext cx="2743200" cy="365760"/>
-          </a:xfrm>
-          <a:prstGeom prst="rect">
-            <a:avLst/>
-          </a:prstGeom>
-          <a:noFill/>
-        </p:spPr>
-        <p:txBody>
-          <a:bodyPr wrap="square">
-            <a:spAutoFit/>
-          </a:bodyPr>
-          <a:lstStyle/>
-          <a:p>
-            <a:pPr algn="l"/>
+            <a:ext cx="2926080" cy="365760"/>
+          </a:xfrm>
+          <a:prstGeom prst="rect">
+            <a:avLst/>
+          </a:prstGeom>
+          <a:noFill/>
+        </p:spPr>
+        <p:txBody>
+          <a:bodyPr wrap="square">
+            <a:spAutoFit/>
+          </a:bodyPr>
+          <a:lstStyle/>
+          <a:p>
+            <a:pPr algn="l">
+              <a:spcBef>
+                <a:spcPts val="0"/>
+              </a:spcBef>
+              <a:spcAft>
+                <a:spcPts val="0"/>
+              </a:spcAft>
+            </a:pPr>
             <a:r>
               <a:rPr sz="1600" b="1">
                 <a:solidFill>
@@ -4322,21 +4536,28 @@
         </p:nvSpPr>
         <p:spPr>
           <a:xfrm>
-            <a:off x="4389120" y="1618488"/>
-            <a:ext cx="6583680" cy="548640"/>
-          </a:xfrm>
-          <a:prstGeom prst="rect">
-            <a:avLst/>
-          </a:prstGeom>
-          <a:noFill/>
-        </p:spPr>
-        <p:txBody>
-          <a:bodyPr wrap="square">
-            <a:spAutoFit/>
-          </a:bodyPr>
-          <a:lstStyle/>
-          <a:p>
-            <a:pPr algn="l"/>
+            <a:off x="4572000" y="1618488"/>
+            <a:ext cx="6400800" cy="548640"/>
+          </a:xfrm>
+          <a:prstGeom prst="rect">
+            <a:avLst/>
+          </a:prstGeom>
+          <a:noFill/>
+        </p:spPr>
+        <p:txBody>
+          <a:bodyPr wrap="square">
+            <a:spAutoFit/>
+          </a:bodyPr>
+          <a:lstStyle/>
+          <a:p>
+            <a:pPr algn="l">
+              <a:spcBef>
+                <a:spcPts val="0"/>
+              </a:spcBef>
+              <a:spcAft>
+                <a:spcPts val="0"/>
+              </a:spcAft>
+            </a:pPr>
             <a:r>
               <a:rPr sz="1300" b="0">
                 <a:solidFill>
@@ -4344,7 +4565,7 @@
                 </a:solidFill>
                 <a:latin typeface="Calibri"/>
               </a:rPr>
-              <a:t>Your query text is converted into a vector, the same way every stored document was.</a:t>
+              <a:t>Your query text becomes a vector, the same way every stored document did.</a:t>
             </a:r>
           </a:p>
         </p:txBody>
@@ -4411,20 +4632,27 @@
         <p:spPr>
           <a:xfrm>
             <a:off x="1554480" y="2450592"/>
-            <a:ext cx="2743200" cy="365760"/>
-          </a:xfrm>
-          <a:prstGeom prst="rect">
-            <a:avLst/>
-          </a:prstGeom>
-          <a:noFill/>
-        </p:spPr>
-        <p:txBody>
-          <a:bodyPr wrap="square">
-            <a:spAutoFit/>
-          </a:bodyPr>
-          <a:lstStyle/>
-          <a:p>
-            <a:pPr algn="l"/>
+            <a:ext cx="2926080" cy="365760"/>
+          </a:xfrm>
+          <a:prstGeom prst="rect">
+            <a:avLst/>
+          </a:prstGeom>
+          <a:noFill/>
+        </p:spPr>
+        <p:txBody>
+          <a:bodyPr wrap="square">
+            <a:spAutoFit/>
+          </a:bodyPr>
+          <a:lstStyle/>
+          <a:p>
+            <a:pPr algn="l">
+              <a:spcBef>
+                <a:spcPts val="0"/>
+              </a:spcBef>
+              <a:spcAft>
+                <a:spcPts val="0"/>
+              </a:spcAft>
+            </a:pPr>
             <a:r>
               <a:rPr sz="1600" b="1">
                 <a:solidFill>
@@ -4445,21 +4673,28 @@
         </p:nvSpPr>
         <p:spPr>
           <a:xfrm>
-            <a:off x="4389120" y="2487168"/>
-            <a:ext cx="6583680" cy="548640"/>
-          </a:xfrm>
-          <a:prstGeom prst="rect">
-            <a:avLst/>
-          </a:prstGeom>
-          <a:noFill/>
-        </p:spPr>
-        <p:txBody>
-          <a:bodyPr wrap="square">
-            <a:spAutoFit/>
-          </a:bodyPr>
-          <a:lstStyle/>
-          <a:p>
-            <a:pPr algn="l"/>
+            <a:off x="4572000" y="2487168"/>
+            <a:ext cx="6400800" cy="548640"/>
+          </a:xfrm>
+          <a:prstGeom prst="rect">
+            <a:avLst/>
+          </a:prstGeom>
+          <a:noFill/>
+        </p:spPr>
+        <p:txBody>
+          <a:bodyPr wrap="square">
+            <a:spAutoFit/>
+          </a:bodyPr>
+          <a:lstStyle/>
+          <a:p>
+            <a:pPr algn="l">
+              <a:spcBef>
+                <a:spcPts val="0"/>
+              </a:spcBef>
+              <a:spcAft>
+                <a:spcPts val="0"/>
+              </a:spcAft>
+            </a:pPr>
             <a:r>
               <a:rPr sz="1300" b="0">
                 <a:solidFill>
@@ -4467,7 +4702,7 @@
                 </a:solidFill>
                 <a:latin typeface="Calibri"/>
               </a:rPr>
-              <a:t>Cosine similarity is computed between the query vector and every vector in the collection.</a:t>
+              <a:t>Cosine similarity compares the query to every stored vector.</a:t>
             </a:r>
           </a:p>
         </p:txBody>
@@ -4534,20 +4769,27 @@
         <p:spPr>
           <a:xfrm>
             <a:off x="1554480" y="3319272"/>
-            <a:ext cx="2743200" cy="365760"/>
-          </a:xfrm>
-          <a:prstGeom prst="rect">
-            <a:avLst/>
-          </a:prstGeom>
-          <a:noFill/>
-        </p:spPr>
-        <p:txBody>
-          <a:bodyPr wrap="square">
-            <a:spAutoFit/>
-          </a:bodyPr>
-          <a:lstStyle/>
-          <a:p>
-            <a:pPr algn="l"/>
+            <a:ext cx="2926080" cy="365760"/>
+          </a:xfrm>
+          <a:prstGeom prst="rect">
+            <a:avLst/>
+          </a:prstGeom>
+          <a:noFill/>
+        </p:spPr>
+        <p:txBody>
+          <a:bodyPr wrap="square">
+            <a:spAutoFit/>
+          </a:bodyPr>
+          <a:lstStyle/>
+          <a:p>
+            <a:pPr algn="l">
+              <a:spcBef>
+                <a:spcPts val="0"/>
+              </a:spcBef>
+              <a:spcAft>
+                <a:spcPts val="0"/>
+              </a:spcAft>
+            </a:pPr>
             <a:r>
               <a:rPr sz="1600" b="1">
                 <a:solidFill>
@@ -4568,21 +4810,28 @@
         </p:nvSpPr>
         <p:spPr>
           <a:xfrm>
-            <a:off x="4389120" y="3355848"/>
-            <a:ext cx="6583680" cy="548640"/>
-          </a:xfrm>
-          <a:prstGeom prst="rect">
-            <a:avLst/>
-          </a:prstGeom>
-          <a:noFill/>
-        </p:spPr>
-        <p:txBody>
-          <a:bodyPr wrap="square">
-            <a:spAutoFit/>
-          </a:bodyPr>
-          <a:lstStyle/>
-          <a:p>
-            <a:pPr algn="l"/>
+            <a:off x="4572000" y="3355848"/>
+            <a:ext cx="6400800" cy="548640"/>
+          </a:xfrm>
+          <a:prstGeom prst="rect">
+            <a:avLst/>
+          </a:prstGeom>
+          <a:noFill/>
+        </p:spPr>
+        <p:txBody>
+          <a:bodyPr wrap="square">
+            <a:spAutoFit/>
+          </a:bodyPr>
+          <a:lstStyle/>
+          <a:p>
+            <a:pPr algn="l">
+              <a:spcBef>
+                <a:spcPts val="0"/>
+              </a:spcBef>
+              <a:spcAft>
+                <a:spcPts val="0"/>
+              </a:spcAft>
+            </a:pPr>
             <a:r>
               <a:rPr sz="1300" b="0">
                 <a:solidFill>
@@ -4590,7 +4839,7 @@
                 </a:solidFill>
                 <a:latin typeface="Calibri"/>
               </a:rPr>
-              <a:t>Every document gets a similarity score -- higher means closer in meaning.</a:t>
+              <a:t>Higher score = closer in meaning.</a:t>
             </a:r>
           </a:p>
         </p:txBody>
@@ -4657,20 +4906,27 @@
         <p:spPr>
           <a:xfrm>
             <a:off x="1554480" y="4187952"/>
-            <a:ext cx="2743200" cy="365760"/>
-          </a:xfrm>
-          <a:prstGeom prst="rect">
-            <a:avLst/>
-          </a:prstGeom>
-          <a:noFill/>
-        </p:spPr>
-        <p:txBody>
-          <a:bodyPr wrap="square">
-            <a:spAutoFit/>
-          </a:bodyPr>
-          <a:lstStyle/>
-          <a:p>
-            <a:pPr algn="l"/>
+            <a:ext cx="2926080" cy="365760"/>
+          </a:xfrm>
+          <a:prstGeom prst="rect">
+            <a:avLst/>
+          </a:prstGeom>
+          <a:noFill/>
+        </p:spPr>
+        <p:txBody>
+          <a:bodyPr wrap="square">
+            <a:spAutoFit/>
+          </a:bodyPr>
+          <a:lstStyle/>
+          <a:p>
+            <a:pPr algn="l">
+              <a:spcBef>
+                <a:spcPts val="0"/>
+              </a:spcBef>
+              <a:spcAft>
+                <a:spcPts val="0"/>
+              </a:spcAft>
+            </a:pPr>
             <a:r>
               <a:rPr sz="1600" b="1">
                 <a:solidFill>
@@ -4691,21 +4947,28 @@
         </p:nvSpPr>
         <p:spPr>
           <a:xfrm>
-            <a:off x="4389120" y="4224528"/>
-            <a:ext cx="6583680" cy="548640"/>
-          </a:xfrm>
-          <a:prstGeom prst="rect">
-            <a:avLst/>
-          </a:prstGeom>
-          <a:noFill/>
-        </p:spPr>
-        <p:txBody>
-          <a:bodyPr wrap="square">
-            <a:spAutoFit/>
-          </a:bodyPr>
-          <a:lstStyle/>
-          <a:p>
-            <a:pPr algn="l"/>
+            <a:off x="4572000" y="4224528"/>
+            <a:ext cx="6400800" cy="548640"/>
+          </a:xfrm>
+          <a:prstGeom prst="rect">
+            <a:avLst/>
+          </a:prstGeom>
+          <a:noFill/>
+        </p:spPr>
+        <p:txBody>
+          <a:bodyPr wrap="square">
+            <a:spAutoFit/>
+          </a:bodyPr>
+          <a:lstStyle/>
+          <a:p>
+            <a:pPr algn="l">
+              <a:spcBef>
+                <a:spcPts val="0"/>
+              </a:spcBef>
+              <a:spcAft>
+                <a:spcPts val="0"/>
+              </a:spcAft>
+            </a:pPr>
             <a:r>
               <a:rPr sz="1300" b="0">
                 <a:solidFill>
@@ -4713,7 +4976,7 @@
                 </a:solidFill>
                 <a:latin typeface="Calibri"/>
               </a:rPr>
-              <a:t>Only the K best-scoring documents come back, along with their scores.</a:t>
+              <a:t>Only the K best-scoring documents come back, with their scores.</a:t>
             </a:r>
           </a:p>
         </p:txBody>
@@ -4766,7 +5029,14 @@
           </a:bodyPr>
           <a:lstStyle/>
           <a:p>
-            <a:pPr algn="l"/>
+            <a:pPr algn="l">
+              <a:spcBef>
+                <a:spcPts val="0"/>
+              </a:spcBef>
+              <a:spcAft>
+                <a:spcPts val="0"/>
+              </a:spcAft>
+            </a:pPr>
             <a:r>
               <a:rPr sz="2600" b="1">
                 <a:solidFill>
@@ -4774,7 +5044,7 @@
                 </a:solidFill>
                 <a:latin typeface="Cambria"/>
               </a:rPr>
-              <a:t>Analogy: a vector database = Prometheus for metrics</a:t>
+              <a:t>Analogy: a vector database = search logs by meaning</a:t>
             </a:r>
           </a:p>
         </p:txBody>
@@ -4801,7 +5071,14 @@
           </a:bodyPr>
           <a:lstStyle/>
           <a:p>
-            <a:pPr algn="l"/>
+            <a:pPr algn="l">
+              <a:spcBef>
+                <a:spcPts val="0"/>
+              </a:spcBef>
+              <a:spcAft>
+                <a:spcPts val="0"/>
+              </a:spcAft>
+            </a:pPr>
             <a:r>
               <a:rPr sz="1300" b="0">
                 <a:solidFill>
@@ -4809,7 +5086,7 @@
                 </a:solidFill>
                 <a:latin typeface="Calibri"/>
               </a:rPr>
-              <a:t>A specialized engine beats a general-purpose one at its own query pattern</a:t>
+              <a:t>Keyword search needs the exact words. Semantic search needs the idea.</a:t>
             </a:r>
           </a:p>
         </p:txBody>
@@ -4836,7 +5113,14 @@
           </a:bodyPr>
           <a:lstStyle/>
           <a:p>
-            <a:pPr algn="r"/>
+            <a:pPr algn="r">
+              <a:spcBef>
+                <a:spcPts val="0"/>
+              </a:spcBef>
+              <a:spcAft>
+                <a:spcPts val="0"/>
+              </a:spcAft>
+            </a:pPr>
             <a:r>
               <a:rPr sz="900" b="0">
                 <a:solidFill>
@@ -4857,8 +5141,8 @@
         </p:nvSpPr>
         <p:spPr>
           <a:xfrm>
-            <a:off x="822960" y="1737360"/>
-            <a:ext cx="9966960" cy="640080"/>
+            <a:off x="822960" y="1691640"/>
+            <a:ext cx="5029200" cy="2926080"/>
           </a:xfrm>
           <a:prstGeom prst="rect">
             <a:avLst/>
@@ -4902,42 +5186,148 @@
         <p:spPr>
           <a:xfrm>
             <a:off x="1051560" y="1874519"/>
-            <a:ext cx="9601200" cy="365760"/>
-          </a:xfrm>
-          <a:prstGeom prst="rect">
-            <a:avLst/>
-          </a:prstGeom>
-          <a:noFill/>
-        </p:spPr>
-        <p:txBody>
-          <a:bodyPr wrap="square">
-            <a:spAutoFit/>
-          </a:bodyPr>
-          <a:lstStyle/>
-          <a:p>
-            <a:pPr algn="l"/>
-            <a:r>
-              <a:rPr sz="1400" b="1">
+            <a:ext cx="4572000" cy="365760"/>
+          </a:xfrm>
+          <a:prstGeom prst="rect">
+            <a:avLst/>
+          </a:prstGeom>
+          <a:noFill/>
+        </p:spPr>
+        <p:txBody>
+          <a:bodyPr wrap="square">
+            <a:spAutoFit/>
+          </a:bodyPr>
+          <a:lstStyle/>
+          <a:p>
+            <a:pPr algn="l">
+              <a:spcBef>
+                <a:spcPts val="0"/>
+              </a:spcBef>
+              <a:spcAft>
+                <a:spcPts val="0"/>
+              </a:spcAft>
+            </a:pPr>
+            <a:r>
+              <a:rPr sz="1200" b="1">
+                <a:solidFill>
+                  <a:srgbClr val="8895A7"/>
+                </a:solidFill>
+                <a:latin typeface="Calibri"/>
+              </a:rPr>
+              <a:t>KEYWORD SEARCH (grep / Ctrl+F)</a:t>
+            </a:r>
+          </a:p>
+        </p:txBody>
+      </p:sp>
+      <p:sp>
+        <p:nvSpPr>
+          <p:cNvPr id="7" name="TextBox 6"/>
+          <p:cNvSpPr txBox="1"/>
+          <p:nvPr/>
+        </p:nvSpPr>
+        <p:spPr>
+          <a:xfrm>
+            <a:off x="1051560" y="2377440"/>
+            <a:ext cx="4572000" cy="2011680"/>
+          </a:xfrm>
+          <a:prstGeom prst="rect">
+            <a:avLst/>
+          </a:prstGeom>
+          <a:noFill/>
+        </p:spPr>
+        <p:txBody>
+          <a:bodyPr wrap="square">
+            <a:spAutoFit/>
+          </a:bodyPr>
+          <a:lstStyle/>
+          <a:p>
+            <a:pPr algn="l">
+              <a:spcBef>
+                <a:spcPts val="0"/>
+              </a:spcBef>
+              <a:spcAft>
+                <a:spcPts val="0"/>
+              </a:spcAft>
+            </a:pPr>
+            <a:r>
+              <a:rPr sz="1400" b="0">
                 <a:solidFill>
                   <a:srgbClr val="0E1B2B"/>
                 </a:solidFill>
                 <a:latin typeface="Calibri"/>
               </a:rPr>
-              <a:t>Time-range metric aggregation</a:t>
-            </a:r>
-          </a:p>
-        </p:txBody>
-      </p:sp>
-      <p:sp>
-        <p:nvSpPr>
-          <p:cNvPr id="7" name="Rectangle 6"/>
+              <a:t>You search for the exact word "OOM".</a:t>
+            </a:r>
+          </a:p>
+          <a:p>
+            <a:pPr algn="l">
+              <a:spcBef>
+                <a:spcPts val="0"/>
+              </a:spcBef>
+              <a:spcAft>
+                <a:spcPts val="0"/>
+              </a:spcAft>
+            </a:pPr>
+            <a:r>
+              <a:rPr sz="1400" b="0">
+                <a:solidFill>
+                  <a:srgbClr val="0E1B2B"/>
+                </a:solidFill>
+                <a:latin typeface="Calibri"/>
+              </a:rPr>
+              <a:t>If the log says "ran out of memory" instead, you miss it.</a:t>
+            </a:r>
+          </a:p>
+          <a:p>
+            <a:pPr algn="l">
+              <a:spcBef>
+                <a:spcPts val="0"/>
+              </a:spcBef>
+              <a:spcAft>
+                <a:spcPts val="0"/>
+              </a:spcAft>
+            </a:pPr>
+            <a:r>
+              <a:rPr sz="1400" b="0">
+                <a:solidFill>
+                  <a:srgbClr val="0E1B2B"/>
+                </a:solidFill>
+                <a:latin typeface="Calibri"/>
+              </a:rPr>
+              <a:t/>
+            </a:r>
+          </a:p>
+          <a:p>
+            <a:pPr algn="l">
+              <a:spcBef>
+                <a:spcPts val="0"/>
+              </a:spcBef>
+              <a:spcAft>
+                <a:spcPts val="0"/>
+              </a:spcAft>
+            </a:pPr>
+            <a:r>
+              <a:rPr sz="1400" b="0">
+                <a:solidFill>
+                  <a:srgbClr val="0E1B2B"/>
+                </a:solidFill>
+                <a:latin typeface="Calibri"/>
+              </a:rPr>
+              <a:t>Great when wording matches. Fragile when people paraphrase.</a:t>
+            </a:r>
+          </a:p>
+        </p:txBody>
+      </p:sp>
+      <p:sp>
+        <p:nvSpPr>
+          <p:cNvPr id="8" name="Rectangle 7"/>
           <p:cNvSpPr/>
           <p:nvPr/>
         </p:nvSpPr>
         <p:spPr>
           <a:xfrm>
-            <a:off x="822960" y="2514600"/>
-            <a:ext cx="9966960" cy="640080"/>
+            <a:off x="6126480" y="1691640"/>
+            <a:ext cx="5029200" cy="2926080"/>
           </a:xfrm>
           <a:prstGeom prst="rect">
             <a:avLst/>
@@ -4974,228 +5364,183 @@
       </p:sp>
       <p:sp>
         <p:nvSpPr>
-          <p:cNvPr id="8" name="TextBox 7"/>
-          <p:cNvSpPr txBox="1"/>
-          <p:nvPr/>
-        </p:nvSpPr>
-        <p:spPr>
-          <a:xfrm>
-            <a:off x="1051560" y="2651760"/>
-            <a:ext cx="9601200" cy="365760"/>
-          </a:xfrm>
-          <a:prstGeom prst="rect">
-            <a:avLst/>
-          </a:prstGeom>
-          <a:noFill/>
-        </p:spPr>
-        <p:txBody>
-          <a:bodyPr wrap="square">
-            <a:spAutoFit/>
-          </a:bodyPr>
-          <a:lstStyle/>
-          <a:p>
-            <a:pPr algn="l"/>
-            <a:r>
-              <a:rPr sz="1400" b="1">
+          <p:cNvPr id="9" name="TextBox 8"/>
+          <p:cNvSpPr txBox="1"/>
+          <p:nvPr/>
+        </p:nvSpPr>
+        <p:spPr>
+          <a:xfrm>
+            <a:off x="6355080" y="1874519"/>
+            <a:ext cx="4572000" cy="365760"/>
+          </a:xfrm>
+          <a:prstGeom prst="rect">
+            <a:avLst/>
+          </a:prstGeom>
+          <a:noFill/>
+        </p:spPr>
+        <p:txBody>
+          <a:bodyPr wrap="square">
+            <a:spAutoFit/>
+          </a:bodyPr>
+          <a:lstStyle/>
+          <a:p>
+            <a:pPr algn="l">
+              <a:spcBef>
+                <a:spcPts val="0"/>
+              </a:spcBef>
+              <a:spcAft>
+                <a:spcPts val="0"/>
+              </a:spcAft>
+            </a:pPr>
+            <a:r>
+              <a:rPr sz="1200" b="1">
+                <a:solidFill>
+                  <a:srgbClr val="E8A33D"/>
+                </a:solidFill>
+                <a:latin typeface="Calibri"/>
+              </a:rPr>
+              <a:t>VECTOR DB (SEMANTIC SEARCH)</a:t>
+            </a:r>
+          </a:p>
+        </p:txBody>
+      </p:sp>
+      <p:sp>
+        <p:nvSpPr>
+          <p:cNvPr id="10" name="TextBox 9"/>
+          <p:cNvSpPr txBox="1"/>
+          <p:nvPr/>
+        </p:nvSpPr>
+        <p:spPr>
+          <a:xfrm>
+            <a:off x="6355080" y="2377440"/>
+            <a:ext cx="4572000" cy="2011680"/>
+          </a:xfrm>
+          <a:prstGeom prst="rect">
+            <a:avLst/>
+          </a:prstGeom>
+          <a:noFill/>
+        </p:spPr>
+        <p:txBody>
+          <a:bodyPr wrap="square">
+            <a:spAutoFit/>
+          </a:bodyPr>
+          <a:lstStyle/>
+          <a:p>
+            <a:pPr algn="l">
+              <a:spcBef>
+                <a:spcPts val="0"/>
+              </a:spcBef>
+              <a:spcAft>
+                <a:spcPts val="0"/>
+              </a:spcAft>
+            </a:pPr>
+            <a:r>
+              <a:rPr sz="1400" b="0">
                 <a:solidFill>
                   <a:srgbClr val="FFFFFF"/>
                 </a:solidFill>
                 <a:latin typeface="Calibri"/>
               </a:rPr>
-              <a:t>-&gt; Prometheus, purpose-built and dramatically faster than Postgres at it</a:t>
-            </a:r>
-          </a:p>
-        </p:txBody>
-      </p:sp>
-      <p:sp>
-        <p:nvSpPr>
-          <p:cNvPr id="9" name="Rectangle 8"/>
-          <p:cNvSpPr/>
-          <p:nvPr/>
-        </p:nvSpPr>
-        <p:spPr>
-          <a:xfrm>
-            <a:off x="822960" y="3429000"/>
-            <a:ext cx="9966960" cy="640080"/>
-          </a:xfrm>
-          <a:prstGeom prst="rect">
-            <a:avLst/>
-          </a:prstGeom>
-          <a:solidFill>
-            <a:srgbClr val="F4F6FA"/>
-          </a:solidFill>
-          <a:ln>
-            <a:noFill/>
-          </a:ln>
-          <a:effectLst/>
-        </p:spPr>
-        <p:style>
-          <a:lnRef idx="1">
-            <a:schemeClr val="accent1"/>
-          </a:lnRef>
-          <a:fillRef idx="3">
-            <a:schemeClr val="accent1"/>
-          </a:fillRef>
-          <a:effectRef idx="2">
-            <a:schemeClr val="accent1"/>
-          </a:effectRef>
-          <a:fontRef idx="minor">
-            <a:schemeClr val="lt1"/>
-          </a:fontRef>
-        </p:style>
-        <p:txBody>
-          <a:bodyPr rtlCol="0" anchor="ctr"/>
-          <a:lstStyle/>
-          <a:p>
-            <a:pPr algn="ctr"/>
-          </a:p>
-        </p:txBody>
-      </p:sp>
-      <p:sp>
-        <p:nvSpPr>
-          <p:cNvPr id="10" name="TextBox 9"/>
-          <p:cNvSpPr txBox="1"/>
-          <p:nvPr/>
-        </p:nvSpPr>
-        <p:spPr>
-          <a:xfrm>
-            <a:off x="1051560" y="3566160"/>
-            <a:ext cx="9601200" cy="365760"/>
-          </a:xfrm>
-          <a:prstGeom prst="rect">
-            <a:avLst/>
-          </a:prstGeom>
-          <a:noFill/>
-        </p:spPr>
-        <p:txBody>
-          <a:bodyPr wrap="square">
-            <a:spAutoFit/>
-          </a:bodyPr>
-          <a:lstStyle/>
-          <a:p>
-            <a:pPr algn="l"/>
-            <a:r>
-              <a:rPr sz="1400" b="1">
+              <a:t>You ask "the machine ran out of RAM".</a:t>
+            </a:r>
+          </a:p>
+          <a:p>
+            <a:pPr algn="l">
+              <a:spcBef>
+                <a:spcPts val="0"/>
+              </a:spcBef>
+              <a:spcAft>
+                <a:spcPts val="0"/>
+              </a:spcAft>
+            </a:pPr>
+            <a:r>
+              <a:rPr sz="1400" b="0">
+                <a:solidFill>
+                  <a:srgbClr val="FFFFFF"/>
+                </a:solidFill>
+                <a:latin typeface="Calibri"/>
+              </a:rPr>
+              <a:t>It finds the runbook about OOM kills -- even with almost no shared words.</a:t>
+            </a:r>
+          </a:p>
+          <a:p>
+            <a:pPr algn="l">
+              <a:spcBef>
+                <a:spcPts val="0"/>
+              </a:spcBef>
+              <a:spcAft>
+                <a:spcPts val="0"/>
+              </a:spcAft>
+            </a:pPr>
+            <a:r>
+              <a:rPr sz="1400" b="0">
+                <a:solidFill>
+                  <a:srgbClr val="FFFFFF"/>
+                </a:solidFill>
+                <a:latin typeface="Calibri"/>
+              </a:rPr>
+              <a:t/>
+            </a:r>
+          </a:p>
+          <a:p>
+            <a:pPr algn="l">
+              <a:spcBef>
+                <a:spcPts val="0"/>
+              </a:spcBef>
+              <a:spcAft>
+                <a:spcPts val="0"/>
+              </a:spcAft>
+            </a:pPr>
+            <a:r>
+              <a:rPr sz="1400" b="0">
+                <a:solidFill>
+                  <a:srgbClr val="FFFFFF"/>
+                </a:solidFill>
+                <a:latin typeface="Calibri"/>
+              </a:rPr>
+              <a:t>That is why a special index exists: one job, done well.</a:t>
+            </a:r>
+          </a:p>
+        </p:txBody>
+      </p:sp>
+      <p:sp>
+        <p:nvSpPr>
+          <p:cNvPr id="11" name="TextBox 10"/>
+          <p:cNvSpPr txBox="1"/>
+          <p:nvPr/>
+        </p:nvSpPr>
+        <p:spPr>
+          <a:xfrm>
+            <a:off x="822960" y="4846320"/>
+            <a:ext cx="10058400" cy="548640"/>
+          </a:xfrm>
+          <a:prstGeom prst="rect">
+            <a:avLst/>
+          </a:prstGeom>
+          <a:noFill/>
+        </p:spPr>
+        <p:txBody>
+          <a:bodyPr wrap="square">
+            <a:spAutoFit/>
+          </a:bodyPr>
+          <a:lstStyle/>
+          <a:p>
+            <a:pPr algn="l">
+              <a:spcBef>
+                <a:spcPts val="0"/>
+              </a:spcBef>
+              <a:spcAft>
+                <a:spcPts val="0"/>
+              </a:spcAft>
+            </a:pPr>
+            <a:r>
+              <a:rPr sz="1300" b="1">
                 <a:solidFill>
                   <a:srgbClr val="0E1B2B"/>
                 </a:solidFill>
                 <a:latin typeface="Calibri"/>
               </a:rPr>
-              <a:t>Nearest-neighbour vector search</a:t>
-            </a:r>
-          </a:p>
-        </p:txBody>
-      </p:sp>
-      <p:sp>
-        <p:nvSpPr>
-          <p:cNvPr id="11" name="Rectangle 10"/>
-          <p:cNvSpPr/>
-          <p:nvPr/>
-        </p:nvSpPr>
-        <p:spPr>
-          <a:xfrm>
-            <a:off x="822960" y="4206240"/>
-            <a:ext cx="9966960" cy="640080"/>
-          </a:xfrm>
-          <a:prstGeom prst="rect">
-            <a:avLst/>
-          </a:prstGeom>
-          <a:solidFill>
-            <a:srgbClr val="0E1B2B"/>
-          </a:solidFill>
-          <a:ln>
-            <a:noFill/>
-          </a:ln>
-          <a:effectLst/>
-        </p:spPr>
-        <p:style>
-          <a:lnRef idx="1">
-            <a:schemeClr val="accent1"/>
-          </a:lnRef>
-          <a:fillRef idx="3">
-            <a:schemeClr val="accent1"/>
-          </a:fillRef>
-          <a:effectRef idx="2">
-            <a:schemeClr val="accent1"/>
-          </a:effectRef>
-          <a:fontRef idx="minor">
-            <a:schemeClr val="lt1"/>
-          </a:fontRef>
-        </p:style>
-        <p:txBody>
-          <a:bodyPr rtlCol="0" anchor="ctr"/>
-          <a:lstStyle/>
-          <a:p>
-            <a:pPr algn="ctr"/>
-          </a:p>
-        </p:txBody>
-      </p:sp>
-      <p:sp>
-        <p:nvSpPr>
-          <p:cNvPr id="12" name="TextBox 11"/>
-          <p:cNvSpPr txBox="1"/>
-          <p:nvPr/>
-        </p:nvSpPr>
-        <p:spPr>
-          <a:xfrm>
-            <a:off x="1051560" y="4343400"/>
-            <a:ext cx="9601200" cy="365760"/>
-          </a:xfrm>
-          <a:prstGeom prst="rect">
-            <a:avLst/>
-          </a:prstGeom>
-          <a:noFill/>
-        </p:spPr>
-        <p:txBody>
-          <a:bodyPr wrap="square">
-            <a:spAutoFit/>
-          </a:bodyPr>
-          <a:lstStyle/>
-          <a:p>
-            <a:pPr algn="l"/>
-            <a:r>
-              <a:rPr sz="1400" b="1">
-                <a:solidFill>
-                  <a:srgbClr val="FFFFFF"/>
-                </a:solidFill>
-                <a:latin typeface="Calibri"/>
-              </a:rPr>
-              <a:t>-&gt; Chroma, purpose-built and dramatically faster than Postgres at it</a:t>
-            </a:r>
-          </a:p>
-        </p:txBody>
-      </p:sp>
-      <p:sp>
-        <p:nvSpPr>
-          <p:cNvPr id="13" name="TextBox 12"/>
-          <p:cNvSpPr txBox="1"/>
-          <p:nvPr/>
-        </p:nvSpPr>
-        <p:spPr>
-          <a:xfrm>
-            <a:off x="822960" y="5074920"/>
-            <a:ext cx="10058400" cy="457200"/>
-          </a:xfrm>
-          <a:prstGeom prst="rect">
-            <a:avLst/>
-          </a:prstGeom>
-          <a:noFill/>
-        </p:spPr>
-        <p:txBody>
-          <a:bodyPr wrap="square">
-            <a:spAutoFit/>
-          </a:bodyPr>
-          <a:lstStyle/>
-          <a:p>
-            <a:pPr algn="l"/>
-            <a:r>
-              <a:rPr sz="1300" b="0">
-                <a:solidFill>
-                  <a:srgbClr val="8895A7"/>
-                </a:solidFill>
-                <a:latin typeface="Calibri"/>
-              </a:rPr>
-              <a:t>You could store embeddings as arrays in a normal table. You use a vector database for the same reason you use Prometheus instead of raw SQL.</a:t>
+              <a:t>You could store those number lists in a normal table. A vector database exists because "find the closest meanings" is a specialized search job.</a:t>
             </a:r>
           </a:p>
         </p:txBody>
@@ -5248,7 +5593,14 @@
           </a:bodyPr>
           <a:lstStyle/>
           <a:p>
-            <a:pPr algn="l"/>
+            <a:pPr algn="l">
+              <a:spcBef>
+                <a:spcPts val="0"/>
+              </a:spcBef>
+              <a:spcAft>
+                <a:spcPts val="0"/>
+              </a:spcAft>
+            </a:pPr>
             <a:r>
               <a:rPr sz="1300" b="1">
                 <a:solidFill>
@@ -5256,7 +5608,7 @@
                 </a:solidFill>
                 <a:latin typeface="Calibri"/>
               </a:rPr>
-              <a:t>THEORY 4  |  SLIDES 14-15</a:t>
+              <a:t>THEORY 4  |  SLIDES 15-16</a:t>
             </a:r>
           </a:p>
         </p:txBody>
@@ -5283,7 +5635,14 @@
           </a:bodyPr>
           <a:lstStyle/>
           <a:p>
-            <a:pPr algn="l"/>
+            <a:pPr algn="l">
+              <a:spcBef>
+                <a:spcPts val="0"/>
+              </a:spcBef>
+              <a:spcAft>
+                <a:spcPts val="0"/>
+              </a:spcAft>
+            </a:pPr>
             <a:r>
               <a:rPr sz="4000" b="1">
                 <a:solidFill>
@@ -5318,7 +5677,14 @@
           </a:bodyPr>
           <a:lstStyle/>
           <a:p>
-            <a:pPr algn="l"/>
+            <a:pPr algn="l">
+              <a:spcBef>
+                <a:spcPts val="0"/>
+              </a:spcBef>
+              <a:spcAft>
+                <a:spcPts val="0"/>
+              </a:spcAft>
+            </a:pPr>
             <a:r>
               <a:rPr sz="1600" b="0">
                 <a:solidFill>
@@ -5353,7 +5719,14 @@
           </a:bodyPr>
           <a:lstStyle/>
           <a:p>
-            <a:pPr algn="r"/>
+            <a:pPr algn="r">
+              <a:spcBef>
+                <a:spcPts val="0"/>
+              </a:spcBef>
+              <a:spcAft>
+                <a:spcPts val="0"/>
+              </a:spcAft>
+            </a:pPr>
             <a:r>
               <a:rPr sz="900" b="0">
                 <a:solidFill>
@@ -5414,7 +5787,14 @@
           </a:bodyPr>
           <a:lstStyle/>
           <a:p>
-            <a:pPr algn="l"/>
+            <a:pPr algn="l">
+              <a:spcBef>
+                <a:spcPts val="0"/>
+              </a:spcBef>
+              <a:spcAft>
+                <a:spcPts val="0"/>
+              </a:spcAft>
+            </a:pPr>
             <a:r>
               <a:rPr sz="2600" b="1">
                 <a:solidFill>
@@ -5449,7 +5829,14 @@
           </a:bodyPr>
           <a:lstStyle/>
           <a:p>
-            <a:pPr algn="l"/>
+            <a:pPr algn="l">
+              <a:spcBef>
+                <a:spcPts val="0"/>
+              </a:spcBef>
+              <a:spcAft>
+                <a:spcPts val="0"/>
+              </a:spcAft>
+            </a:pPr>
             <a:r>
               <a:rPr sz="1300" b="0">
                 <a:solidFill>
@@ -5484,7 +5871,14 @@
           </a:bodyPr>
           <a:lstStyle/>
           <a:p>
-            <a:pPr algn="r"/>
+            <a:pPr algn="r">
+              <a:spcBef>
+                <a:spcPts val="0"/>
+              </a:spcBef>
+              <a:spcAft>
+                <a:spcPts val="0"/>
+              </a:spcAft>
+            </a:pPr>
             <a:r>
               <a:rPr sz="900" b="0">
                 <a:solidFill>
@@ -5563,7 +5957,14 @@
           </a:bodyPr>
           <a:lstStyle/>
           <a:p>
-            <a:pPr algn="l"/>
+            <a:pPr algn="l">
+              <a:spcBef>
+                <a:spcPts val="0"/>
+              </a:spcBef>
+              <a:spcAft>
+                <a:spcPts val="0"/>
+              </a:spcAft>
+            </a:pPr>
             <a:r>
               <a:rPr sz="1500" b="0">
                 <a:solidFill>
@@ -5571,7 +5972,7 @@
                 </a:solidFill>
                 <a:latin typeface="Calibri"/>
               </a:rPr>
-              <a:t>In-memory mode lives entirely in RAM for this process. Persistent mode writes real files to disk at the path you give it.</a:t>
+              <a:t>In-memory mode lives only in RAM for this process. Persistent mode writes real files to disk at the path you give it.</a:t>
             </a:r>
           </a:p>
         </p:txBody>
@@ -5642,6 +6043,14 @@
           </a:bodyPr>
           <a:lstStyle/>
           <a:p>
+            <a:pPr>
+              <a:spcBef>
+                <a:spcPts val="0"/>
+              </a:spcBef>
+              <a:spcAft>
+                <a:spcPts val="0"/>
+              </a:spcAft>
+            </a:pPr>
             <a:r>
               <a:rPr sz="1300" b="0">
                 <a:solidFill>
@@ -5653,6 +6062,14 @@
             </a:r>
           </a:p>
           <a:p>
+            <a:pPr>
+              <a:spcBef>
+                <a:spcPts val="0"/>
+              </a:spcBef>
+              <a:spcAft>
+                <a:spcPts val="0"/>
+              </a:spcAft>
+            </a:pPr>
             <a:r>
               <a:rPr sz="1300" b="0">
                 <a:solidFill>
@@ -5664,6 +6081,14 @@
             </a:r>
           </a:p>
           <a:p>
+            <a:pPr>
+              <a:spcBef>
+                <a:spcPts val="0"/>
+              </a:spcBef>
+              <a:spcAft>
+                <a:spcPts val="0"/>
+              </a:spcAft>
+            </a:pPr>
             <a:r>
               <a:rPr sz="1300" b="0">
                 <a:solidFill>
@@ -5675,6 +6100,14 @@
             </a:r>
           </a:p>
           <a:p>
+            <a:pPr>
+              <a:spcBef>
+                <a:spcPts val="0"/>
+              </a:spcBef>
+              <a:spcAft>
+                <a:spcPts val="0"/>
+              </a:spcAft>
+            </a:pPr>
             <a:r>
               <a:rPr sz="1300" b="0">
                 <a:solidFill>
@@ -5686,6 +6119,14 @@
             </a:r>
           </a:p>
           <a:p>
+            <a:pPr>
+              <a:spcBef>
+                <a:spcPts val="0"/>
+              </a:spcBef>
+              <a:spcAft>
+                <a:spcPts val="0"/>
+              </a:spcAft>
+            </a:pPr>
             <a:r>
               <a:rPr sz="1300" b="1">
                 <a:solidFill>
@@ -5697,6 +6138,14 @@
             </a:r>
           </a:p>
           <a:p>
+            <a:pPr>
+              <a:spcBef>
+                <a:spcPts val="0"/>
+              </a:spcBef>
+              <a:spcAft>
+                <a:spcPts val="0"/>
+              </a:spcAft>
+            </a:pPr>
             <a:r>
               <a:rPr sz="1300" b="0">
                 <a:solidFill>
@@ -5708,6 +6157,14 @@
             </a:r>
           </a:p>
           <a:p>
+            <a:pPr>
+              <a:spcBef>
+                <a:spcPts val="0"/>
+              </a:spcBef>
+              <a:spcAft>
+                <a:spcPts val="0"/>
+              </a:spcAft>
+            </a:pPr>
             <a:r>
               <a:rPr sz="1300" b="0">
                 <a:solidFill>
@@ -5768,7 +6225,14 @@
           </a:bodyPr>
           <a:lstStyle/>
           <a:p>
-            <a:pPr algn="l"/>
+            <a:pPr algn="l">
+              <a:spcBef>
+                <a:spcPts val="0"/>
+              </a:spcBef>
+              <a:spcAft>
+                <a:spcPts val="0"/>
+              </a:spcAft>
+            </a:pPr>
             <a:r>
               <a:rPr sz="2600" b="1">
                 <a:solidFill>
@@ -5776,7 +6240,7 @@
                 </a:solidFill>
                 <a:latin typeface="Cambria"/>
               </a:rPr>
-              <a:t>Analogy: in-memory vs. persistent = container fs vs. a mounted volume</a:t>
+              <a:t>Analogy: in-memory vs. persistent = temp disk vs. a volume</a:t>
             </a:r>
           </a:p>
         </p:txBody>
@@ -5803,7 +6267,14 @@
           </a:bodyPr>
           <a:lstStyle/>
           <a:p>
-            <a:pPr algn="l"/>
+            <a:pPr algn="l">
+              <a:spcBef>
+                <a:spcPts val="0"/>
+              </a:spcBef>
+              <a:spcAft>
+                <a:spcPts val="0"/>
+              </a:spcAft>
+            </a:pPr>
             <a:r>
               <a:rPr sz="1300" b="0">
                 <a:solidFill>
@@ -5811,7 +6282,7 @@
                 </a:solidFill>
                 <a:latin typeface="Calibri"/>
               </a:rPr>
-              <a:t>The exact trade-off you already make for every container</a:t>
+              <a:t>The same trade-off you already make for every container</a:t>
             </a:r>
           </a:p>
         </p:txBody>
@@ -5838,7 +6309,14 @@
           </a:bodyPr>
           <a:lstStyle/>
           <a:p>
-            <a:pPr algn="r"/>
+            <a:pPr algn="r">
+              <a:spcBef>
+                <a:spcPts val="0"/>
+              </a:spcBef>
+              <a:spcAft>
+                <a:spcPts val="0"/>
+              </a:spcAft>
+            </a:pPr>
             <a:r>
               <a:rPr sz="900" b="0">
                 <a:solidFill>
@@ -5860,7 +6338,7 @@
         <p:spPr>
           <a:xfrm>
             <a:off x="822960" y="1737360"/>
-            <a:ext cx="4480560" cy="2926080"/>
+            <a:ext cx="5029200" cy="2926080"/>
           </a:xfrm>
           <a:prstGeom prst="rect">
             <a:avLst/>
@@ -5904,20 +6382,27 @@
         <p:spPr>
           <a:xfrm>
             <a:off x="1051560" y="1920240"/>
-            <a:ext cx="4023360" cy="365760"/>
-          </a:xfrm>
-          <a:prstGeom prst="rect">
-            <a:avLst/>
-          </a:prstGeom>
-          <a:noFill/>
-        </p:spPr>
-        <p:txBody>
-          <a:bodyPr wrap="square">
-            <a:spAutoFit/>
-          </a:bodyPr>
-          <a:lstStyle/>
-          <a:p>
-            <a:pPr algn="l"/>
+            <a:ext cx="4572000" cy="365760"/>
+          </a:xfrm>
+          <a:prstGeom prst="rect">
+            <a:avLst/>
+          </a:prstGeom>
+          <a:noFill/>
+        </p:spPr>
+        <p:txBody>
+          <a:bodyPr wrap="square">
+            <a:spAutoFit/>
+          </a:bodyPr>
+          <a:lstStyle/>
+          <a:p>
+            <a:pPr algn="l">
+              <a:spcBef>
+                <a:spcPts val="0"/>
+              </a:spcBef>
+              <a:spcAft>
+                <a:spcPts val="0"/>
+              </a:spcAft>
+            </a:pPr>
             <a:r>
               <a:rPr sz="1200" b="1">
                 <a:solidFill>
@@ -5925,7 +6410,7 @@
                 </a:solidFill>
                 <a:latin typeface="Calibri"/>
               </a:rPr>
-              <a:t>CONTAINER FILESYSTEM</a:t>
+              <a:t>TEMP CONTAINER FILESYSTEM</a:t>
             </a:r>
           </a:p>
         </p:txBody>
@@ -5939,20 +6424,27 @@
         <p:spPr>
           <a:xfrm>
             <a:off x="1051560" y="2331720"/>
-            <a:ext cx="4023360" cy="2103120"/>
-          </a:xfrm>
-          <a:prstGeom prst="rect">
-            <a:avLst/>
-          </a:prstGeom>
-          <a:noFill/>
-        </p:spPr>
-        <p:txBody>
-          <a:bodyPr wrap="square">
-            <a:spAutoFit/>
-          </a:bodyPr>
-          <a:lstStyle/>
-          <a:p>
-            <a:pPr algn="l"/>
+            <a:ext cx="4572000" cy="2103120"/>
+          </a:xfrm>
+          <a:prstGeom prst="rect">
+            <a:avLst/>
+          </a:prstGeom>
+          <a:noFill/>
+        </p:spPr>
+        <p:txBody>
+          <a:bodyPr wrap="square">
+            <a:spAutoFit/>
+          </a:bodyPr>
+          <a:lstStyle/>
+          <a:p>
+            <a:pPr algn="l">
+              <a:spcBef>
+                <a:spcPts val="0"/>
+              </a:spcBef>
+              <a:spcAft>
+                <a:spcPts val="0"/>
+              </a:spcAft>
+            </a:pPr>
             <a:r>
               <a:rPr sz="1400" b="0">
                 <a:solidFill>
@@ -5960,11 +6452,18 @@
                 </a:solidFill>
                 <a:latin typeface="Calibri"/>
               </a:rPr>
-              <a:t>Fast, simple, and gone the instant the container restarts -- unless you explicitly mount a volume.</a:t>
-            </a:r>
-          </a:p>
-          <a:p>
-            <a:pPr algn="l"/>
+              <a:t>Fast and simple -- but gone when the container restarts, unless you mount a volume.</a:t>
+            </a:r>
+          </a:p>
+          <a:p>
+            <a:pPr algn="l">
+              <a:spcBef>
+                <a:spcPts val="0"/>
+              </a:spcBef>
+              <a:spcAft>
+                <a:spcPts val="0"/>
+              </a:spcAft>
+            </a:pPr>
             <a:r>
               <a:rPr sz="1400" b="0">
                 <a:solidFill>
@@ -5976,7 +6475,14 @@
             </a:r>
           </a:p>
           <a:p>
-            <a:pPr algn="l"/>
+            <a:pPr algn="l">
+              <a:spcBef>
+                <a:spcPts val="0"/>
+              </a:spcBef>
+              <a:spcAft>
+                <a:spcPts val="0"/>
+              </a:spcAft>
+            </a:pPr>
             <a:r>
               <a:rPr sz="1400" b="0">
                 <a:solidFill>
@@ -5984,7 +6490,7 @@
                 </a:solidFill>
                 <a:latin typeface="Calibri"/>
               </a:rPr>
-              <a:t>chromadb.Client() = the bare-container case.</a:t>
+              <a:t>chromadb.Client() = that temp disk case.</a:t>
             </a:r>
           </a:p>
         </p:txBody>
@@ -5997,8 +6503,8 @@
         </p:nvSpPr>
         <p:spPr>
           <a:xfrm>
-            <a:off x="6309360" y="1737360"/>
-            <a:ext cx="4480560" cy="2926080"/>
+            <a:off x="6126480" y="1737360"/>
+            <a:ext cx="5029200" cy="2926080"/>
           </a:xfrm>
           <a:prstGeom prst="rect">
             <a:avLst/>
@@ -6041,21 +6547,28 @@
         </p:nvSpPr>
         <p:spPr>
           <a:xfrm>
-            <a:off x="6537960" y="1920240"/>
-            <a:ext cx="4023360" cy="365760"/>
-          </a:xfrm>
-          <a:prstGeom prst="rect">
-            <a:avLst/>
-          </a:prstGeom>
-          <a:noFill/>
-        </p:spPr>
-        <p:txBody>
-          <a:bodyPr wrap="square">
-            <a:spAutoFit/>
-          </a:bodyPr>
-          <a:lstStyle/>
-          <a:p>
-            <a:pPr algn="l"/>
+            <a:off x="6355080" y="1920240"/>
+            <a:ext cx="4572000" cy="365760"/>
+          </a:xfrm>
+          <a:prstGeom prst="rect">
+            <a:avLst/>
+          </a:prstGeom>
+          <a:noFill/>
+        </p:spPr>
+        <p:txBody>
+          <a:bodyPr wrap="square">
+            <a:spAutoFit/>
+          </a:bodyPr>
+          <a:lstStyle/>
+          <a:p>
+            <a:pPr algn="l">
+              <a:spcBef>
+                <a:spcPts val="0"/>
+              </a:spcBef>
+              <a:spcAft>
+                <a:spcPts val="0"/>
+              </a:spcAft>
+            </a:pPr>
             <a:r>
               <a:rPr sz="1200" b="1">
                 <a:solidFill>
@@ -6063,7 +6576,7 @@
                 </a:solidFill>
                 <a:latin typeface="Calibri"/>
               </a:rPr>
-              <a:t>MOUNTED VOLUME</a:t>
+              <a:t>MOUNTED VOLUME / SAVED FILE</a:t>
             </a:r>
           </a:p>
         </p:txBody>
@@ -6076,21 +6589,28 @@
         </p:nvSpPr>
         <p:spPr>
           <a:xfrm>
-            <a:off x="6537960" y="2331720"/>
-            <a:ext cx="4023360" cy="2103120"/>
-          </a:xfrm>
-          <a:prstGeom prst="rect">
-            <a:avLst/>
-          </a:prstGeom>
-          <a:noFill/>
-        </p:spPr>
-        <p:txBody>
-          <a:bodyPr wrap="square">
-            <a:spAutoFit/>
-          </a:bodyPr>
-          <a:lstStyle/>
-          <a:p>
-            <a:pPr algn="l"/>
+            <a:off x="6355080" y="2331720"/>
+            <a:ext cx="4572000" cy="2103120"/>
+          </a:xfrm>
+          <a:prstGeom prst="rect">
+            <a:avLst/>
+          </a:prstGeom>
+          <a:noFill/>
+        </p:spPr>
+        <p:txBody>
+          <a:bodyPr wrap="square">
+            <a:spAutoFit/>
+          </a:bodyPr>
+          <a:lstStyle/>
+          <a:p>
+            <a:pPr algn="l">
+              <a:spcBef>
+                <a:spcPts val="0"/>
+              </a:spcBef>
+              <a:spcAft>
+                <a:spcPts val="0"/>
+              </a:spcAft>
+            </a:pPr>
             <a:r>
               <a:rPr sz="1400" b="0">
                 <a:solidFill>
@@ -6098,11 +6618,18 @@
                 </a:solidFill>
                 <a:latin typeface="Calibri"/>
               </a:rPr>
-              <a:t>Data is written to real disk, backed by a path outside the container's own lifetime.</a:t>
-            </a:r>
-          </a:p>
-          <a:p>
-            <a:pPr algn="l"/>
+              <a:t>Data is written to real disk outside the process lifetime -- still there next run.</a:t>
+            </a:r>
+          </a:p>
+          <a:p>
+            <a:pPr algn="l">
+              <a:spcBef>
+                <a:spcPts val="0"/>
+              </a:spcBef>
+              <a:spcAft>
+                <a:spcPts val="0"/>
+              </a:spcAft>
+            </a:pPr>
             <a:r>
               <a:rPr sz="1400" b="0">
                 <a:solidFill>
@@ -6114,7 +6641,14 @@
             </a:r>
           </a:p>
           <a:p>
-            <a:pPr algn="l"/>
+            <a:pPr algn="l">
+              <a:spcBef>
+                <a:spcPts val="0"/>
+              </a:spcBef>
+              <a:spcAft>
+                <a:spcPts val="0"/>
+              </a:spcAft>
+            </a:pPr>
             <a:r>
               <a:rPr sz="1400" b="0">
                 <a:solidFill>
@@ -6122,7 +6656,7 @@
                 </a:solidFill>
                 <a:latin typeface="Calibri"/>
               </a:rPr>
-              <a:t>PersistentClient(path=...) = the mounted-volume case.</a:t>
+              <a:t>PersistentClient(path=...) = the volume case.</a:t>
             </a:r>
           </a:p>
         </p:txBody>
@@ -6175,7 +6709,14 @@
           </a:bodyPr>
           <a:lstStyle/>
           <a:p>
-            <a:pPr algn="l"/>
+            <a:pPr algn="l">
+              <a:spcBef>
+                <a:spcPts val="0"/>
+              </a:spcBef>
+              <a:spcAft>
+                <a:spcPts val="0"/>
+              </a:spcAft>
+            </a:pPr>
             <a:r>
               <a:rPr sz="1300" b="1">
                 <a:solidFill>
@@ -6183,7 +6724,7 @@
                 </a:solidFill>
                 <a:latin typeface="Calibri"/>
               </a:rPr>
-              <a:t>THEORY 5  |  SLIDES 17-18</a:t>
+              <a:t>THEORY 5  |  SLIDES 18-19</a:t>
             </a:r>
           </a:p>
         </p:txBody>
@@ -6210,7 +6751,14 @@
           </a:bodyPr>
           <a:lstStyle/>
           <a:p>
-            <a:pPr algn="l"/>
+            <a:pPr algn="l">
+              <a:spcBef>
+                <a:spcPts val="0"/>
+              </a:spcBef>
+              <a:spcAft>
+                <a:spcPts val="0"/>
+              </a:spcAft>
+            </a:pPr>
             <a:r>
               <a:rPr sz="4000" b="1">
                 <a:solidFill>
@@ -6245,7 +6793,14 @@
           </a:bodyPr>
           <a:lstStyle/>
           <a:p>
-            <a:pPr algn="l"/>
+            <a:pPr algn="l">
+              <a:spcBef>
+                <a:spcPts val="0"/>
+              </a:spcBef>
+              <a:spcAft>
+                <a:spcPts val="0"/>
+              </a:spcAft>
+            </a:pPr>
             <a:r>
               <a:rPr sz="1600" b="0">
                 <a:solidFill>
@@ -6253,7 +6808,7 @@
                 </a:solidFill>
                 <a:latin typeface="Cambria"/>
               </a:rPr>
-              <a:t>Same output shape, very different operational trade-offs</a:t>
+              <a:t>Same kind of vector -- different place it runs</a:t>
             </a:r>
           </a:p>
         </p:txBody>
@@ -6280,7 +6835,14 @@
           </a:bodyPr>
           <a:lstStyle/>
           <a:p>
-            <a:pPr algn="r"/>
+            <a:pPr algn="r">
+              <a:spcBef>
+                <a:spcPts val="0"/>
+              </a:spcBef>
+              <a:spcAft>
+                <a:spcPts val="0"/>
+              </a:spcAft>
+            </a:pPr>
             <a:r>
               <a:rPr sz="900" b="0">
                 <a:solidFill>
@@ -6341,7 +6903,14 @@
           </a:bodyPr>
           <a:lstStyle/>
           <a:p>
-            <a:pPr algn="l"/>
+            <a:pPr algn="l">
+              <a:spcBef>
+                <a:spcPts val="0"/>
+              </a:spcBef>
+              <a:spcAft>
+                <a:spcPts val="0"/>
+              </a:spcAft>
+            </a:pPr>
             <a:r>
               <a:rPr sz="2600" b="1">
                 <a:solidFill>
@@ -6376,7 +6945,14 @@
           </a:bodyPr>
           <a:lstStyle/>
           <a:p>
-            <a:pPr algn="l"/>
+            <a:pPr algn="l">
+              <a:spcBef>
+                <a:spcPts val="0"/>
+              </a:spcBef>
+              <a:spcAft>
+                <a:spcPts val="0"/>
+              </a:spcAft>
+            </a:pPr>
             <a:r>
               <a:rPr sz="1300" b="0">
                 <a:solidFill>
@@ -6411,7 +6987,14 @@
           </a:bodyPr>
           <a:lstStyle/>
           <a:p>
-            <a:pPr algn="r"/>
+            <a:pPr algn="r">
+              <a:spcBef>
+                <a:spcPts val="0"/>
+              </a:spcBef>
+              <a:spcAft>
+                <a:spcPts val="0"/>
+              </a:spcAft>
+            </a:pPr>
             <a:r>
               <a:rPr sz="900" b="0">
                 <a:solidFill>
@@ -6446,7 +7029,14 @@
           </a:bodyPr>
           <a:lstStyle/>
           <a:p>
-            <a:pPr algn="l"/>
+            <a:pPr algn="l">
+              <a:spcBef>
+                <a:spcPts val="0"/>
+              </a:spcBef>
+              <a:spcAft>
+                <a:spcPts val="0"/>
+              </a:spcAft>
+            </a:pPr>
             <a:r>
               <a:rPr sz="1100" b="1">
                 <a:solidFill>
@@ -6454,7 +7044,7 @@
                 </a:solidFill>
                 <a:latin typeface="Calibri"/>
               </a:rPr>
-              <a:t>LOCAL (sentence-transformers)</a:t>
+              <a:t>LOCAL (ON YOUR MACHINE)</a:t>
             </a:r>
           </a:p>
         </p:txBody>
@@ -6481,7 +7071,14 @@
           </a:bodyPr>
           <a:lstStyle/>
           <a:p>
-            <a:pPr algn="l"/>
+            <a:pPr algn="l">
+              <a:spcBef>
+                <a:spcPts val="0"/>
+              </a:spcBef>
+              <a:spcAft>
+                <a:spcPts val="0"/>
+              </a:spcAft>
+            </a:pPr>
             <a:r>
               <a:rPr sz="1100" b="1">
                 <a:solidFill>
@@ -6489,7 +7086,7 @@
                 </a:solidFill>
                 <a:latin typeface="Calibri"/>
               </a:rPr>
-              <a:t>HOSTED API</a:t>
+              <a:t>HOSTED CLOUD API</a:t>
             </a:r>
           </a:p>
         </p:txBody>
@@ -6560,7 +7157,14 @@
           </a:bodyPr>
           <a:lstStyle/>
           <a:p>
-            <a:pPr algn="l"/>
+            <a:pPr algn="l">
+              <a:spcBef>
+                <a:spcPts val="0"/>
+              </a:spcBef>
+              <a:spcAft>
+                <a:spcPts val="0"/>
+              </a:spcAft>
+            </a:pPr>
             <a:r>
               <a:rPr sz="1300" b="1">
                 <a:solidFill>
@@ -6568,7 +7172,7 @@
                 </a:solidFill>
                 <a:latin typeface="Calibri"/>
               </a:rPr>
-              <a:t>No API key, runs on your own CPU</a:t>
+              <a:t>No API key, runs on your own CPU / laptop</a:t>
             </a:r>
           </a:p>
         </p:txBody>
@@ -6639,7 +7243,14 @@
           </a:bodyPr>
           <a:lstStyle/>
           <a:p>
-            <a:pPr algn="l"/>
+            <a:pPr algn="l">
+              <a:spcBef>
+                <a:spcPts val="0"/>
+              </a:spcBef>
+              <a:spcAft>
+                <a:spcPts val="0"/>
+              </a:spcAft>
+            </a:pPr>
             <a:r>
               <a:rPr sz="1300" b="1">
                 <a:solidFill>
@@ -6647,7 +7258,7 @@
                 </a:solidFill>
                 <a:latin typeface="Calibri"/>
               </a:rPr>
-              <a:t>Pay-per-call, zero infrastructure to run</a:t>
+              <a:t>Pay-per-call, zero infra for you to run</a:t>
             </a:r>
           </a:p>
         </p:txBody>
@@ -6718,7 +7329,14 @@
           </a:bodyPr>
           <a:lstStyle/>
           <a:p>
-            <a:pPr algn="l"/>
+            <a:pPr algn="l">
+              <a:spcBef>
+                <a:spcPts val="0"/>
+              </a:spcBef>
+              <a:spcAft>
+                <a:spcPts val="0"/>
+              </a:spcAft>
+            </a:pPr>
             <a:r>
               <a:rPr sz="1300" b="1">
                 <a:solidFill>
@@ -6797,7 +7415,14 @@
           </a:bodyPr>
           <a:lstStyle/>
           <a:p>
-            <a:pPr algn="l"/>
+            <a:pPr algn="l">
+              <a:spcBef>
+                <a:spcPts val="0"/>
+              </a:spcBef>
+              <a:spcAft>
+                <a:spcPts val="0"/>
+              </a:spcAft>
+            </a:pPr>
             <a:r>
               <a:rPr sz="1300" b="1">
                 <a:solidFill>
@@ -6805,7 +7430,7 @@
                 </a:solidFill>
                 <a:latin typeface="Calibri"/>
               </a:rPr>
-              <a:t>A network dependency for every embed call</a:t>
+              <a:t>A network call on every embed</a:t>
             </a:r>
           </a:p>
         </p:txBody>
@@ -6876,7 +7501,14 @@
           </a:bodyPr>
           <a:lstStyle/>
           <a:p>
-            <a:pPr algn="l"/>
+            <a:pPr algn="l">
+              <a:spcBef>
+                <a:spcPts val="0"/>
+              </a:spcBef>
+              <a:spcAft>
+                <a:spcPts val="0"/>
+              </a:spcAft>
+            </a:pPr>
             <a:r>
               <a:rPr sz="1300" b="1">
                 <a:solidFill>
@@ -6884,7 +7516,7 @@
                 </a:solidFill>
                 <a:latin typeface="Calibri"/>
               </a:rPr>
-              <a:t>You control the exact model version</a:t>
+              <a:t>You pick (and pin) the model version</a:t>
             </a:r>
           </a:p>
         </p:txBody>
@@ -6955,7 +7587,14 @@
           </a:bodyPr>
           <a:lstStyle/>
           <a:p>
-            <a:pPr algn="l"/>
+            <a:pPr algn="l">
+              <a:spcBef>
+                <a:spcPts val="0"/>
+              </a:spcBef>
+              <a:spcAft>
+                <a:spcPts val="0"/>
+              </a:spcAft>
+            </a:pPr>
             <a:r>
               <a:rPr sz="1300" b="1">
                 <a:solidFill>
@@ -6963,7 +7602,7 @@
                 </a:solidFill>
                 <a:latin typeface="Calibri"/>
               </a:rPr>
-              <a:t>The provider controls versioning and uptime</a:t>
+              <a:t>The provider controls versioning &amp; uptime</a:t>
             </a:r>
           </a:p>
         </p:txBody>
@@ -7016,7 +7655,14 @@
           </a:bodyPr>
           <a:lstStyle/>
           <a:p>
-            <a:pPr algn="l"/>
+            <a:pPr algn="l">
+              <a:spcBef>
+                <a:spcPts val="0"/>
+              </a:spcBef>
+              <a:spcAft>
+                <a:spcPts val="0"/>
+              </a:spcAft>
+            </a:pPr>
             <a:r>
               <a:rPr sz="2600" b="1">
                 <a:solidFill>
@@ -7024,7 +7670,7 @@
                 </a:solidFill>
                 <a:latin typeface="Cambria"/>
               </a:rPr>
-              <a:t>Analogy: local model vs. hosted API = self-hosted vs. managed SaaS</a:t>
+              <a:t>Analogy: local model vs. hosted API = laptop vs. cloud call</a:t>
             </a:r>
           </a:p>
         </p:txBody>
@@ -7051,7 +7697,14 @@
           </a:bodyPr>
           <a:lstStyle/>
           <a:p>
-            <a:pPr algn="l"/>
+            <a:pPr algn="l">
+              <a:spcBef>
+                <a:spcPts val="0"/>
+              </a:spcBef>
+              <a:spcAft>
+                <a:spcPts val="0"/>
+              </a:spcAft>
+            </a:pPr>
             <a:r>
               <a:rPr sz="1300" b="0">
                 <a:solidFill>
@@ -7059,7 +7712,7 @@
                 </a:solidFill>
                 <a:latin typeface="Calibri"/>
               </a:rPr>
-              <a:t>The exact trade-off behind self-hosting Elasticsearch vs. a managed search service</a:t>
+              <a:t>You already make this choice for lots of tools</a:t>
             </a:r>
           </a:p>
         </p:txBody>
@@ -7086,7 +7739,14 @@
           </a:bodyPr>
           <a:lstStyle/>
           <a:p>
-            <a:pPr algn="r"/>
+            <a:pPr algn="r">
+              <a:spcBef>
+                <a:spcPts val="0"/>
+              </a:spcBef>
+              <a:spcAft>
+                <a:spcPts val="0"/>
+              </a:spcAft>
+            </a:pPr>
             <a:r>
               <a:rPr sz="900" b="0">
                 <a:solidFill>
@@ -7108,7 +7768,7 @@
         <p:spPr>
           <a:xfrm>
             <a:off x="822960" y="1737360"/>
-            <a:ext cx="10058400" cy="1371600"/>
+            <a:ext cx="5029200" cy="2926080"/>
           </a:xfrm>
           <a:prstGeom prst="rect">
             <a:avLst/>
@@ -7151,43 +7811,130 @@
         </p:nvSpPr>
         <p:spPr>
           <a:xfrm>
-            <a:off x="1097280" y="1920240"/>
-            <a:ext cx="9509760" cy="1005840"/>
-          </a:xfrm>
-          <a:prstGeom prst="rect">
-            <a:avLst/>
-          </a:prstGeom>
-          <a:noFill/>
-        </p:spPr>
-        <p:txBody>
-          <a:bodyPr wrap="square">
-            <a:spAutoFit/>
-          </a:bodyPr>
-          <a:lstStyle/>
-          <a:p>
-            <a:pPr algn="l"/>
-            <a:r>
-              <a:rPr sz="1500" b="0">
+            <a:off x="1051560" y="1920240"/>
+            <a:ext cx="4572000" cy="365760"/>
+          </a:xfrm>
+          <a:prstGeom prst="rect">
+            <a:avLst/>
+          </a:prstGeom>
+          <a:noFill/>
+        </p:spPr>
+        <p:txBody>
+          <a:bodyPr wrap="square">
+            <a:spAutoFit/>
+          </a:bodyPr>
+          <a:lstStyle/>
+          <a:p>
+            <a:pPr algn="l">
+              <a:spcBef>
+                <a:spcPts val="0"/>
+              </a:spcBef>
+              <a:spcAft>
+                <a:spcPts val="0"/>
+              </a:spcAft>
+            </a:pPr>
+            <a:r>
+              <a:rPr sz="1200" b="1">
+                <a:solidFill>
+                  <a:srgbClr val="8895A7"/>
+                </a:solidFill>
+                <a:latin typeface="Calibri"/>
+              </a:rPr>
+              <a:t>RUN IT ON YOUR LAPTOP</a:t>
+            </a:r>
+          </a:p>
+        </p:txBody>
+      </p:sp>
+      <p:sp>
+        <p:nvSpPr>
+          <p:cNvPr id="7" name="TextBox 6"/>
+          <p:cNvSpPr txBox="1"/>
+          <p:nvPr/>
+        </p:nvSpPr>
+        <p:spPr>
+          <a:xfrm>
+            <a:off x="1051560" y="2331720"/>
+            <a:ext cx="4572000" cy="2103120"/>
+          </a:xfrm>
+          <a:prstGeom prst="rect">
+            <a:avLst/>
+          </a:prstGeom>
+          <a:noFill/>
+        </p:spPr>
+        <p:txBody>
+          <a:bodyPr wrap="square">
+            <a:spAutoFit/>
+          </a:bodyPr>
+          <a:lstStyle/>
+          <a:p>
+            <a:pPr algn="l">
+              <a:spcBef>
+                <a:spcPts val="0"/>
+              </a:spcBef>
+              <a:spcAft>
+                <a:spcPts val="0"/>
+              </a:spcAft>
+            </a:pPr>
+            <a:r>
+              <a:rPr sz="1400" b="0">
                 <a:solidFill>
                   <a:srgbClr val="0E1B2B"/>
                 </a:solidFill>
                 <a:latin typeface="Calibri"/>
               </a:rPr>
-              <a:t>Running sentence-transformers locally is like self-hosting your own Elasticsearch cluster: free, private, no network call, but you own the compute and the model version.</a:t>
-            </a:r>
-          </a:p>
-        </p:txBody>
-      </p:sp>
-      <p:sp>
-        <p:nvSpPr>
-          <p:cNvPr id="7" name="Rectangle 6"/>
+              <a:t>sentence-transformers downloads once, then runs offline on your CPU.</a:t>
+            </a:r>
+          </a:p>
+          <a:p>
+            <a:pPr algn="l">
+              <a:spcBef>
+                <a:spcPts val="0"/>
+              </a:spcBef>
+              <a:spcAft>
+                <a:spcPts val="0"/>
+              </a:spcAft>
+            </a:pPr>
+            <a:r>
+              <a:rPr sz="1400" b="0">
+                <a:solidFill>
+                  <a:srgbClr val="0E1B2B"/>
+                </a:solidFill>
+                <a:latin typeface="Calibri"/>
+              </a:rPr>
+              <a:t/>
+            </a:r>
+          </a:p>
+          <a:p>
+            <a:pPr algn="l">
+              <a:spcBef>
+                <a:spcPts val="0"/>
+              </a:spcBef>
+              <a:spcAft>
+                <a:spcPts val="0"/>
+              </a:spcAft>
+            </a:pPr>
+            <a:r>
+              <a:rPr sz="1400" b="0">
+                <a:solidFill>
+                  <a:srgbClr val="0E1B2B"/>
+                </a:solidFill>
+                <a:latin typeface="Calibri"/>
+              </a:rPr>
+              <a:t>Free after download. Private. You own the machine and the model file.</a:t>
+            </a:r>
+          </a:p>
+        </p:txBody>
+      </p:sp>
+      <p:sp>
+        <p:nvSpPr>
+          <p:cNvPr id="8" name="Rectangle 7"/>
           <p:cNvSpPr/>
           <p:nvPr/>
         </p:nvSpPr>
         <p:spPr>
           <a:xfrm>
-            <a:off x="822960" y="3291840"/>
-            <a:ext cx="10058400" cy="1371600"/>
+            <a:off x="6126480" y="1737360"/>
+            <a:ext cx="5029200" cy="2926080"/>
           </a:xfrm>
           <a:prstGeom prst="rect">
             <a:avLst/>
@@ -7224,35 +7971,122 @@
       </p:sp>
       <p:sp>
         <p:nvSpPr>
-          <p:cNvPr id="8" name="TextBox 7"/>
-          <p:cNvSpPr txBox="1"/>
-          <p:nvPr/>
-        </p:nvSpPr>
-        <p:spPr>
-          <a:xfrm>
-            <a:off x="1097280" y="3474720"/>
-            <a:ext cx="9509760" cy="1005840"/>
-          </a:xfrm>
-          <a:prstGeom prst="rect">
-            <a:avLst/>
-          </a:prstGeom>
-          <a:noFill/>
-        </p:spPr>
-        <p:txBody>
-          <a:bodyPr wrap="square">
-            <a:spAutoFit/>
-          </a:bodyPr>
-          <a:lstStyle/>
-          <a:p>
-            <a:pPr algn="l"/>
-            <a:r>
-              <a:rPr sz="1500" b="0">
+          <p:cNvPr id="9" name="TextBox 8"/>
+          <p:cNvSpPr txBox="1"/>
+          <p:nvPr/>
+        </p:nvSpPr>
+        <p:spPr>
+          <a:xfrm>
+            <a:off x="6355080" y="1920240"/>
+            <a:ext cx="4572000" cy="365760"/>
+          </a:xfrm>
+          <a:prstGeom prst="rect">
+            <a:avLst/>
+          </a:prstGeom>
+          <a:noFill/>
+        </p:spPr>
+        <p:txBody>
+          <a:bodyPr wrap="square">
+            <a:spAutoFit/>
+          </a:bodyPr>
+          <a:lstStyle/>
+          <a:p>
+            <a:pPr algn="l">
+              <a:spcBef>
+                <a:spcPts val="0"/>
+              </a:spcBef>
+              <a:spcAft>
+                <a:spcPts val="0"/>
+              </a:spcAft>
+            </a:pPr>
+            <a:r>
+              <a:rPr sz="1200" b="1">
+                <a:solidFill>
+                  <a:srgbClr val="E8A33D"/>
+                </a:solidFill>
+                <a:latin typeface="Calibri"/>
+              </a:rPr>
+              <a:t>CALL A CLOUD API</a:t>
+            </a:r>
+          </a:p>
+        </p:txBody>
+      </p:sp>
+      <p:sp>
+        <p:nvSpPr>
+          <p:cNvPr id="10" name="TextBox 9"/>
+          <p:cNvSpPr txBox="1"/>
+          <p:nvPr/>
+        </p:nvSpPr>
+        <p:spPr>
+          <a:xfrm>
+            <a:off x="6355080" y="2331720"/>
+            <a:ext cx="4572000" cy="2103120"/>
+          </a:xfrm>
+          <a:prstGeom prst="rect">
+            <a:avLst/>
+          </a:prstGeom>
+          <a:noFill/>
+        </p:spPr>
+        <p:txBody>
+          <a:bodyPr wrap="square">
+            <a:spAutoFit/>
+          </a:bodyPr>
+          <a:lstStyle/>
+          <a:p>
+            <a:pPr algn="l">
+              <a:spcBef>
+                <a:spcPts val="0"/>
+              </a:spcBef>
+              <a:spcAft>
+                <a:spcPts val="0"/>
+              </a:spcAft>
+            </a:pPr>
+            <a:r>
+              <a:rPr sz="1400" b="0">
                 <a:solidFill>
                   <a:srgbClr val="FFFFFF"/>
                 </a:solidFill>
                 <a:latin typeface="Calibri"/>
               </a:rPr>
-              <a:t>A hosted embedding API is the managed-SaaS trade: pay per call, zero ops, but a network dependency and a per-token bill -- same as choosing a managed database over running your own.</a:t>
+              <a:t>A hosted embed endpoint is like any other cloud API: send text, get numbers back.</a:t>
+            </a:r>
+          </a:p>
+          <a:p>
+            <a:pPr algn="l">
+              <a:spcBef>
+                <a:spcPts val="0"/>
+              </a:spcBef>
+              <a:spcAft>
+                <a:spcPts val="0"/>
+              </a:spcAft>
+            </a:pPr>
+            <a:r>
+              <a:rPr sz="1400" b="0">
+                <a:solidFill>
+                  <a:srgbClr val="FFFFFF"/>
+                </a:solidFill>
+                <a:latin typeface="Calibri"/>
+              </a:rPr>
+              <a:t/>
+            </a:r>
+          </a:p>
+          <a:p>
+            <a:pPr algn="l">
+              <a:spcBef>
+                <a:spcPts val="0"/>
+              </a:spcBef>
+              <a:spcAft>
+                <a:spcPts val="0"/>
+              </a:spcAft>
+            </a:pPr>
+            <a:r>
+              <a:rPr sz="1400" b="0">
+                <a:solidFill>
+                  <a:srgbClr val="FFFFFF"/>
+                </a:solidFill>
+                <a:latin typeface="Calibri"/>
+              </a:rPr>
+              <a:t>Easy ops. Pay per call. Needs network and an API key every time.</a:t>
             </a:r>
           </a:p>
         </p:txBody>
@@ -7305,7 +8139,14 @@
           </a:bodyPr>
           <a:lstStyle/>
           <a:p>
-            <a:pPr algn="l"/>
+            <a:pPr algn="l">
+              <a:spcBef>
+                <a:spcPts val="0"/>
+              </a:spcBef>
+              <a:spcAft>
+                <a:spcPts val="0"/>
+              </a:spcAft>
+            </a:pPr>
             <a:r>
               <a:rPr sz="2600" b="1">
                 <a:solidFill>
@@ -7340,7 +8181,14 @@
           </a:bodyPr>
           <a:lstStyle/>
           <a:p>
-            <a:pPr algn="l"/>
+            <a:pPr algn="l">
+              <a:spcBef>
+                <a:spcPts val="0"/>
+              </a:spcBef>
+              <a:spcAft>
+                <a:spcPts val="0"/>
+              </a:spcAft>
+            </a:pPr>
             <a:r>
               <a:rPr sz="1300" b="0">
                 <a:solidFill>
@@ -7348,7 +8196,7 @@
                 </a:solidFill>
                 <a:latin typeface="Calibri"/>
               </a:rPr>
-              <a:t>Five ideas -- each one mapped to something you already run in production</a:t>
+              <a:t>Five ideas -- each one mapped to something you already know from basic DevOps</a:t>
             </a:r>
           </a:p>
         </p:txBody>
@@ -7375,7 +8223,14 @@
           </a:bodyPr>
           <a:lstStyle/>
           <a:p>
-            <a:pPr algn="r"/>
+            <a:pPr algn="r">
+              <a:spcBef>
+                <a:spcPts val="0"/>
+              </a:spcBef>
+              <a:spcAft>
+                <a:spcPts val="0"/>
+              </a:spcAft>
+            </a:pPr>
             <a:r>
               <a:rPr sz="900" b="0">
                 <a:solidFill>
@@ -7450,20 +8305,27 @@
         <p:spPr>
           <a:xfrm>
             <a:off x="1371600" y="1536192"/>
-            <a:ext cx="5486400" cy="365760"/>
-          </a:xfrm>
-          <a:prstGeom prst="rect">
-            <a:avLst/>
-          </a:prstGeom>
-          <a:noFill/>
-        </p:spPr>
-        <p:txBody>
-          <a:bodyPr wrap="square">
-            <a:spAutoFit/>
-          </a:bodyPr>
-          <a:lstStyle/>
-          <a:p>
-            <a:pPr algn="l"/>
+            <a:ext cx="9601200" cy="365760"/>
+          </a:xfrm>
+          <a:prstGeom prst="rect">
+            <a:avLst/>
+          </a:prstGeom>
+          <a:noFill/>
+        </p:spPr>
+        <p:txBody>
+          <a:bodyPr wrap="square">
+            <a:spAutoFit/>
+          </a:bodyPr>
+          <a:lstStyle/>
+          <a:p>
+            <a:pPr algn="l">
+              <a:spcBef>
+                <a:spcPts val="0"/>
+              </a:spcBef>
+              <a:spcAft>
+                <a:spcPts val="0"/>
+              </a:spcAft>
+            </a:pPr>
             <a:r>
               <a:rPr sz="1700" b="1">
                 <a:solidFill>
@@ -7485,20 +8347,27 @@
         <p:spPr>
           <a:xfrm>
             <a:off x="1371600" y="1901952"/>
-            <a:ext cx="8686800" cy="320040"/>
-          </a:xfrm>
-          <a:prstGeom prst="rect">
-            <a:avLst/>
-          </a:prstGeom>
-          <a:noFill/>
-        </p:spPr>
-        <p:txBody>
-          <a:bodyPr wrap="square">
-            <a:spAutoFit/>
-          </a:bodyPr>
-          <a:lstStyle/>
-          <a:p>
-            <a:pPr algn="l"/>
+            <a:ext cx="9601200" cy="320040"/>
+          </a:xfrm>
+          <a:prstGeom prst="rect">
+            <a:avLst/>
+          </a:prstGeom>
+          <a:noFill/>
+        </p:spPr>
+        <p:txBody>
+          <a:bodyPr wrap="square">
+            <a:spAutoFit/>
+          </a:bodyPr>
+          <a:lstStyle/>
+          <a:p>
+            <a:pPr algn="l">
+              <a:spcBef>
+                <a:spcPts val="0"/>
+              </a:spcBef>
+              <a:spcAft>
+                <a:spcPts val="0"/>
+              </a:spcAft>
+            </a:pPr>
             <a:r>
               <a:rPr sz="1200" b="0">
                 <a:solidFill>
@@ -7506,7 +8375,7 @@
                 </a:solidFill>
                 <a:latin typeface="Calibri"/>
               </a:rPr>
-              <a:t>A fingerprint that means the opposite of a hash</a:t>
+              <a:t>A fingerprint of meaning (not a hash)</a:t>
             </a:r>
           </a:p>
         </p:txBody>
@@ -7573,20 +8442,27 @@
         <p:spPr>
           <a:xfrm>
             <a:off x="1371600" y="2313432"/>
-            <a:ext cx="5486400" cy="365760"/>
-          </a:xfrm>
-          <a:prstGeom prst="rect">
-            <a:avLst/>
-          </a:prstGeom>
-          <a:noFill/>
-        </p:spPr>
-        <p:txBody>
-          <a:bodyPr wrap="square">
-            <a:spAutoFit/>
-          </a:bodyPr>
-          <a:lstStyle/>
-          <a:p>
-            <a:pPr algn="l"/>
+            <a:ext cx="9601200" cy="365760"/>
+          </a:xfrm>
+          <a:prstGeom prst="rect">
+            <a:avLst/>
+          </a:prstGeom>
+          <a:noFill/>
+        </p:spPr>
+        <p:txBody>
+          <a:bodyPr wrap="square">
+            <a:spAutoFit/>
+          </a:bodyPr>
+          <a:lstStyle/>
+          <a:p>
+            <a:pPr algn="l">
+              <a:spcBef>
+                <a:spcPts val="0"/>
+              </a:spcBef>
+              <a:spcAft>
+                <a:spcPts val="0"/>
+              </a:spcAft>
+            </a:pPr>
             <a:r>
               <a:rPr sz="1700" b="1">
                 <a:solidFill>
@@ -7608,20 +8484,27 @@
         <p:spPr>
           <a:xfrm>
             <a:off x="1371600" y="2679191"/>
-            <a:ext cx="8686800" cy="320040"/>
-          </a:xfrm>
-          <a:prstGeom prst="rect">
-            <a:avLst/>
-          </a:prstGeom>
-          <a:noFill/>
-        </p:spPr>
-        <p:txBody>
-          <a:bodyPr wrap="square">
-            <a:spAutoFit/>
-          </a:bodyPr>
-          <a:lstStyle/>
-          <a:p>
-            <a:pPr algn="l"/>
+            <a:ext cx="9601200" cy="320040"/>
+          </a:xfrm>
+          <a:prstGeom prst="rect">
+            <a:avLst/>
+          </a:prstGeom>
+          <a:noFill/>
+        </p:spPr>
+        <p:txBody>
+          <a:bodyPr wrap="square">
+            <a:spAutoFit/>
+          </a:bodyPr>
+          <a:lstStyle/>
+          <a:p>
+            <a:pPr algn="l">
+              <a:spcBef>
+                <a:spcPts val="0"/>
+              </a:spcBef>
+              <a:spcAft>
+                <a:spcPts val="0"/>
+              </a:spcAft>
+            </a:pPr>
             <a:r>
               <a:rPr sz="1200" b="0">
                 <a:solidFill>
@@ -7629,7 +8512,7 @@
                 </a:solidFill>
                 <a:latin typeface="Calibri"/>
               </a:rPr>
-              <a:t>How “closeness” is measured and searched</a:t>
+              <a:t>How close two arrows point in the same direction</a:t>
             </a:r>
           </a:p>
         </p:txBody>
@@ -7696,20 +8579,27 @@
         <p:spPr>
           <a:xfrm>
             <a:off x="1371600" y="3090672"/>
-            <a:ext cx="5486400" cy="365760"/>
-          </a:xfrm>
-          <a:prstGeom prst="rect">
-            <a:avLst/>
-          </a:prstGeom>
-          <a:noFill/>
-        </p:spPr>
-        <p:txBody>
-          <a:bodyPr wrap="square">
-            <a:spAutoFit/>
-          </a:bodyPr>
-          <a:lstStyle/>
-          <a:p>
-            <a:pPr algn="l"/>
+            <a:ext cx="9601200" cy="365760"/>
+          </a:xfrm>
+          <a:prstGeom prst="rect">
+            <a:avLst/>
+          </a:prstGeom>
+          <a:noFill/>
+        </p:spPr>
+        <p:txBody>
+          <a:bodyPr wrap="square">
+            <a:spAutoFit/>
+          </a:bodyPr>
+          <a:lstStyle/>
+          <a:p>
+            <a:pPr algn="l">
+              <a:spcBef>
+                <a:spcPts val="0"/>
+              </a:spcBef>
+              <a:spcAft>
+                <a:spcPts val="0"/>
+              </a:spcAft>
+            </a:pPr>
             <a:r>
               <a:rPr sz="1700" b="1">
                 <a:solidFill>
@@ -7717,7 +8607,7 @@
                 </a:solidFill>
                 <a:latin typeface="Cambria"/>
               </a:rPr>
-              <a:t>Vector databases: why not just Postgres?</a:t>
+              <a:t>Vector databases: why a special store?</a:t>
             </a:r>
           </a:p>
         </p:txBody>
@@ -7731,20 +8621,27 @@
         <p:spPr>
           <a:xfrm>
             <a:off x="1371600" y="3456432"/>
-            <a:ext cx="8686800" cy="320040"/>
-          </a:xfrm>
-          <a:prstGeom prst="rect">
-            <a:avLst/>
-          </a:prstGeom>
-          <a:noFill/>
-        </p:spPr>
-        <p:txBody>
-          <a:bodyPr wrap="square">
-            <a:spAutoFit/>
-          </a:bodyPr>
-          <a:lstStyle/>
-          <a:p>
-            <a:pPr algn="l"/>
+            <a:ext cx="9601200" cy="320040"/>
+          </a:xfrm>
+          <a:prstGeom prst="rect">
+            <a:avLst/>
+          </a:prstGeom>
+          <a:noFill/>
+        </p:spPr>
+        <p:txBody>
+          <a:bodyPr wrap="square">
+            <a:spAutoFit/>
+          </a:bodyPr>
+          <a:lstStyle/>
+          <a:p>
+            <a:pPr algn="l">
+              <a:spcBef>
+                <a:spcPts val="0"/>
+              </a:spcBef>
+              <a:spcAft>
+                <a:spcPts val="0"/>
+              </a:spcAft>
+            </a:pPr>
             <a:r>
               <a:rPr sz="1200" b="0">
                 <a:solidFill>
@@ -7752,7 +8649,7 @@
                 </a:solidFill>
                 <a:latin typeface="Calibri"/>
               </a:rPr>
-              <a:t>A purpose-built index, like Prometheus for metrics</a:t>
+              <a:t>A search index for meaning, not exact keywords</a:t>
             </a:r>
           </a:p>
         </p:txBody>
@@ -7819,20 +8716,27 @@
         <p:spPr>
           <a:xfrm>
             <a:off x="1371600" y="3867912"/>
-            <a:ext cx="5486400" cy="365760"/>
-          </a:xfrm>
-          <a:prstGeom prst="rect">
-            <a:avLst/>
-          </a:prstGeom>
-          <a:noFill/>
-        </p:spPr>
-        <p:txBody>
-          <a:bodyPr wrap="square">
-            <a:spAutoFit/>
-          </a:bodyPr>
-          <a:lstStyle/>
-          <a:p>
-            <a:pPr algn="l"/>
+            <a:ext cx="9601200" cy="365760"/>
+          </a:xfrm>
+          <a:prstGeom prst="rect">
+            <a:avLst/>
+          </a:prstGeom>
+          <a:noFill/>
+        </p:spPr>
+        <p:txBody>
+          <a:bodyPr wrap="square">
+            <a:spAutoFit/>
+          </a:bodyPr>
+          <a:lstStyle/>
+          <a:p>
+            <a:pPr algn="l">
+              <a:spcBef>
+                <a:spcPts val="0"/>
+              </a:spcBef>
+              <a:spcAft>
+                <a:spcPts val="0"/>
+              </a:spcAft>
+            </a:pPr>
             <a:r>
               <a:rPr sz="1700" b="1">
                 <a:solidFill>
@@ -7854,20 +8758,27 @@
         <p:spPr>
           <a:xfrm>
             <a:off x="1371600" y="4233672"/>
-            <a:ext cx="8686800" cy="320040"/>
-          </a:xfrm>
-          <a:prstGeom prst="rect">
-            <a:avLst/>
-          </a:prstGeom>
-          <a:noFill/>
-        </p:spPr>
-        <p:txBody>
-          <a:bodyPr wrap="square">
-            <a:spAutoFit/>
-          </a:bodyPr>
-          <a:lstStyle/>
-          <a:p>
-            <a:pPr algn="l"/>
+            <a:ext cx="9601200" cy="320040"/>
+          </a:xfrm>
+          <a:prstGeom prst="rect">
+            <a:avLst/>
+          </a:prstGeom>
+          <a:noFill/>
+        </p:spPr>
+        <p:txBody>
+          <a:bodyPr wrap="square">
+            <a:spAutoFit/>
+          </a:bodyPr>
+          <a:lstStyle/>
+          <a:p>
+            <a:pPr algn="l">
+              <a:spcBef>
+                <a:spcPts val="0"/>
+              </a:spcBef>
+              <a:spcAft>
+                <a:spcPts val="0"/>
+              </a:spcAft>
+            </a:pPr>
             <a:r>
               <a:rPr sz="1200" b="0">
                 <a:solidFill>
@@ -7875,7 +8786,7 @@
                 </a:solidFill>
                 <a:latin typeface="Calibri"/>
               </a:rPr>
-              <a:t>Ephemeral container filesystem vs. a mounted volume</a:t>
+              <a:t>Temp container filesystem vs. a mounted volume</a:t>
             </a:r>
           </a:p>
         </p:txBody>
@@ -7942,20 +8853,27 @@
         <p:spPr>
           <a:xfrm>
             <a:off x="1371600" y="4645152"/>
-            <a:ext cx="5486400" cy="365760"/>
-          </a:xfrm>
-          <a:prstGeom prst="rect">
-            <a:avLst/>
-          </a:prstGeom>
-          <a:noFill/>
-        </p:spPr>
-        <p:txBody>
-          <a:bodyPr wrap="square">
-            <a:spAutoFit/>
-          </a:bodyPr>
-          <a:lstStyle/>
-          <a:p>
-            <a:pPr algn="l"/>
+            <a:ext cx="9601200" cy="365760"/>
+          </a:xfrm>
+          <a:prstGeom prst="rect">
+            <a:avLst/>
+          </a:prstGeom>
+          <a:noFill/>
+        </p:spPr>
+        <p:txBody>
+          <a:bodyPr wrap="square">
+            <a:spAutoFit/>
+          </a:bodyPr>
+          <a:lstStyle/>
+          <a:p>
+            <a:pPr algn="l">
+              <a:spcBef>
+                <a:spcPts val="0"/>
+              </a:spcBef>
+              <a:spcAft>
+                <a:spcPts val="0"/>
+              </a:spcAft>
+            </a:pPr>
             <a:r>
               <a:rPr sz="1700" b="1">
                 <a:solidFill>
@@ -7977,20 +8895,27 @@
         <p:spPr>
           <a:xfrm>
             <a:off x="1371600" y="5010912"/>
-            <a:ext cx="8686800" cy="320040"/>
-          </a:xfrm>
-          <a:prstGeom prst="rect">
-            <a:avLst/>
-          </a:prstGeom>
-          <a:noFill/>
-        </p:spPr>
-        <p:txBody>
-          <a:bodyPr wrap="square">
-            <a:spAutoFit/>
-          </a:bodyPr>
-          <a:lstStyle/>
-          <a:p>
-            <a:pPr algn="l"/>
+            <a:ext cx="9601200" cy="320040"/>
+          </a:xfrm>
+          <a:prstGeom prst="rect">
+            <a:avLst/>
+          </a:prstGeom>
+          <a:noFill/>
+        </p:spPr>
+        <p:txBody>
+          <a:bodyPr wrap="square">
+            <a:spAutoFit/>
+          </a:bodyPr>
+          <a:lstStyle/>
+          <a:p>
+            <a:pPr algn="l">
+              <a:spcBef>
+                <a:spcPts val="0"/>
+              </a:spcBef>
+              <a:spcAft>
+                <a:spcPts val="0"/>
+              </a:spcAft>
+            </a:pPr>
             <a:r>
               <a:rPr sz="1200" b="0">
                 <a:solidFill>
@@ -7998,7 +8923,7 @@
                 </a:solidFill>
                 <a:latin typeface="Calibri"/>
               </a:rPr>
-              <a:t>Self-hosted vs. managed SaaS</a:t>
+              <a:t>On your laptop vs. calling a cloud API</a:t>
             </a:r>
           </a:p>
         </p:txBody>
@@ -8065,20 +8990,27 @@
         <p:spPr>
           <a:xfrm>
             <a:off x="1371600" y="5422392"/>
-            <a:ext cx="5486400" cy="365760"/>
-          </a:xfrm>
-          <a:prstGeom prst="rect">
-            <a:avLst/>
-          </a:prstGeom>
-          <a:noFill/>
-        </p:spPr>
-        <p:txBody>
-          <a:bodyPr wrap="square">
-            <a:spAutoFit/>
-          </a:bodyPr>
-          <a:lstStyle/>
-          <a:p>
-            <a:pPr algn="l"/>
+            <a:ext cx="9601200" cy="365760"/>
+          </a:xfrm>
+          <a:prstGeom prst="rect">
+            <a:avLst/>
+          </a:prstGeom>
+          <a:noFill/>
+        </p:spPr>
+        <p:txBody>
+          <a:bodyPr wrap="square">
+            <a:spAutoFit/>
+          </a:bodyPr>
+          <a:lstStyle/>
+          <a:p>
+            <a:pPr algn="l">
+              <a:spcBef>
+                <a:spcPts val="0"/>
+              </a:spcBef>
+              <a:spcAft>
+                <a:spcPts val="0"/>
+              </a:spcAft>
+            </a:pPr>
             <a:r>
               <a:rPr sz="1700" b="1">
                 <a:solidFill>
@@ -8100,20 +9032,27 @@
         <p:spPr>
           <a:xfrm>
             <a:off x="1371600" y="5788151"/>
-            <a:ext cx="8686800" cy="320040"/>
-          </a:xfrm>
-          <a:prstGeom prst="rect">
-            <a:avLst/>
-          </a:prstGeom>
-          <a:noFill/>
-        </p:spPr>
-        <p:txBody>
-          <a:bodyPr wrap="square">
-            <a:spAutoFit/>
-          </a:bodyPr>
-          <a:lstStyle/>
-          <a:p>
-            <a:pPr algn="l"/>
+            <a:ext cx="9601200" cy="320040"/>
+          </a:xfrm>
+          <a:prstGeom prst="rect">
+            <a:avLst/>
+          </a:prstGeom>
+          <a:noFill/>
+        </p:spPr>
+        <p:txBody>
+          <a:bodyPr wrap="square">
+            <a:spAutoFit/>
+          </a:bodyPr>
+          <a:lstStyle/>
+          <a:p>
+            <a:pPr algn="l">
+              <a:spcBef>
+                <a:spcPts val="0"/>
+              </a:spcBef>
+              <a:spcAft>
+                <a:spcPts val="0"/>
+              </a:spcAft>
+            </a:pPr>
             <a:r>
               <a:rPr sz="1200" b="0">
                 <a:solidFill>
@@ -8174,7 +9113,14 @@
           </a:bodyPr>
           <a:lstStyle/>
           <a:p>
-            <a:pPr algn="l"/>
+            <a:pPr algn="l">
+              <a:spcBef>
+                <a:spcPts val="0"/>
+              </a:spcBef>
+              <a:spcAft>
+                <a:spcPts val="0"/>
+              </a:spcAft>
+            </a:pPr>
             <a:r>
               <a:rPr sz="2600" b="1">
                 <a:solidFill>
@@ -8209,7 +9155,14 @@
           </a:bodyPr>
           <a:lstStyle/>
           <a:p>
-            <a:pPr algn="l"/>
+            <a:pPr algn="l">
+              <a:spcBef>
+                <a:spcPts val="0"/>
+              </a:spcBef>
+              <a:spcAft>
+                <a:spcPts val="0"/>
+              </a:spcAft>
+            </a:pPr>
             <a:r>
               <a:rPr sz="1300" b="0">
                 <a:solidFill>
@@ -8244,7 +9197,14 @@
           </a:bodyPr>
           <a:lstStyle/>
           <a:p>
-            <a:pPr algn="r"/>
+            <a:pPr algn="r">
+              <a:spcBef>
+                <a:spcPts val="0"/>
+              </a:spcBef>
+              <a:spcAft>
+                <a:spcPts val="0"/>
+              </a:spcAft>
+            </a:pPr>
             <a:r>
               <a:rPr sz="900" b="0">
                 <a:solidFill>
@@ -8279,7 +9239,14 @@
           </a:bodyPr>
           <a:lstStyle/>
           <a:p>
-            <a:pPr algn="l"/>
+            <a:pPr algn="l">
+              <a:spcBef>
+                <a:spcPts val="0"/>
+              </a:spcBef>
+              <a:spcAft>
+                <a:spcPts val="0"/>
+              </a:spcAft>
+            </a:pPr>
             <a:r>
               <a:rPr sz="1100" b="1">
                 <a:solidFill>
@@ -8314,7 +9281,14 @@
           </a:bodyPr>
           <a:lstStyle/>
           <a:p>
-            <a:pPr algn="l"/>
+            <a:pPr algn="l">
+              <a:spcBef>
+                <a:spcPts val="0"/>
+              </a:spcBef>
+              <a:spcAft>
+                <a:spcPts val="0"/>
+              </a:spcAft>
+            </a:pPr>
             <a:r>
               <a:rPr sz="1100" b="1">
                 <a:solidFill>
@@ -8393,7 +9367,14 @@
           </a:bodyPr>
           <a:lstStyle/>
           <a:p>
-            <a:pPr algn="l"/>
+            <a:pPr algn="l">
+              <a:spcBef>
+                <a:spcPts val="0"/>
+              </a:spcBef>
+              <a:spcAft>
+                <a:spcPts val="0"/>
+              </a:spcAft>
+            </a:pPr>
             <a:r>
               <a:rPr sz="1400" b="1">
                 <a:solidFill>
@@ -8428,7 +9409,14 @@
           </a:bodyPr>
           <a:lstStyle/>
           <a:p>
-            <a:pPr algn="l"/>
+            <a:pPr algn="l">
+              <a:spcBef>
+                <a:spcPts val="0"/>
+              </a:spcBef>
+              <a:spcAft>
+                <a:spcPts val="0"/>
+              </a:spcAft>
+            </a:pPr>
             <a:r>
               <a:rPr sz="1400" b="1">
                 <a:solidFill>
@@ -8436,7 +9424,7 @@
                 </a:solidFill>
                 <a:latin typeface="Calibri"/>
               </a:rPr>
-              <a:t>Opposite of a checksum/hash</a:t>
+              <a:t>Fingerprint of meaning (vs. a hash)</a:t>
             </a:r>
           </a:p>
         </p:txBody>
@@ -8507,7 +9495,14 @@
           </a:bodyPr>
           <a:lstStyle/>
           <a:p>
-            <a:pPr algn="l"/>
+            <a:pPr algn="l">
+              <a:spcBef>
+                <a:spcPts val="0"/>
+              </a:spcBef>
+              <a:spcAft>
+                <a:spcPts val="0"/>
+              </a:spcAft>
+            </a:pPr>
             <a:r>
               <a:rPr sz="1400" b="1">
                 <a:solidFill>
@@ -8542,7 +9537,14 @@
           </a:bodyPr>
           <a:lstStyle/>
           <a:p>
-            <a:pPr algn="l"/>
+            <a:pPr algn="l">
+              <a:spcBef>
+                <a:spcPts val="0"/>
+              </a:spcBef>
+              <a:spcAft>
+                <a:spcPts val="0"/>
+              </a:spcAft>
+            </a:pPr>
             <a:r>
               <a:rPr sz="1400" b="1">
                 <a:solidFill>
@@ -8550,7 +9552,7 @@
                 </a:solidFill>
                 <a:latin typeface="Calibri"/>
               </a:rPr>
-              <a:t>Prometheus for metrics / Elasticsearch for text</a:t>
+              <a:t>Search index for meaning (not keywords)</a:t>
             </a:r>
           </a:p>
         </p:txBody>
@@ -8621,7 +9623,14 @@
           </a:bodyPr>
           <a:lstStyle/>
           <a:p>
-            <a:pPr algn="l"/>
+            <a:pPr algn="l">
+              <a:spcBef>
+                <a:spcPts val="0"/>
+              </a:spcBef>
+              <a:spcAft>
+                <a:spcPts val="0"/>
+              </a:spcAft>
+            </a:pPr>
             <a:r>
               <a:rPr sz="1400" b="1">
                 <a:solidFill>
@@ -8656,7 +9665,14 @@
           </a:bodyPr>
           <a:lstStyle/>
           <a:p>
-            <a:pPr algn="l"/>
+            <a:pPr algn="l">
+              <a:spcBef>
+                <a:spcPts val="0"/>
+              </a:spcBef>
+              <a:spcAft>
+                <a:spcPts val="0"/>
+              </a:spcAft>
+            </a:pPr>
             <a:r>
               <a:rPr sz="1400" b="1">
                 <a:solidFill>
@@ -8664,7 +9680,7 @@
                 </a:solidFill>
                 <a:latin typeface="Calibri"/>
               </a:rPr>
-              <a:t>Container filesystem vs. mounted volume</a:t>
+              <a:t>Temp container disk vs. mounted volume</a:t>
             </a:r>
           </a:p>
         </p:txBody>
@@ -8735,7 +9751,14 @@
           </a:bodyPr>
           <a:lstStyle/>
           <a:p>
-            <a:pPr algn="l"/>
+            <a:pPr algn="l">
+              <a:spcBef>
+                <a:spcPts val="0"/>
+              </a:spcBef>
+              <a:spcAft>
+                <a:spcPts val="0"/>
+              </a:spcAft>
+            </a:pPr>
             <a:r>
               <a:rPr sz="1400" b="1">
                 <a:solidFill>
@@ -8770,7 +9793,14 @@
           </a:bodyPr>
           <a:lstStyle/>
           <a:p>
-            <a:pPr algn="l"/>
+            <a:pPr algn="l">
+              <a:spcBef>
+                <a:spcPts val="0"/>
+              </a:spcBef>
+              <a:spcAft>
+                <a:spcPts val="0"/>
+              </a:spcAft>
+            </a:pPr>
             <a:r>
               <a:rPr sz="1400" b="1">
                 <a:solidFill>
@@ -8778,7 +9808,7 @@
                 </a:solidFill>
                 <a:latin typeface="Calibri"/>
               </a:rPr>
-              <a:t>Anomaly detection against a baseline</a:t>
+              <a:t>How close two arrows point</a:t>
             </a:r>
           </a:p>
         </p:txBody>
@@ -8849,7 +9879,14 @@
           </a:bodyPr>
           <a:lstStyle/>
           <a:p>
-            <a:pPr algn="l"/>
+            <a:pPr algn="l">
+              <a:spcBef>
+                <a:spcPts val="0"/>
+              </a:spcBef>
+              <a:spcAft>
+                <a:spcPts val="0"/>
+              </a:spcAft>
+            </a:pPr>
             <a:r>
               <a:rPr sz="1400" b="1">
                 <a:solidFill>
@@ -8884,7 +9921,14 @@
           </a:bodyPr>
           <a:lstStyle/>
           <a:p>
-            <a:pPr algn="l"/>
+            <a:pPr algn="l">
+              <a:spcBef>
+                <a:spcPts val="0"/>
+              </a:spcBef>
+              <a:spcAft>
+                <a:spcPts val="0"/>
+              </a:spcAft>
+            </a:pPr>
             <a:r>
               <a:rPr sz="1400" b="1">
                 <a:solidFill>
@@ -8892,7 +9936,7 @@
                 </a:solidFill>
                 <a:latin typeface="Calibri"/>
               </a:rPr>
-              <a:t>Self-hosted vs. managed SaaS</a:t>
+              <a:t>On your laptop vs. a cloud API call</a:t>
             </a:r>
           </a:p>
         </p:txBody>
@@ -8919,7 +9963,14 @@
           </a:bodyPr>
           <a:lstStyle/>
           <a:p>
-            <a:pPr algn="l"/>
+            <a:pPr algn="l">
+              <a:spcBef>
+                <a:spcPts val="0"/>
+              </a:spcBef>
+              <a:spcAft>
+                <a:spcPts val="0"/>
+              </a:spcAft>
+            </a:pPr>
             <a:r>
               <a:rPr sz="1100" b="0">
                 <a:solidFill>
@@ -8927,7 +9978,7 @@
                 </a:solidFill>
                 <a:latin typeface="Calibri"/>
               </a:rPr>
-              <a:t>Full detail lives in ANALOGY_GLOSSARY.md at the repo root -- Lecture 1's five rows are still there too.</a:t>
+              <a:t>Full detail lives in ANALOGY_GLOSSARY.md at the repo root -- Lecture 1's rows are still there too.</a:t>
             </a:r>
           </a:p>
         </p:txBody>
@@ -8980,7 +10031,14 @@
           </a:bodyPr>
           <a:lstStyle/>
           <a:p>
-            <a:pPr algn="l"/>
+            <a:pPr algn="l">
+              <a:spcBef>
+                <a:spcPts val="0"/>
+              </a:spcBef>
+              <a:spcAft>
+                <a:spcPts val="0"/>
+              </a:spcAft>
+            </a:pPr>
             <a:r>
               <a:rPr sz="1300" b="1">
                 <a:solidFill>
@@ -9015,7 +10073,14 @@
           </a:bodyPr>
           <a:lstStyle/>
           <a:p>
-            <a:pPr algn="l"/>
+            <a:pPr algn="l">
+              <a:spcBef>
+                <a:spcPts val="0"/>
+              </a:spcBef>
+              <a:spcAft>
+                <a:spcPts val="0"/>
+              </a:spcAft>
+            </a:pPr>
             <a:r>
               <a:rPr sz="3200" b="1">
                 <a:solidFill>
@@ -9103,7 +10168,14 @@
           </a:bodyPr>
           <a:lstStyle/>
           <a:p>
-            <a:pPr algn="l"/>
+            <a:pPr algn="l">
+              <a:spcBef>
+                <a:spcPts val="0"/>
+              </a:spcBef>
+              <a:spcAft>
+                <a:spcPts val="0"/>
+              </a:spcAft>
+            </a:pPr>
             <a:r>
               <a:rPr sz="1600" b="1">
                 <a:solidFill>
@@ -9138,7 +10210,14 @@
           </a:bodyPr>
           <a:lstStyle/>
           <a:p>
-            <a:pPr algn="l"/>
+            <a:pPr algn="l">
+              <a:spcBef>
+                <a:spcPts val="0"/>
+              </a:spcBef>
+              <a:spcAft>
+                <a:spcPts val="0"/>
+              </a:spcAft>
+            </a:pPr>
             <a:r>
               <a:rPr sz="1300" b="0">
                 <a:solidFill>
@@ -9146,7 +10225,7 @@
                 </a:solidFill>
                 <a:latin typeface="Calibri"/>
               </a:rPr>
-              <a:t>Embeddings vs. hashing, and cosine similarity on real sentence pairs</a:t>
+              <a:t>See a real embedding, compare meaning with cosine similarity, contrast with a hash</a:t>
             </a:r>
           </a:p>
         </p:txBody>
@@ -9226,7 +10305,14 @@
           </a:bodyPr>
           <a:lstStyle/>
           <a:p>
-            <a:pPr algn="l"/>
+            <a:pPr algn="l">
+              <a:spcBef>
+                <a:spcPts val="0"/>
+              </a:spcBef>
+              <a:spcAft>
+                <a:spcPts val="0"/>
+              </a:spcAft>
+            </a:pPr>
             <a:r>
               <a:rPr sz="1600" b="1">
                 <a:solidFill>
@@ -9261,7 +10347,14 @@
           </a:bodyPr>
           <a:lstStyle/>
           <a:p>
-            <a:pPr algn="l"/>
+            <a:pPr algn="l">
+              <a:spcBef>
+                <a:spcPts val="0"/>
+              </a:spcBef>
+              <a:spcAft>
+                <a:spcPts val="0"/>
+              </a:spcAft>
+            </a:pPr>
             <a:r>
               <a:rPr sz="1300" b="0">
                 <a:solidFill>
@@ -9269,7 +10362,7 @@
                 </a:solidFill>
                 <a:latin typeface="Calibri"/>
               </a:rPr>
-              <a:t>In-memory vs. persistent Chroma -- proven by restarting the script</a:t>
+              <a:t>In-memory vs. persistent Chroma -- proven by running the script twice</a:t>
             </a:r>
           </a:p>
         </p:txBody>
@@ -9349,7 +10442,14 @@
           </a:bodyPr>
           <a:lstStyle/>
           <a:p>
-            <a:pPr algn="l"/>
+            <a:pPr algn="l">
+              <a:spcBef>
+                <a:spcPts val="0"/>
+              </a:spcBef>
+              <a:spcAft>
+                <a:spcPts val="0"/>
+              </a:spcAft>
+            </a:pPr>
             <a:r>
               <a:rPr sz="1600" b="1">
                 <a:solidFill>
@@ -9384,7 +10484,14 @@
           </a:bodyPr>
           <a:lstStyle/>
           <a:p>
-            <a:pPr algn="l"/>
+            <a:pPr algn="l">
+              <a:spcBef>
+                <a:spcPts val="0"/>
+              </a:spcBef>
+              <a:spcAft>
+                <a:spcPts val="0"/>
+              </a:spcAft>
+            </a:pPr>
             <a:r>
               <a:rPr sz="1300" b="0">
                 <a:solidFill>
@@ -9392,7 +10499,7 @@
                 </a:solidFill>
                 <a:latin typeface="Calibri"/>
               </a:rPr>
-              <a:t>50-document knowledge base: semantic search beats keyword search, plus a Groq RAG preview</a:t>
+              <a:t>50-document knowledge base: semantic search vs. keyword search, plus a Groq RAG preview</a:t>
             </a:r>
           </a:p>
         </p:txBody>
@@ -9419,7 +10526,14 @@
           </a:bodyPr>
           <a:lstStyle/>
           <a:p>
-            <a:pPr algn="r"/>
+            <a:pPr algn="r">
+              <a:spcBef>
+                <a:spcPts val="0"/>
+              </a:spcBef>
+              <a:spcAft>
+                <a:spcPts val="0"/>
+              </a:spcAft>
+            </a:pPr>
             <a:r>
               <a:rPr sz="900" b="0">
                 <a:solidFill>
@@ -9480,7 +10594,14 @@
           </a:bodyPr>
           <a:lstStyle/>
           <a:p>
-            <a:pPr algn="l"/>
+            <a:pPr algn="l">
+              <a:spcBef>
+                <a:spcPts val="0"/>
+              </a:spcBef>
+              <a:spcAft>
+                <a:spcPts val="0"/>
+              </a:spcAft>
+            </a:pPr>
             <a:r>
               <a:rPr sz="2600" b="1">
                 <a:solidFill>
@@ -9488,7 +10609,7 @@
                 </a:solidFill>
                 <a:latin typeface="Cambria"/>
               </a:rPr>
-              <a:t>Common mistakes DevOps engineers make here</a:t>
+              <a:t>Common mistakes beginners make here</a:t>
             </a:r>
           </a:p>
         </p:txBody>
@@ -9515,7 +10636,14 @@
           </a:bodyPr>
           <a:lstStyle/>
           <a:p>
-            <a:pPr algn="l"/>
+            <a:pPr algn="l">
+              <a:spcBef>
+                <a:spcPts val="0"/>
+              </a:spcBef>
+              <a:spcAft>
+                <a:spcPts val="0"/>
+              </a:spcAft>
+            </a:pPr>
             <a:r>
               <a:rPr sz="1300" b="0">
                 <a:solidFill>
@@ -9550,7 +10678,14 @@
           </a:bodyPr>
           <a:lstStyle/>
           <a:p>
-            <a:pPr algn="r"/>
+            <a:pPr algn="r">
+              <a:spcBef>
+                <a:spcPts val="0"/>
+              </a:spcBef>
+              <a:spcAft>
+                <a:spcPts val="0"/>
+              </a:spcAft>
+            </a:pPr>
             <a:r>
               <a:rPr sz="900" b="0">
                 <a:solidFill>
@@ -9629,7 +10764,14 @@
           </a:bodyPr>
           <a:lstStyle/>
           <a:p>
-            <a:pPr algn="l"/>
+            <a:pPr algn="l">
+              <a:spcBef>
+                <a:spcPts val="0"/>
+              </a:spcBef>
+              <a:spcAft>
+                <a:spcPts val="0"/>
+              </a:spcAft>
+            </a:pPr>
             <a:r>
               <a:rPr sz="1400" b="1">
                 <a:solidFill>
@@ -9637,7 +10779,7 @@
                 </a:solidFill>
                 <a:latin typeface="Calibri"/>
               </a:rPr>
-              <a:t>Assuming a vector database is “just a table with an array column”</a:t>
+              <a:t>Thinking a vector DB is "just a table of number lists"</a:t>
             </a:r>
           </a:p>
         </p:txBody>
@@ -9664,7 +10806,14 @@
           </a:bodyPr>
           <a:lstStyle/>
           <a:p>
-            <a:pPr algn="l"/>
+            <a:pPr algn="l">
+              <a:spcBef>
+                <a:spcPts val="0"/>
+              </a:spcBef>
+              <a:spcAft>
+                <a:spcPts val="0"/>
+              </a:spcAft>
+            </a:pPr>
             <a:r>
               <a:rPr sz="1200" b="0">
                 <a:solidFill>
@@ -9672,7 +10821,7 @@
                 </a:solidFill>
                 <a:latin typeface="Calibri"/>
               </a:rPr>
-              <a:t>It's optimized for one access pattern -- K-nearest-neighbour -- that's the entire value it adds.</a:t>
+              <a:t>It is a special search index for "find the closest meanings." That one job is the whole point.</a:t>
             </a:r>
           </a:p>
         </p:txBody>
@@ -9743,7 +10892,14 @@
           </a:bodyPr>
           <a:lstStyle/>
           <a:p>
-            <a:pPr algn="l"/>
+            <a:pPr algn="l">
+              <a:spcBef>
+                <a:spcPts val="0"/>
+              </a:spcBef>
+              <a:spcAft>
+                <a:spcPts val="0"/>
+              </a:spcAft>
+            </a:pPr>
             <a:r>
               <a:rPr sz="1400" b="1">
                 <a:solidFill>
@@ -9778,7 +10934,14 @@
           </a:bodyPr>
           <a:lstStyle/>
           <a:p>
-            <a:pPr algn="l"/>
+            <a:pPr algn="l">
+              <a:spcBef>
+                <a:spcPts val="0"/>
+              </a:spcBef>
+              <a:spcAft>
+                <a:spcPts val="0"/>
+              </a:spcAft>
+            </a:pPr>
             <a:r>
               <a:rPr sz="1200" b="0">
                 <a:solidFill>
@@ -9786,7 +10949,7 @@
                 </a:solidFill>
                 <a:latin typeface="Calibri"/>
               </a:rPr>
-              <a:t>Two embeddings of the same-meaning sentence are almost never bit-identical. Compare with cosine similarity, not equality.</a:t>
+              <a:t>Same meaning almost never means bit-identical floats. Use cosine similarity, not equality.</a:t>
             </a:r>
           </a:p>
         </p:txBody>
@@ -9857,7 +11020,14 @@
           </a:bodyPr>
           <a:lstStyle/>
           <a:p>
-            <a:pPr algn="l"/>
+            <a:pPr algn="l">
+              <a:spcBef>
+                <a:spcPts val="0"/>
+              </a:spcBef>
+              <a:spcAft>
+                <a:spcPts val="0"/>
+              </a:spcAft>
+            </a:pPr>
             <a:r>
               <a:rPr sz="1400" b="1">
                 <a:solidFill>
@@ -9892,7 +11062,14 @@
           </a:bodyPr>
           <a:lstStyle/>
           <a:p>
-            <a:pPr algn="l"/>
+            <a:pPr algn="l">
+              <a:spcBef>
+                <a:spcPts val="0"/>
+              </a:spcBef>
+              <a:spcAft>
+                <a:spcPts val="0"/>
+              </a:spcAft>
+            </a:pPr>
             <a:r>
               <a:rPr sz="1200" b="0">
                 <a:solidFill>
@@ -9900,7 +11077,7 @@
                 </a:solidFill>
                 <a:latin typeface="Calibri"/>
               </a:rPr>
-              <a:t>Same as forgetting to mount a volume. Use PersistentClient whenever data must outlive one run.</a:t>
+              <a:t>Same mistake as writing into a temp container disk. Use PersistentClient when data must survive.</a:t>
             </a:r>
           </a:p>
         </p:txBody>
@@ -9971,7 +11148,14 @@
           </a:bodyPr>
           <a:lstStyle/>
           <a:p>
-            <a:pPr algn="l"/>
+            <a:pPr algn="l">
+              <a:spcBef>
+                <a:spcPts val="0"/>
+              </a:spcBef>
+              <a:spcAft>
+                <a:spcPts val="0"/>
+              </a:spcAft>
+            </a:pPr>
             <a:r>
               <a:rPr sz="1400" b="1">
                 <a:solidFill>
@@ -10006,7 +11190,14 @@
           </a:bodyPr>
           <a:lstStyle/>
           <a:p>
-            <a:pPr algn="l"/>
+            <a:pPr algn="l">
+              <a:spcBef>
+                <a:spcPts val="0"/>
+              </a:spcBef>
+              <a:spcAft>
+                <a:spcPts val="0"/>
+              </a:spcAft>
+            </a:pPr>
             <a:r>
               <a:rPr sz="1200" b="0">
                 <a:solidFill>
@@ -10014,7 +11205,7 @@
                 </a:solidFill>
                 <a:latin typeface="Calibri"/>
               </a:rPr>
-              <a:t>It's a ranking signal, not a binary verdict -- always look at the top-K results, not just one score in isolation.</a:t>
+              <a:t>It is a ranking signal, not a binary verdict -- always look at the top-K results together.</a:t>
             </a:r>
           </a:p>
         </p:txBody>
@@ -10067,7 +11258,14 @@
           </a:bodyPr>
           <a:lstStyle/>
           <a:p>
-            <a:pPr algn="l"/>
+            <a:pPr algn="l">
+              <a:spcBef>
+                <a:spcPts val="0"/>
+              </a:spcBef>
+              <a:spcAft>
+                <a:spcPts val="0"/>
+              </a:spcAft>
+            </a:pPr>
             <a:r>
               <a:rPr sz="1300" b="1">
                 <a:solidFill>
@@ -10102,7 +11300,14 @@
           </a:bodyPr>
           <a:lstStyle/>
           <a:p>
-            <a:pPr algn="l"/>
+            <a:pPr algn="l">
+              <a:spcBef>
+                <a:spcPts val="0"/>
+              </a:spcBef>
+              <a:spcAft>
+                <a:spcPts val="0"/>
+              </a:spcAft>
+            </a:pPr>
             <a:r>
               <a:rPr sz="3200" b="1">
                 <a:solidFill>
@@ -10137,6 +11342,14 @@
           </a:bodyPr>
           <a:lstStyle/>
           <a:p>
+            <a:pPr>
+              <a:spcBef>
+                <a:spcPts val="0"/>
+              </a:spcBef>
+              <a:spcAft>
+                <a:spcPts val="0"/>
+              </a:spcAft>
+            </a:pPr>
             <a:r>
               <a:rPr sz="1500" b="0">
                 <a:solidFill>
@@ -10144,10 +11357,18 @@
                 </a:solidFill>
                 <a:latin typeface="Calibri"/>
               </a:rPr>
-              <a:t>- Turn any piece of text into an embedding, and explain why it's the opposite of a hash</a:t>
-            </a:r>
-          </a:p>
-          <a:p>
+              <a:t>- Turn text into an embedding, and explain it as a fingerprint of meaning</a:t>
+            </a:r>
+          </a:p>
+          <a:p>
+            <a:pPr>
+              <a:spcBef>
+                <a:spcPts val="0"/>
+              </a:spcBef>
+              <a:spcAft>
+                <a:spcPts val="0"/>
+              </a:spcAft>
+            </a:pPr>
             <a:r>
               <a:rPr sz="1500" b="0">
                 <a:solidFill>
@@ -10155,10 +11376,18 @@
                 </a:solidFill>
                 <a:latin typeface="Calibri"/>
               </a:rPr>
-              <a:t>- Compare two embeddings with cosine similarity, and know why it measures direction, not size</a:t>
-            </a:r>
-          </a:p>
-          <a:p>
+              <a:t>- Compare two embeddings with cosine similarity (direction = meaning)</a:t>
+            </a:r>
+          </a:p>
+          <a:p>
+            <a:pPr>
+              <a:spcBef>
+                <a:spcPts val="0"/>
+              </a:spcBef>
+              <a:spcAft>
+                <a:spcPts val="0"/>
+              </a:spcAft>
+            </a:pPr>
             <a:r>
               <a:rPr sz="1500" b="0">
                 <a:solidFill>
@@ -10166,10 +11395,18 @@
                 </a:solidFill>
                 <a:latin typeface="Calibri"/>
               </a:rPr>
-              <a:t>- Store and query embeddings in Chroma, in both in-memory and persistent mode</a:t>
-            </a:r>
-          </a:p>
-          <a:p>
+              <a:t>- Store and query embeddings in Chroma, in-memory and persistent</a:t>
+            </a:r>
+          </a:p>
+          <a:p>
+            <a:pPr>
+              <a:spcBef>
+                <a:spcPts val="0"/>
+              </a:spcBef>
+              <a:spcAft>
+                <a:spcPts val="0"/>
+              </a:spcAft>
+            </a:pPr>
             <a:r>
               <a:rPr sz="1500" b="0">
                 <a:solidFill>
@@ -10177,10 +11414,18 @@
                 </a:solidFill>
                 <a:latin typeface="Calibri"/>
               </a:rPr>
-              <a:t>- Explain why a vector database exists instead of storing arrays in a normal table</a:t>
-            </a:r>
-          </a:p>
-          <a:p>
+              <a:t>- Explain why a vector database is a special search index for meaning</a:t>
+            </a:r>
+          </a:p>
+          <a:p>
+            <a:pPr>
+              <a:spcBef>
+                <a:spcPts val="0"/>
+              </a:spcBef>
+              <a:spcAft>
+                <a:spcPts val="0"/>
+              </a:spcAft>
+            </a:pPr>
             <a:r>
               <a:rPr sz="1500" b="0">
                 <a:solidFill>
@@ -10188,10 +11433,18 @@
                 </a:solidFill>
                 <a:latin typeface="Calibri"/>
               </a:rPr>
-              <a:t>- Weigh local sentence-transformers against a hosted embedding API on cost and control</a:t>
-            </a:r>
-          </a:p>
-          <a:p>
+              <a:t>- Weigh a local model (laptop) against a hosted embed API (cloud call)</a:t>
+            </a:r>
+          </a:p>
+          <a:p>
+            <a:pPr>
+              <a:spcBef>
+                <a:spcPts val="0"/>
+              </a:spcBef>
+              <a:spcAft>
+                <a:spcPts val="0"/>
+              </a:spcAft>
+            </a:pPr>
             <a:r>
               <a:rPr sz="1500" b="0">
                 <a:solidFill>
@@ -10199,7 +11452,7 @@
                 </a:solidFill>
                 <a:latin typeface="Calibri"/>
               </a:rPr>
-              <a:t>- Built a 50-document semantic search engine that beats keyword search on paraphrased queries</a:t>
+              <a:t>- Built a 50-document semantic search that beats keyword search on paraphrases</a:t>
             </a:r>
           </a:p>
         </p:txBody>
@@ -10270,7 +11523,14 @@
           </a:bodyPr>
           <a:lstStyle/>
           <a:p>
-            <a:pPr algn="l"/>
+            <a:pPr algn="l">
+              <a:spcBef>
+                <a:spcPts val="0"/>
+              </a:spcBef>
+              <a:spcAft>
+                <a:spcPts val="0"/>
+              </a:spcAft>
+            </a:pPr>
             <a:r>
               <a:rPr sz="1500" b="1">
                 <a:solidFill>
@@ -10278,7 +11538,7 @@
                 </a:solidFill>
                 <a:latin typeface="Calibri"/>
               </a:rPr>
-              <a:t>Next lecture: RAG from scratch -- wiring retrieval and an LLM call into one pipeline that answers questions using only your own documents.</a:t>
+              <a:t>Next lecture: RAG from scratch -- retrieve relevant docs, then hand them to an LLM so answers come from your own knowledge base.</a:t>
             </a:r>
           </a:p>
         </p:txBody>
@@ -10305,7 +11565,14 @@
           </a:bodyPr>
           <a:lstStyle/>
           <a:p>
-            <a:pPr algn="r"/>
+            <a:pPr algn="r">
+              <a:spcBef>
+                <a:spcPts val="0"/>
+              </a:spcBef>
+              <a:spcAft>
+                <a:spcPts val="0"/>
+              </a:spcAft>
+            </a:pPr>
             <a:r>
               <a:rPr sz="900" b="0">
                 <a:solidFill>
@@ -10366,7 +11633,14 @@
           </a:bodyPr>
           <a:lstStyle/>
           <a:p>
-            <a:pPr algn="l"/>
+            <a:pPr algn="l">
+              <a:spcBef>
+                <a:spcPts val="0"/>
+              </a:spcBef>
+              <a:spcAft>
+                <a:spcPts val="0"/>
+              </a:spcAft>
+            </a:pPr>
             <a:r>
               <a:rPr sz="2600" b="1">
                 <a:solidFill>
@@ -10401,7 +11675,14 @@
           </a:bodyPr>
           <a:lstStyle/>
           <a:p>
-            <a:pPr algn="l"/>
+            <a:pPr algn="l">
+              <a:spcBef>
+                <a:spcPts val="0"/>
+              </a:spcBef>
+              <a:spcAft>
+                <a:spcPts val="0"/>
+              </a:spcAft>
+            </a:pPr>
             <a:r>
               <a:rPr sz="1300" b="0">
                 <a:solidFill>
@@ -10409,7 +11690,7 @@
                 </a:solidFill>
                 <a:latin typeface="Calibri"/>
               </a:rPr>
-              <a:t>You already operate every piece of this -- just under different names</a:t>
+              <a:t>You already know these shapes -- today we just give them AI names</a:t>
             </a:r>
           </a:p>
         </p:txBody>
@@ -10436,7 +11717,14 @@
           </a:bodyPr>
           <a:lstStyle/>
           <a:p>
-            <a:pPr algn="r"/>
+            <a:pPr algn="r">
+              <a:spcBef>
+                <a:spcPts val="0"/>
+              </a:spcBef>
+              <a:spcAft>
+                <a:spcPts val="0"/>
+              </a:spcAft>
+            </a:pPr>
             <a:r>
               <a:rPr sz="900" b="0">
                 <a:solidFill>
@@ -10515,7 +11803,14 @@
           </a:bodyPr>
           <a:lstStyle/>
           <a:p>
-            <a:pPr algn="l"/>
+            <a:pPr algn="l">
+              <a:spcBef>
+                <a:spcPts val="0"/>
+              </a:spcBef>
+              <a:spcAft>
+                <a:spcPts val="0"/>
+              </a:spcAft>
+            </a:pPr>
             <a:r>
               <a:rPr sz="1500" b="0">
                 <a:solidFill>
@@ -10523,7 +11818,7 @@
                 </a:solidFill>
                 <a:latin typeface="Calibri"/>
               </a:rPr>
-              <a:t>You already run checksums, purpose-built search indexes, mounted volumes, and managed SaaS trade-offs every week. This lecture just gives those same shapes new names.</a:t>
+              <a:t>If you have used checksums, searched logs, mounted a volume, or called a cloud API, you already have the mental models. This lecture just renames them.</a:t>
             </a:r>
           </a:p>
         </p:txBody>
@@ -10550,7 +11845,14 @@
           </a:bodyPr>
           <a:lstStyle/>
           <a:p>
-            <a:pPr algn="l"/>
+            <a:pPr algn="l">
+              <a:spcBef>
+                <a:spcPts val="0"/>
+              </a:spcBef>
+              <a:spcAft>
+                <a:spcPts val="0"/>
+              </a:spcAft>
+            </a:pPr>
             <a:r>
               <a:rPr sz="1100" b="1">
                 <a:solidFill>
@@ -10585,7 +11887,14 @@
           </a:bodyPr>
           <a:lstStyle/>
           <a:p>
-            <a:pPr algn="l"/>
+            <a:pPr algn="l">
+              <a:spcBef>
+                <a:spcPts val="0"/>
+              </a:spcBef>
+              <a:spcAft>
+                <a:spcPts val="0"/>
+              </a:spcAft>
+            </a:pPr>
             <a:r>
               <a:rPr sz="1100" b="1">
                 <a:solidFill>
@@ -10664,7 +11973,14 @@
           </a:bodyPr>
           <a:lstStyle/>
           <a:p>
-            <a:pPr algn="l"/>
+            <a:pPr algn="l">
+              <a:spcBef>
+                <a:spcPts val="0"/>
+              </a:spcBef>
+              <a:spcAft>
+                <a:spcPts val="0"/>
+              </a:spcAft>
+            </a:pPr>
             <a:r>
               <a:rPr sz="1300" b="1">
                 <a:solidFill>
@@ -10672,7 +11988,7 @@
                 </a:solidFill>
                 <a:latin typeface="Calibri"/>
               </a:rPr>
-              <a:t>A checksum / image digest (sha256sum)</a:t>
+              <a:t>A checksum / file fingerprint</a:t>
             </a:r>
           </a:p>
         </p:txBody>
@@ -10699,7 +12015,14 @@
           </a:bodyPr>
           <a:lstStyle/>
           <a:p>
-            <a:pPr algn="l"/>
+            <a:pPr algn="l">
+              <a:spcBef>
+                <a:spcPts val="0"/>
+              </a:spcBef>
+              <a:spcAft>
+                <a:spcPts val="0"/>
+              </a:spcAft>
+            </a:pPr>
             <a:r>
               <a:rPr sz="1600" b="1">
                 <a:solidFill>
@@ -10778,7 +12101,14 @@
           </a:bodyPr>
           <a:lstStyle/>
           <a:p>
-            <a:pPr algn="l"/>
+            <a:pPr algn="l">
+              <a:spcBef>
+                <a:spcPts val="0"/>
+              </a:spcBef>
+              <a:spcAft>
+                <a:spcPts val="0"/>
+              </a:spcAft>
+            </a:pPr>
             <a:r>
               <a:rPr sz="1300" b="1">
                 <a:solidFill>
@@ -10786,7 +12116,7 @@
                 </a:solidFill>
                 <a:latin typeface="Calibri"/>
               </a:rPr>
-              <a:t>An embedding (semantic vector)</a:t>
+              <a:t>An embedding (fingerprint of meaning)</a:t>
             </a:r>
           </a:p>
         </p:txBody>
@@ -10857,7 +12187,14 @@
           </a:bodyPr>
           <a:lstStyle/>
           <a:p>
-            <a:pPr algn="l"/>
+            <a:pPr algn="l">
+              <a:spcBef>
+                <a:spcPts val="0"/>
+              </a:spcBef>
+              <a:spcAft>
+                <a:spcPts val="0"/>
+              </a:spcAft>
+            </a:pPr>
             <a:r>
               <a:rPr sz="1300" b="1">
                 <a:solidFill>
@@ -10865,7 +12202,7 @@
                 </a:solidFill>
                 <a:latin typeface="Calibri"/>
               </a:rPr>
-              <a:t>Prometheus / Elasticsearch</a:t>
+              <a:t>Searching logs by exact keyword</a:t>
             </a:r>
           </a:p>
         </p:txBody>
@@ -10892,7 +12229,14 @@
           </a:bodyPr>
           <a:lstStyle/>
           <a:p>
-            <a:pPr algn="l"/>
+            <a:pPr algn="l">
+              <a:spcBef>
+                <a:spcPts val="0"/>
+              </a:spcBef>
+              <a:spcAft>
+                <a:spcPts val="0"/>
+              </a:spcAft>
+            </a:pPr>
             <a:r>
               <a:rPr sz="1600" b="1">
                 <a:solidFill>
@@ -10971,7 +12315,14 @@
           </a:bodyPr>
           <a:lstStyle/>
           <a:p>
-            <a:pPr algn="l"/>
+            <a:pPr algn="l">
+              <a:spcBef>
+                <a:spcPts val="0"/>
+              </a:spcBef>
+              <a:spcAft>
+                <a:spcPts val="0"/>
+              </a:spcAft>
+            </a:pPr>
             <a:r>
               <a:rPr sz="1300" b="1">
                 <a:solidFill>
@@ -10979,7 +12330,7 @@
                 </a:solidFill>
                 <a:latin typeface="Calibri"/>
               </a:rPr>
-              <a:t>A vector database (Chroma)</a:t>
+              <a:t>A vector database (search by meaning)</a:t>
             </a:r>
           </a:p>
         </p:txBody>
@@ -11050,7 +12401,14 @@
           </a:bodyPr>
           <a:lstStyle/>
           <a:p>
-            <a:pPr algn="l"/>
+            <a:pPr algn="l">
+              <a:spcBef>
+                <a:spcPts val="0"/>
+              </a:spcBef>
+              <a:spcAft>
+                <a:spcPts val="0"/>
+              </a:spcAft>
+            </a:pPr>
             <a:r>
               <a:rPr sz="1300" b="1">
                 <a:solidFill>
@@ -11058,7 +12416,7 @@
                 </a:solidFill>
                 <a:latin typeface="Calibri"/>
               </a:rPr>
-              <a:t>A mounted volume vs. container filesystem</a:t>
+              <a:t>Temp container disk vs. a volume</a:t>
             </a:r>
           </a:p>
         </p:txBody>
@@ -11085,7 +12443,14 @@
           </a:bodyPr>
           <a:lstStyle/>
           <a:p>
-            <a:pPr algn="l"/>
+            <a:pPr algn="l">
+              <a:spcBef>
+                <a:spcPts val="0"/>
+              </a:spcBef>
+              <a:spcAft>
+                <a:spcPts val="0"/>
+              </a:spcAft>
+            </a:pPr>
             <a:r>
               <a:rPr sz="1600" b="1">
                 <a:solidFill>
@@ -11164,7 +12529,14 @@
           </a:bodyPr>
           <a:lstStyle/>
           <a:p>
-            <a:pPr algn="l"/>
+            <a:pPr algn="l">
+              <a:spcBef>
+                <a:spcPts val="0"/>
+              </a:spcBef>
+              <a:spcAft>
+                <a:spcPts val="0"/>
+              </a:spcAft>
+            </a:pPr>
             <a:r>
               <a:rPr sz="1300" b="1">
                 <a:solidFill>
@@ -11172,7 +12544,7 @@
                 </a:solidFill>
                 <a:latin typeface="Calibri"/>
               </a:rPr>
-              <a:t>Persistent vs. in-memory vector store</a:t>
+              <a:t>In-memory vs. persistent vector store</a:t>
             </a:r>
           </a:p>
         </p:txBody>
@@ -11243,7 +12615,14 @@
           </a:bodyPr>
           <a:lstStyle/>
           <a:p>
-            <a:pPr algn="l"/>
+            <a:pPr algn="l">
+              <a:spcBef>
+                <a:spcPts val="0"/>
+              </a:spcBef>
+              <a:spcAft>
+                <a:spcPts val="0"/>
+              </a:spcAft>
+            </a:pPr>
             <a:r>
               <a:rPr sz="1300" b="1">
                 <a:solidFill>
@@ -11251,7 +12630,7 @@
                 </a:solidFill>
                 <a:latin typeface="Calibri"/>
               </a:rPr>
-              <a:t>Self-hosted vs. managed SaaS</a:t>
+              <a:t>Run on your laptop vs. a cloud API</a:t>
             </a:r>
           </a:p>
         </p:txBody>
@@ -11278,7 +12657,14 @@
           </a:bodyPr>
           <a:lstStyle/>
           <a:p>
-            <a:pPr algn="l"/>
+            <a:pPr algn="l">
+              <a:spcBef>
+                <a:spcPts val="0"/>
+              </a:spcBef>
+              <a:spcAft>
+                <a:spcPts val="0"/>
+              </a:spcAft>
+            </a:pPr>
             <a:r>
               <a:rPr sz="1600" b="1">
                 <a:solidFill>
@@ -11357,7 +12743,14 @@
           </a:bodyPr>
           <a:lstStyle/>
           <a:p>
-            <a:pPr algn="l"/>
+            <a:pPr algn="l">
+              <a:spcBef>
+                <a:spcPts val="0"/>
+              </a:spcBef>
+              <a:spcAft>
+                <a:spcPts val="0"/>
+              </a:spcAft>
+            </a:pPr>
             <a:r>
               <a:rPr sz="1300" b="1">
                 <a:solidFill>
@@ -11365,7 +12758,7 @@
                 </a:solidFill>
                 <a:latin typeface="Calibri"/>
               </a:rPr>
-              <a:t>Local sentence-transformers vs. hosted embed API</a:t>
+              <a:t>Local model vs. hosted embed API</a:t>
             </a:r>
           </a:p>
         </p:txBody>
@@ -11436,7 +12829,14 @@
           </a:bodyPr>
           <a:lstStyle/>
           <a:p>
-            <a:pPr algn="l"/>
+            <a:pPr algn="l">
+              <a:spcBef>
+                <a:spcPts val="0"/>
+              </a:spcBef>
+              <a:spcAft>
+                <a:spcPts val="0"/>
+              </a:spcAft>
+            </a:pPr>
             <a:r>
               <a:rPr sz="1300" b="1">
                 <a:solidFill>
@@ -11444,7 +12844,7 @@
                 </a:solidFill>
                 <a:latin typeface="Calibri"/>
               </a:rPr>
-              <a:t>Anomaly detection against a baseline</a:t>
+              <a:t>Two arrows pointing the same way</a:t>
             </a:r>
           </a:p>
         </p:txBody>
@@ -11471,7 +12871,14 @@
           </a:bodyPr>
           <a:lstStyle/>
           <a:p>
-            <a:pPr algn="l"/>
+            <a:pPr algn="l">
+              <a:spcBef>
+                <a:spcPts val="0"/>
+              </a:spcBef>
+              <a:spcAft>
+                <a:spcPts val="0"/>
+              </a:spcAft>
+            </a:pPr>
             <a:r>
               <a:rPr sz="1600" b="1">
                 <a:solidFill>
@@ -11550,7 +12957,14 @@
           </a:bodyPr>
           <a:lstStyle/>
           <a:p>
-            <a:pPr algn="l"/>
+            <a:pPr algn="l">
+              <a:spcBef>
+                <a:spcPts val="0"/>
+              </a:spcBef>
+              <a:spcAft>
+                <a:spcPts val="0"/>
+              </a:spcAft>
+            </a:pPr>
             <a:r>
               <a:rPr sz="1300" b="1">
                 <a:solidFill>
@@ -11558,7 +12972,7 @@
                 </a:solidFill>
                 <a:latin typeface="Calibri"/>
               </a:rPr>
-              <a:t>Cosine similarity / nearest-neighbour search</a:t>
+              <a:t>Cosine similarity (closeness score)</a:t>
             </a:r>
           </a:p>
         </p:txBody>
@@ -11611,7 +13025,14 @@
           </a:bodyPr>
           <a:lstStyle/>
           <a:p>
-            <a:pPr algn="l"/>
+            <a:pPr algn="l">
+              <a:spcBef>
+                <a:spcPts val="0"/>
+              </a:spcBef>
+              <a:spcAft>
+                <a:spcPts val="0"/>
+              </a:spcAft>
+            </a:pPr>
             <a:r>
               <a:rPr sz="1300" b="1">
                 <a:solidFill>
@@ -11619,7 +13040,7 @@
                 </a:solidFill>
                 <a:latin typeface="Calibri"/>
               </a:rPr>
-              <a:t>THEORY 1  |  SLIDES 4-5</a:t>
+              <a:t>THEORY 1  |  SLIDES 5-6</a:t>
             </a:r>
           </a:p>
         </p:txBody>
@@ -11646,7 +13067,14 @@
           </a:bodyPr>
           <a:lstStyle/>
           <a:p>
-            <a:pPr algn="l"/>
+            <a:pPr algn="l">
+              <a:spcBef>
+                <a:spcPts val="0"/>
+              </a:spcBef>
+              <a:spcAft>
+                <a:spcPts val="0"/>
+              </a:spcAft>
+            </a:pPr>
             <a:r>
               <a:rPr sz="4000" b="1">
                 <a:solidFill>
@@ -11681,7 +13109,14 @@
           </a:bodyPr>
           <a:lstStyle/>
           <a:p>
-            <a:pPr algn="l"/>
+            <a:pPr algn="l">
+              <a:spcBef>
+                <a:spcPts val="0"/>
+              </a:spcBef>
+              <a:spcAft>
+                <a:spcPts val="0"/>
+              </a:spcAft>
+            </a:pPr>
             <a:r>
               <a:rPr sz="1600" b="0">
                 <a:solidFill>
@@ -11716,7 +13151,14 @@
           </a:bodyPr>
           <a:lstStyle/>
           <a:p>
-            <a:pPr algn="r"/>
+            <a:pPr algn="r">
+              <a:spcBef>
+                <a:spcPts val="0"/>
+              </a:spcBef>
+              <a:spcAft>
+                <a:spcPts val="0"/>
+              </a:spcAft>
+            </a:pPr>
             <a:r>
               <a:rPr sz="900" b="0">
                 <a:solidFill>
@@ -11777,7 +13219,14 @@
           </a:bodyPr>
           <a:lstStyle/>
           <a:p>
-            <a:pPr algn="l"/>
+            <a:pPr algn="l">
+              <a:spcBef>
+                <a:spcPts val="0"/>
+              </a:spcBef>
+              <a:spcAft>
+                <a:spcPts val="0"/>
+              </a:spcAft>
+            </a:pPr>
             <a:r>
               <a:rPr sz="2600" b="1">
                 <a:solidFill>
@@ -11812,7 +13261,14 @@
           </a:bodyPr>
           <a:lstStyle/>
           <a:p>
-            <a:pPr algn="l"/>
+            <a:pPr algn="l">
+              <a:spcBef>
+                <a:spcPts val="0"/>
+              </a:spcBef>
+              <a:spcAft>
+                <a:spcPts val="0"/>
+              </a:spcAft>
+            </a:pPr>
             <a:r>
               <a:rPr sz="1300" b="0">
                 <a:solidFill>
@@ -11820,7 +13276,7 @@
                 </a:solidFill>
                 <a:latin typeface="Calibri"/>
               </a:rPr>
-              <a:t>Fixed-length list of floats -- one per sentence, paragraph, or document</a:t>
+              <a:t>An embedding = a fixed-length list of floats that stands in for that text</a:t>
             </a:r>
           </a:p>
         </p:txBody>
@@ -11847,7 +13303,14 @@
           </a:bodyPr>
           <a:lstStyle/>
           <a:p>
-            <a:pPr algn="r"/>
+            <a:pPr algn="r">
+              <a:spcBef>
+                <a:spcPts val="0"/>
+              </a:spcBef>
+              <a:spcAft>
+                <a:spcPts val="0"/>
+              </a:spcAft>
+            </a:pPr>
             <a:r>
               <a:rPr sz="900" b="0">
                 <a:solidFill>
@@ -11926,7 +13389,14 @@
           </a:bodyPr>
           <a:lstStyle/>
           <a:p>
-            <a:pPr algn="l"/>
+            <a:pPr algn="l">
+              <a:spcBef>
+                <a:spcPts val="0"/>
+              </a:spcBef>
+              <a:spcAft>
+                <a:spcPts val="0"/>
+              </a:spcAft>
+            </a:pPr>
             <a:r>
               <a:rPr sz="1500" b="0">
                 <a:solidFill>
@@ -11934,7 +13404,7 @@
                 </a:solidFill>
                 <a:latin typeface="Calibri"/>
               </a:rPr>
-              <a:t>A sentence-transformers model reads a sentence and returns a fixed-length array of numbers -- 384 of them, for the model used in this lecture. Geometrically, that sentence is now a single point in 384-dimensional space.</a:t>
+              <a:t>A small local model (sentence-transformers) reads a sentence and returns a list of 384 numbers. Think of those numbers as coordinates for that sentence -- a single point you can compare with other points.</a:t>
             </a:r>
           </a:p>
         </p:txBody>
@@ -12005,6 +13475,14 @@
           </a:bodyPr>
           <a:lstStyle/>
           <a:p>
+            <a:pPr>
+              <a:spcBef>
+                <a:spcPts val="0"/>
+              </a:spcBef>
+              <a:spcAft>
+                <a:spcPts val="0"/>
+              </a:spcAft>
+            </a:pPr>
             <a:r>
               <a:rPr sz="1300" b="0">
                 <a:solidFill>
@@ -12016,6 +13494,14 @@
             </a:r>
           </a:p>
           <a:p>
+            <a:pPr>
+              <a:spcBef>
+                <a:spcPts val="0"/>
+              </a:spcBef>
+              <a:spcAft>
+                <a:spcPts val="0"/>
+              </a:spcAft>
+            </a:pPr>
             <a:r>
               <a:rPr sz="1300" b="0">
                 <a:solidFill>
@@ -12027,6 +13513,14 @@
             </a:r>
           </a:p>
           <a:p>
+            <a:pPr>
+              <a:spcBef>
+                <a:spcPts val="0"/>
+              </a:spcBef>
+              <a:spcAft>
+                <a:spcPts val="0"/>
+              </a:spcAft>
+            </a:pPr>
             <a:r>
               <a:rPr sz="1300" b="0">
                 <a:solidFill>
@@ -12038,6 +13532,14 @@
             </a:r>
           </a:p>
           <a:p>
+            <a:pPr>
+              <a:spcBef>
+                <a:spcPts val="0"/>
+              </a:spcBef>
+              <a:spcAft>
+                <a:spcPts val="0"/>
+              </a:spcAft>
+            </a:pPr>
             <a:r>
               <a:rPr sz="1300" b="0">
                 <a:solidFill>
@@ -12045,7 +13547,7 @@
                 </a:solidFill>
                 <a:latin typeface="Courier New"/>
               </a:rPr>
-              <a:t># 384 numbers total -- same length for a 3-word or 300-word input</a:t>
+              <a:t># 384 numbers -- same length whether the input is 3 words or 300</a:t>
             </a:r>
           </a:p>
         </p:txBody>
@@ -12072,7 +13574,14 @@
           </a:bodyPr>
           <a:lstStyle/>
           <a:p>
-            <a:pPr algn="l"/>
+            <a:pPr algn="l">
+              <a:spcBef>
+                <a:spcPts val="0"/>
+              </a:spcBef>
+              <a:spcAft>
+                <a:spcPts val="0"/>
+              </a:spcAft>
+            </a:pPr>
             <a:r>
               <a:rPr sz="1400" b="1">
                 <a:solidFill>
@@ -12080,7 +13589,7 @@
                 </a:solidFill>
                 <a:latin typeface="Calibri"/>
               </a:rPr>
-              <a:t>Sentences with similar MEANING land close together in that space. Sentences about unrelated topics land far apart.</a:t>
+              <a:t>Useful property: similar MEANING -&gt; points land close together. Unrelated topics -&gt; points land far apart.</a:t>
             </a:r>
           </a:p>
         </p:txBody>
@@ -12133,7 +13642,14 @@
           </a:bodyPr>
           <a:lstStyle/>
           <a:p>
-            <a:pPr algn="l"/>
+            <a:pPr algn="l">
+              <a:spcBef>
+                <a:spcPts val="0"/>
+              </a:spcBef>
+              <a:spcAft>
+                <a:spcPts val="0"/>
+              </a:spcAft>
+            </a:pPr>
             <a:r>
               <a:rPr sz="2600" b="1">
                 <a:solidFill>
@@ -12141,7 +13657,7 @@
                 </a:solidFill>
                 <a:latin typeface="Cambria"/>
               </a:rPr>
-              <a:t>Analogy: an embedding = the opposite of a hash</a:t>
+              <a:t>Analogy: an embedding = a fingerprint of meaning</a:t>
             </a:r>
           </a:p>
         </p:txBody>
@@ -12168,7 +13684,14 @@
           </a:bodyPr>
           <a:lstStyle/>
           <a:p>
-            <a:pPr algn="l"/>
+            <a:pPr algn="l">
+              <a:spcBef>
+                <a:spcPts val="0"/>
+              </a:spcBef>
+              <a:spcAft>
+                <a:spcPts val="0"/>
+              </a:spcAft>
+            </a:pPr>
             <a:r>
               <a:rPr sz="1300" b="0">
                 <a:solidFill>
@@ -12176,7 +13699,7 @@
                 </a:solidFill>
                 <a:latin typeface="Calibri"/>
               </a:rPr>
-              <a:t>Same idea, opposite goal</a:t>
+              <a:t>Same "turn text into a fixed fingerprint" idea -- different goal from a hash</a:t>
             </a:r>
           </a:p>
         </p:txBody>
@@ -12203,7 +13726,14 @@
           </a:bodyPr>
           <a:lstStyle/>
           <a:p>
-            <a:pPr algn="r"/>
+            <a:pPr algn="r">
+              <a:spcBef>
+                <a:spcPts val="0"/>
+              </a:spcBef>
+              <a:spcAft>
+                <a:spcPts val="0"/>
+              </a:spcAft>
+            </a:pPr>
             <a:r>
               <a:rPr sz="900" b="0">
                 <a:solidFill>
@@ -12225,7 +13755,7 @@
         <p:spPr>
           <a:xfrm>
             <a:off x="822960" y="1600200"/>
-            <a:ext cx="10058400" cy="777240"/>
+            <a:ext cx="10058400" cy="868680"/>
           </a:xfrm>
           <a:prstGeom prst="rect">
             <a:avLst/>
@@ -12268,21 +13798,28 @@
         </p:nvSpPr>
         <p:spPr>
           <a:xfrm>
-            <a:off x="1097280" y="1764792"/>
-            <a:ext cx="9509760" cy="502920"/>
-          </a:xfrm>
-          <a:prstGeom prst="rect">
-            <a:avLst/>
-          </a:prstGeom>
-          <a:noFill/>
-        </p:spPr>
-        <p:txBody>
-          <a:bodyPr wrap="square">
-            <a:spAutoFit/>
-          </a:bodyPr>
-          <a:lstStyle/>
-          <a:p>
-            <a:pPr algn="l"/>
+            <a:off x="1097280" y="1737360"/>
+            <a:ext cx="9509760" cy="640080"/>
+          </a:xfrm>
+          <a:prstGeom prst="rect">
+            <a:avLst/>
+          </a:prstGeom>
+          <a:noFill/>
+        </p:spPr>
+        <p:txBody>
+          <a:bodyPr wrap="square">
+            <a:spAutoFit/>
+          </a:bodyPr>
+          <a:lstStyle/>
+          <a:p>
+            <a:pPr algn="l">
+              <a:spcBef>
+                <a:spcPts val="0"/>
+              </a:spcBef>
+              <a:spcAft>
+                <a:spcPts val="0"/>
+              </a:spcAft>
+            </a:pPr>
             <a:r>
               <a:rPr sz="1500" b="1">
                 <a:solidFill>
@@ -12290,7 +13827,7 @@
                 </a:solidFill>
                 <a:latin typeface="Calibri"/>
               </a:rPr>
-              <a:t>sha256sum destroys similarity on purpose: change one character and the whole hash flips. An embedding is built to do the opposite -- preserve semantic closeness.</a:t>
+              <a:t>A hash (sha256sum / Docker digest) changes completely if you change one character. An embedding is built to keep similar texts close -- so you can search by meaning.</a:t>
             </a:r>
           </a:p>
         </p:txBody>
@@ -12303,7 +13840,7 @@
         </p:nvSpPr>
         <p:spPr>
           <a:xfrm>
-            <a:off x="822960" y="2560320"/>
+            <a:off x="822960" y="2651760"/>
             <a:ext cx="10058400" cy="2651760"/>
           </a:xfrm>
           <a:prstGeom prst="rect">
@@ -12347,7 +13884,7 @@
         </p:nvSpPr>
         <p:spPr>
           <a:xfrm>
-            <a:off x="1051560" y="2743200"/>
+            <a:off x="1051560" y="2834640"/>
             <a:ext cx="9601200" cy="2286000"/>
           </a:xfrm>
           <a:prstGeom prst="rect">
@@ -12361,6 +13898,14 @@
           </a:bodyPr>
           <a:lstStyle/>
           <a:p>
+            <a:pPr>
+              <a:spcBef>
+                <a:spcPts val="0"/>
+              </a:spcBef>
+              <a:spcAft>
+                <a:spcPts val="0"/>
+              </a:spcAft>
+            </a:pPr>
             <a:r>
               <a:rPr sz="1300" b="0">
                 <a:solidFill>
@@ -12372,6 +13917,14 @@
             </a:r>
           </a:p>
           <a:p>
+            <a:pPr>
+              <a:spcBef>
+                <a:spcPts val="0"/>
+              </a:spcBef>
+              <a:spcAft>
+                <a:spcPts val="0"/>
+              </a:spcAft>
+            </a:pPr>
             <a:r>
               <a:rPr sz="1300" b="0">
                 <a:solidFill>
@@ -12383,6 +13936,14 @@
             </a:r>
           </a:p>
           <a:p>
+            <a:pPr>
+              <a:spcBef>
+                <a:spcPts val="0"/>
+              </a:spcBef>
+              <a:spcAft>
+                <a:spcPts val="0"/>
+              </a:spcAft>
+            </a:pPr>
             <a:r>
               <a:rPr sz="1300" b="0">
                 <a:solidFill>
@@ -12394,6 +13955,14 @@
             </a:r>
           </a:p>
           <a:p>
+            <a:pPr>
+              <a:spcBef>
+                <a:spcPts val="0"/>
+              </a:spcBef>
+              <a:spcAft>
+                <a:spcPts val="0"/>
+              </a:spcAft>
+            </a:pPr>
             <a:r>
               <a:rPr sz="1300" b="0">
                 <a:solidFill>
@@ -12401,10 +13970,18 @@
                 </a:solidFill>
                 <a:latin typeface="Courier New"/>
               </a:rPr>
-              <a:t># 100% different -- the "avalanche effect"</a:t>
-            </a:r>
-          </a:p>
-          <a:p>
+              <a:t># Hash: one tiny change -&gt; totally different fingerprint</a:t>
+            </a:r>
+          </a:p>
+          <a:p>
+            <a:pPr>
+              <a:spcBef>
+                <a:spcPts val="0"/>
+              </a:spcBef>
+              <a:spcAft>
+                <a:spcPts val="0"/>
+              </a:spcAft>
+            </a:pPr>
             <a:r>
               <a:rPr sz="1300" b="0">
                 <a:solidFill>
@@ -12416,6 +13993,14 @@
             </a:r>
           </a:p>
           <a:p>
+            <a:pPr>
+              <a:spcBef>
+                <a:spcPts val="0"/>
+              </a:spcBef>
+              <a:spcAft>
+                <a:spcPts val="0"/>
+              </a:spcAft>
+            </a:pPr>
             <a:r>
               <a:rPr sz="1300" b="0">
                 <a:solidFill>
@@ -12423,10 +14008,18 @@
                 </a:solidFill>
                 <a:latin typeface="Courier New"/>
               </a:rPr>
-              <a:t># The SAME two near-identical sentences, embedded instead:</a:t>
-            </a:r>
-          </a:p>
-          <a:p>
+              <a:t># Same two sentences, embedded instead:</a:t>
+            </a:r>
+          </a:p>
+          <a:p>
+            <a:pPr>
+              <a:spcBef>
+                <a:spcPts val="0"/>
+              </a:spcBef>
+              <a:spcAft>
+                <a:spcPts val="0"/>
+              </a:spcAft>
+            </a:pPr>
             <a:r>
               <a:rPr sz="1300" b="1">
                 <a:solidFill>
@@ -12487,7 +14080,14 @@
           </a:bodyPr>
           <a:lstStyle/>
           <a:p>
-            <a:pPr algn="l"/>
+            <a:pPr algn="l">
+              <a:spcBef>
+                <a:spcPts val="0"/>
+              </a:spcBef>
+              <a:spcAft>
+                <a:spcPts val="0"/>
+              </a:spcAft>
+            </a:pPr>
             <a:r>
               <a:rPr sz="1300" b="1">
                 <a:solidFill>
@@ -12495,7 +14095,7 @@
                 </a:solidFill>
                 <a:latin typeface="Calibri"/>
               </a:rPr>
-              <a:t>THEORY 2  |  SLIDES 7-8</a:t>
+              <a:t>THEORY 2  |  SLIDES 8-9</a:t>
             </a:r>
           </a:p>
         </p:txBody>
@@ -12522,7 +14122,14 @@
           </a:bodyPr>
           <a:lstStyle/>
           <a:p>
-            <a:pPr algn="l"/>
+            <a:pPr algn="l">
+              <a:spcBef>
+                <a:spcPts val="0"/>
+              </a:spcBef>
+              <a:spcAft>
+                <a:spcPts val="0"/>
+              </a:spcAft>
+            </a:pPr>
             <a:r>
               <a:rPr sz="4000" b="1">
                 <a:solidFill>
@@ -12557,7 +14164,14 @@
           </a:bodyPr>
           <a:lstStyle/>
           <a:p>
-            <a:pPr algn="l"/>
+            <a:pPr algn="l">
+              <a:spcBef>
+                <a:spcPts val="0"/>
+              </a:spcBef>
+              <a:spcAft>
+                <a:spcPts val="0"/>
+              </a:spcAft>
+            </a:pPr>
             <a:r>
               <a:rPr sz="1600" b="0">
                 <a:solidFill>
@@ -12565,7 +14179,7 @@
                 </a:solidFill>
                 <a:latin typeface="Cambria"/>
               </a:rPr>
-              <a:t>How do you find the closest point among thousands?</a:t>
+              <a:t>How do you decide which texts are "close"?</a:t>
             </a:r>
           </a:p>
         </p:txBody>
@@ -12592,7 +14206,14 @@
           </a:bodyPr>
           <a:lstStyle/>
           <a:p>
-            <a:pPr algn="r"/>
+            <a:pPr algn="r">
+              <a:spcBef>
+                <a:spcPts val="0"/>
+              </a:spcBef>
+              <a:spcAft>
+                <a:spcPts val="0"/>
+              </a:spcAft>
+            </a:pPr>
             <a:r>
               <a:rPr sz="900" b="0">
                 <a:solidFill>
@@ -12653,7 +14274,14 @@
           </a:bodyPr>
           <a:lstStyle/>
           <a:p>
-            <a:pPr algn="l"/>
+            <a:pPr algn="l">
+              <a:spcBef>
+                <a:spcPts val="0"/>
+              </a:spcBef>
+              <a:spcAft>
+                <a:spcPts val="0"/>
+              </a:spcAft>
+            </a:pPr>
             <a:r>
               <a:rPr sz="2600" b="1">
                 <a:solidFill>
@@ -12688,7 +14316,14 @@
           </a:bodyPr>
           <a:lstStyle/>
           <a:p>
-            <a:pPr algn="l"/>
+            <a:pPr algn="l">
+              <a:spcBef>
+                <a:spcPts val="0"/>
+              </a:spcBef>
+              <a:spcAft>
+                <a:spcPts val="0"/>
+              </a:spcAft>
+            </a:pPr>
             <a:r>
               <a:rPr sz="1300" b="0">
                 <a:solidFill>
@@ -12696,7 +14331,7 @@
                 </a:solidFill>
                 <a:latin typeface="Calibri"/>
               </a:rPr>
-              <a:t>The single number that turns “close in meaning” into math</a:t>
+              <a:t>One number that answers: "do these two texts point the same way?"</a:t>
             </a:r>
           </a:p>
         </p:txBody>
@@ -12723,7 +14358,14 @@
           </a:bodyPr>
           <a:lstStyle/>
           <a:p>
-            <a:pPr algn="r"/>
+            <a:pPr algn="r">
+              <a:spcBef>
+                <a:spcPts val="0"/>
+              </a:spcBef>
+              <a:spcAft>
+                <a:spcPts val="0"/>
+              </a:spcAft>
+            </a:pPr>
             <a:r>
               <a:rPr sz="900" b="0">
                 <a:solidFill>
@@ -12745,7 +14387,7 @@
         <p:spPr>
           <a:xfrm>
             <a:off x="822960" y="1600200"/>
-            <a:ext cx="10058400" cy="1188720"/>
+            <a:ext cx="10058400" cy="1097280"/>
           </a:xfrm>
           <a:prstGeom prst="rect">
             <a:avLst/>
@@ -12788,21 +14430,28 @@
         </p:nvSpPr>
         <p:spPr>
           <a:xfrm>
-            <a:off x="1097280" y="1755648"/>
-            <a:ext cx="9509760" cy="914400"/>
-          </a:xfrm>
-          <a:prstGeom prst="rect">
-            <a:avLst/>
-          </a:prstGeom>
-          <a:noFill/>
-        </p:spPr>
-        <p:txBody>
-          <a:bodyPr wrap="square">
-            <a:spAutoFit/>
-          </a:bodyPr>
-          <a:lstStyle/>
-          <a:p>
-            <a:pPr algn="l"/>
+            <a:off x="1097280" y="1737360"/>
+            <a:ext cx="9509760" cy="868680"/>
+          </a:xfrm>
+          <a:prstGeom prst="rect">
+            <a:avLst/>
+          </a:prstGeom>
+          <a:noFill/>
+        </p:spPr>
+        <p:txBody>
+          <a:bodyPr wrap="square">
+            <a:spAutoFit/>
+          </a:bodyPr>
+          <a:lstStyle/>
+          <a:p>
+            <a:pPr algn="l">
+              <a:spcBef>
+                <a:spcPts val="0"/>
+              </a:spcBef>
+              <a:spcAft>
+                <a:spcPts val="0"/>
+              </a:spcAft>
+            </a:pPr>
             <a:r>
               <a:rPr sz="1500" b="0">
                 <a:solidFill>
@@ -12810,7 +14459,7 @@
                 </a:solidFill>
                 <a:latin typeface="Calibri"/>
               </a:rPr>
-              <a:t>Cosine similarity measures the angle between two vectors, ignoring their length. It returns a score from -1 to 1 (in practice usually 0 to 1 for sentence embeddings): 1.0 means “pointing the same direction” -- near-identical meaning.</a:t>
+              <a:t>Imagine each embedding as an arrow. Cosine similarity asks how close those two arrows point in the same direction -- and ignores how long each arrow is. Score near 1.0 = nearly the same meaning. Near 0 = unrelated.</a:t>
             </a:r>
           </a:p>
         </p:txBody>
@@ -12823,8 +14472,8 @@
         </p:nvSpPr>
         <p:spPr>
           <a:xfrm>
-            <a:off x="822960" y="3017520"/>
-            <a:ext cx="10058400" cy="1737360"/>
+            <a:off x="822960" y="2880360"/>
+            <a:ext cx="10058400" cy="1828800"/>
           </a:xfrm>
           <a:prstGeom prst="rect">
             <a:avLst/>
@@ -12867,20 +14516,28 @@
         </p:nvSpPr>
         <p:spPr>
           <a:xfrm>
-            <a:off x="1051560" y="3200400"/>
-            <a:ext cx="9601200" cy="1371600"/>
-          </a:xfrm>
-          <a:prstGeom prst="rect">
-            <a:avLst/>
-          </a:prstGeom>
-          <a:noFill/>
-        </p:spPr>
-        <p:txBody>
-          <a:bodyPr wrap="square">
-            <a:spAutoFit/>
-          </a:bodyPr>
-          <a:lstStyle/>
-          <a:p>
+            <a:off x="1051560" y="3063240"/>
+            <a:ext cx="9601200" cy="1554480"/>
+          </a:xfrm>
+          <a:prstGeom prst="rect">
+            <a:avLst/>
+          </a:prstGeom>
+          <a:noFill/>
+        </p:spPr>
+        <p:txBody>
+          <a:bodyPr wrap="square">
+            <a:spAutoFit/>
+          </a:bodyPr>
+          <a:lstStyle/>
+          <a:p>
+            <a:pPr>
+              <a:spcBef>
+                <a:spcPts val="0"/>
+              </a:spcBef>
+              <a:spcAft>
+                <a:spcPts val="0"/>
+              </a:spcAft>
+            </a:pPr>
             <a:r>
               <a:rPr sz="1300" b="0">
                 <a:solidFill>
@@ -12892,6 +14549,14 @@
             </a:r>
           </a:p>
           <a:p>
+            <a:pPr>
+              <a:spcBef>
+                <a:spcPts val="0"/>
+              </a:spcBef>
+              <a:spcAft>
+                <a:spcPts val="0"/>
+              </a:spcAft>
+            </a:pPr>
             <a:r>
               <a:rPr sz="1300" b="0">
                 <a:solidFill>
@@ -12903,6 +14568,14 @@
             </a:r>
           </a:p>
           <a:p>
+            <a:pPr>
+              <a:spcBef>
+                <a:spcPts val="0"/>
+              </a:spcBef>
+              <a:spcAft>
+                <a:spcPts val="0"/>
+              </a:spcAft>
+            </a:pPr>
             <a:r>
               <a:rPr sz="1300" b="1">
                 <a:solidFill>
@@ -12910,10 +14583,18 @@
                 </a:solidFill>
                 <a:latin typeface="Courier New"/>
               </a:rPr>
-              <a:t>-&gt; cosine similarity: 0.61   # same meaning, almost no shared words</a:t>
-            </a:r>
-          </a:p>
-          <a:p>
+              <a:t>-&gt; cosine similarity: ~0.61   # same meaning, almost no shared words</a:t>
+            </a:r>
+          </a:p>
+          <a:p>
+            <a:pPr>
+              <a:spcBef>
+                <a:spcPts val="0"/>
+              </a:spcBef>
+              <a:spcAft>
+                <a:spcPts val="0"/>
+              </a:spcAft>
+            </a:pPr>
             <a:r>
               <a:rPr sz="1300" b="0">
                 <a:solidFill>
@@ -12925,6 +14606,14 @@
             </a:r>
           </a:p>
           <a:p>
+            <a:pPr>
+              <a:spcBef>
+                <a:spcPts val="0"/>
+              </a:spcBef>
+              <a:spcAft>
+                <a:spcPts val="0"/>
+              </a:spcAft>
+            </a:pPr>
             <a:r>
               <a:rPr sz="1300" b="0">
                 <a:solidFill>
@@ -12936,6 +14625,14 @@
             </a:r>
           </a:p>
           <a:p>
+            <a:pPr>
+              <a:spcBef>
+                <a:spcPts val="0"/>
+              </a:spcBef>
+              <a:spcAft>
+                <a:spcPts val="0"/>
+              </a:spcAft>
+            </a:pPr>
             <a:r>
               <a:rPr sz="1300" b="0">
                 <a:solidFill>
@@ -12943,7 +14640,7 @@
                 </a:solidFill>
                 <a:latin typeface="Courier New"/>
               </a:rPr>
-              <a:t>-&gt; cosine similarity: -0.01  # unrelated</a:t>
+              <a:t>-&gt; cosine similarity: ~0.00   # unrelated</a:t>
             </a:r>
           </a:p>
         </p:txBody>
@@ -12970,7 +14667,14 @@
           </a:bodyPr>
           <a:lstStyle/>
           <a:p>
-            <a:pPr algn="l"/>
+            <a:pPr algn="l">
+              <a:spcBef>
+                <a:spcPts val="0"/>
+              </a:spcBef>
+              <a:spcAft>
+                <a:spcPts val="0"/>
+              </a:spcAft>
+            </a:pPr>
             <a:r>
               <a:rPr sz="1400" b="1">
                 <a:solidFill>
@@ -12978,7 +14682,7 @@
                 </a:solidFill>
                 <a:latin typeface="Calibri"/>
               </a:rPr>
-              <a:t>Nearest-neighbour search = score every stored vector against the query vector, then return the top K highest scores.</a:t>
+              <a:t>Nearest-neighbour search = score the query against every stored vector, then keep the top K highest scores. That's it.</a:t>
             </a:r>
           </a:p>
         </p:txBody>
@@ -13031,7 +14735,14 @@
           </a:bodyPr>
           <a:lstStyle/>
           <a:p>
-            <a:pPr algn="l"/>
+            <a:pPr algn="l">
+              <a:spcBef>
+                <a:spcPts val="0"/>
+              </a:spcBef>
+              <a:spcAft>
+                <a:spcPts val="0"/>
+              </a:spcAft>
+            </a:pPr>
             <a:r>
               <a:rPr sz="2600" b="1">
                 <a:solidFill>
@@ -13039,7 +14750,7 @@
                 </a:solidFill>
                 <a:latin typeface="Cambria"/>
               </a:rPr>
-              <a:t>Analogy: cosine similarity = anomaly detection against a baseline</a:t>
+              <a:t>Analogy: cosine similarity = how close two arrows point</a:t>
             </a:r>
           </a:p>
         </p:txBody>
@@ -13066,7 +14777,14 @@
           </a:bodyPr>
           <a:lstStyle/>
           <a:p>
-            <a:pPr algn="l"/>
+            <a:pPr algn="l">
+              <a:spcBef>
+                <a:spcPts val="0"/>
+              </a:spcBef>
+              <a:spcAft>
+                <a:spcPts val="0"/>
+              </a:spcAft>
+            </a:pPr>
             <a:r>
               <a:rPr sz="1300" b="0">
                 <a:solidFill>
@@ -13074,7 +14792,7 @@
                 </a:solidFill>
                 <a:latin typeface="Calibri"/>
               </a:rPr>
-              <a:t>You already compare a new signal to a known-good one</a:t>
+              <a:t>A tiny picture in words -- no heavy math required</a:t>
             </a:r>
           </a:p>
         </p:txBody>
@@ -13101,7 +14819,14 @@
           </a:bodyPr>
           <a:lstStyle/>
           <a:p>
-            <a:pPr algn="r"/>
+            <a:pPr algn="r">
+              <a:spcBef>
+                <a:spcPts val="0"/>
+              </a:spcBef>
+              <a:spcAft>
+                <a:spcPts val="0"/>
+              </a:spcAft>
+            </a:pPr>
             <a:r>
               <a:rPr sz="900" b="0">
                 <a:solidFill>
@@ -13122,8 +14847,8 @@
         </p:nvSpPr>
         <p:spPr>
           <a:xfrm>
-            <a:off x="822960" y="1737360"/>
-            <a:ext cx="4480560" cy="2743200"/>
+            <a:off x="822960" y="1600200"/>
+            <a:ext cx="5029200" cy="3291840"/>
           </a:xfrm>
           <a:prstGeom prst="rect">
             <a:avLst/>
@@ -13166,21 +14891,28 @@
         </p:nvSpPr>
         <p:spPr>
           <a:xfrm>
-            <a:off x="1051560" y="1920240"/>
-            <a:ext cx="4023360" cy="365760"/>
-          </a:xfrm>
-          <a:prstGeom prst="rect">
-            <a:avLst/>
-          </a:prstGeom>
-          <a:noFill/>
-        </p:spPr>
-        <p:txBody>
-          <a:bodyPr wrap="square">
-            <a:spAutoFit/>
-          </a:bodyPr>
-          <a:lstStyle/>
-          <a:p>
-            <a:pPr algn="l"/>
+            <a:off x="1051560" y="1783080"/>
+            <a:ext cx="4572000" cy="365760"/>
+          </a:xfrm>
+          <a:prstGeom prst="rect">
+            <a:avLst/>
+          </a:prstGeom>
+          <a:noFill/>
+        </p:spPr>
+        <p:txBody>
+          <a:bodyPr wrap="square">
+            <a:spAutoFit/>
+          </a:bodyPr>
+          <a:lstStyle/>
+          <a:p>
+            <a:pPr algn="l">
+              <a:spcBef>
+                <a:spcPts val="0"/>
+              </a:spcBef>
+              <a:spcAft>
+                <a:spcPts val="0"/>
+              </a:spcAft>
+            </a:pPr>
             <a:r>
               <a:rPr sz="1200" b="1">
                 <a:solidFill>
@@ -13188,7 +14920,7 @@
                 </a:solidFill>
                 <a:latin typeface="Calibri"/>
               </a:rPr>
-              <a:t>AN ANOMALY DETECTOR</a:t>
+              <a:t>PICTURE THIS ON A FLAT PAGE</a:t>
             </a:r>
           </a:p>
         </p:txBody>
@@ -13201,21 +14933,28 @@
         </p:nvSpPr>
         <p:spPr>
           <a:xfrm>
-            <a:off x="1051560" y="2331720"/>
-            <a:ext cx="4023360" cy="2011680"/>
-          </a:xfrm>
-          <a:prstGeom prst="rect">
-            <a:avLst/>
-          </a:prstGeom>
-          <a:noFill/>
-        </p:spPr>
-        <p:txBody>
-          <a:bodyPr wrap="square">
-            <a:spAutoFit/>
-          </a:bodyPr>
-          <a:lstStyle/>
-          <a:p>
-            <a:pPr algn="l"/>
+            <a:off x="1051560" y="2286000"/>
+            <a:ext cx="4572000" cy="2377440"/>
+          </a:xfrm>
+          <a:prstGeom prst="rect">
+            <a:avLst/>
+          </a:prstGeom>
+          <a:noFill/>
+        </p:spPr>
+        <p:txBody>
+          <a:bodyPr wrap="square">
+            <a:spAutoFit/>
+          </a:bodyPr>
+          <a:lstStyle/>
+          <a:p>
+            <a:pPr algn="l">
+              <a:spcBef>
+                <a:spcPts val="0"/>
+              </a:spcBef>
+              <a:spcAft>
+                <a:spcPts val="0"/>
+              </a:spcAft>
+            </a:pPr>
             <a:r>
               <a:rPr sz="1400" b="0">
                 <a:solidFill>
@@ -13223,7 +14962,102 @@
                 </a:solidFill>
                 <a:latin typeface="Calibri"/>
               </a:rPr>
-              <a:t>Compares a new metrics vector (CPU, latency, error rate) against historical “normal” vectors to find the closest match -- regardless of absolute scale.</a:t>
+              <a:t>Draw arrow A for "pod ran out of memory."</a:t>
+            </a:r>
+          </a:p>
+          <a:p>
+            <a:pPr algn="l">
+              <a:spcBef>
+                <a:spcPts val="0"/>
+              </a:spcBef>
+              <a:spcAft>
+                <a:spcPts val="0"/>
+              </a:spcAft>
+            </a:pPr>
+            <a:r>
+              <a:rPr sz="1400" b="0">
+                <a:solidFill>
+                  <a:srgbClr val="0E1B2B"/>
+                </a:solidFill>
+                <a:latin typeface="Calibri"/>
+              </a:rPr>
+              <a:t>Draw arrow B for "container used too much RAM."</a:t>
+            </a:r>
+          </a:p>
+          <a:p>
+            <a:pPr algn="l">
+              <a:spcBef>
+                <a:spcPts val="0"/>
+              </a:spcBef>
+              <a:spcAft>
+                <a:spcPts val="0"/>
+              </a:spcAft>
+            </a:pPr>
+            <a:r>
+              <a:rPr sz="1400" b="0">
+                <a:solidFill>
+                  <a:srgbClr val="0E1B2B"/>
+                </a:solidFill>
+                <a:latin typeface="Calibri"/>
+              </a:rPr>
+              <a:t/>
+            </a:r>
+          </a:p>
+          <a:p>
+            <a:pPr algn="l">
+              <a:spcBef>
+                <a:spcPts val="0"/>
+              </a:spcBef>
+              <a:spcAft>
+                <a:spcPts val="0"/>
+              </a:spcAft>
+            </a:pPr>
+            <a:r>
+              <a:rPr sz="1400" b="0">
+                <a:solidFill>
+                  <a:srgbClr val="0E1B2B"/>
+                </a:solidFill>
+                <a:latin typeface="Calibri"/>
+              </a:rPr>
+              <a:t>Those two arrows point almost the same way -- high cosine similarity.</a:t>
+            </a:r>
+          </a:p>
+          <a:p>
+            <a:pPr algn="l">
+              <a:spcBef>
+                <a:spcPts val="0"/>
+              </a:spcBef>
+              <a:spcAft>
+                <a:spcPts val="0"/>
+              </a:spcAft>
+            </a:pPr>
+            <a:r>
+              <a:rPr sz="1400" b="0">
+                <a:solidFill>
+                  <a:srgbClr val="0E1B2B"/>
+                </a:solidFill>
+                <a:latin typeface="Calibri"/>
+              </a:rPr>
+              <a:t/>
+            </a:r>
+          </a:p>
+          <a:p>
+            <a:pPr algn="l">
+              <a:spcBef>
+                <a:spcPts val="0"/>
+              </a:spcBef>
+              <a:spcAft>
+                <a:spcPts val="0"/>
+              </a:spcAft>
+            </a:pPr>
+            <a:r>
+              <a:rPr sz="1400" b="0">
+                <a:solidFill>
+                  <a:srgbClr val="0E1B2B"/>
+                </a:solidFill>
+                <a:latin typeface="Calibri"/>
+              </a:rPr>
+              <a:t>Draw arrow C for "lunch is at noon." It points somewhere else -- low score.</a:t>
             </a:r>
           </a:p>
         </p:txBody>
@@ -13236,8 +15070,8 @@
         </p:nvSpPr>
         <p:spPr>
           <a:xfrm>
-            <a:off x="6309360" y="1737360"/>
-            <a:ext cx="4480560" cy="2743200"/>
+            <a:off x="6126480" y="1600200"/>
+            <a:ext cx="5029200" cy="3291840"/>
           </a:xfrm>
           <a:prstGeom prst="rect">
             <a:avLst/>
@@ -13280,21 +15114,28 @@
         </p:nvSpPr>
         <p:spPr>
           <a:xfrm>
-            <a:off x="6537960" y="1920240"/>
-            <a:ext cx="4023360" cy="365760"/>
-          </a:xfrm>
-          <a:prstGeom prst="rect">
-            <a:avLst/>
-          </a:prstGeom>
-          <a:noFill/>
-        </p:spPr>
-        <p:txBody>
-          <a:bodyPr wrap="square">
-            <a:spAutoFit/>
-          </a:bodyPr>
-          <a:lstStyle/>
-          <a:p>
-            <a:pPr algn="l"/>
+            <a:off x="6355080" y="1783080"/>
+            <a:ext cx="4572000" cy="365760"/>
+          </a:xfrm>
+          <a:prstGeom prst="rect">
+            <a:avLst/>
+          </a:prstGeom>
+          <a:noFill/>
+        </p:spPr>
+        <p:txBody>
+          <a:bodyPr wrap="square">
+            <a:spAutoFit/>
+          </a:bodyPr>
+          <a:lstStyle/>
+          <a:p>
+            <a:pPr algn="l">
+              <a:spcBef>
+                <a:spcPts val="0"/>
+              </a:spcBef>
+              <a:spcAft>
+                <a:spcPts val="0"/>
+              </a:spcAft>
+            </a:pPr>
             <a:r>
               <a:rPr sz="1200" b="1">
                 <a:solidFill>
@@ -13302,7 +15143,7 @@
                 </a:solidFill>
                 <a:latin typeface="Calibri"/>
               </a:rPr>
-              <a:t>COSINE SIMILARITY</a:t>
+              <a:t>WHAT THE SCORE MEANS</a:t>
             </a:r>
           </a:p>
         </p:txBody>
@@ -13315,21 +15156,28 @@
         </p:nvSpPr>
         <p:spPr>
           <a:xfrm>
-            <a:off x="6537960" y="2331720"/>
-            <a:ext cx="4023360" cy="2011680"/>
-          </a:xfrm>
-          <a:prstGeom prst="rect">
-            <a:avLst/>
-          </a:prstGeom>
-          <a:noFill/>
-        </p:spPr>
-        <p:txBody>
-          <a:bodyPr wrap="square">
-            <a:spAutoFit/>
-          </a:bodyPr>
-          <a:lstStyle/>
-          <a:p>
-            <a:pPr algn="l"/>
+            <a:off x="6355080" y="2286000"/>
+            <a:ext cx="4572000" cy="2377440"/>
+          </a:xfrm>
+          <a:prstGeom prst="rect">
+            <a:avLst/>
+          </a:prstGeom>
+          <a:noFill/>
+        </p:spPr>
+        <p:txBody>
+          <a:bodyPr wrap="square">
+            <a:spAutoFit/>
+          </a:bodyPr>
+          <a:lstStyle/>
+          <a:p>
+            <a:pPr algn="l">
+              <a:spcBef>
+                <a:spcPts val="0"/>
+              </a:spcBef>
+              <a:spcAft>
+                <a:spcPts val="0"/>
+              </a:spcAft>
+            </a:pPr>
             <a:r>
               <a:rPr sz="1400" b="0">
                 <a:solidFill>
@@ -13337,7 +15185,83 @@
                 </a:solidFill>
                 <a:latin typeface="Calibri"/>
               </a:rPr>
-              <a:t>Compares a new text's embedding against stored embeddings to find the closest match in MEANING -- regardless of sentence length or wording.</a:t>
+              <a:t>~1.0  nearly the same meaning</a:t>
+            </a:r>
+          </a:p>
+          <a:p>
+            <a:pPr algn="l">
+              <a:spcBef>
+                <a:spcPts val="0"/>
+              </a:spcBef>
+              <a:spcAft>
+                <a:spcPts val="0"/>
+              </a:spcAft>
+            </a:pPr>
+            <a:r>
+              <a:rPr sz="1400" b="0">
+                <a:solidFill>
+                  <a:srgbClr val="FFFFFF"/>
+                </a:solidFill>
+                <a:latin typeface="Calibri"/>
+              </a:rPr>
+              <a:t>~0.6  related (paraphrase / same topic)</a:t>
+            </a:r>
+          </a:p>
+          <a:p>
+            <a:pPr algn="l">
+              <a:spcBef>
+                <a:spcPts val="0"/>
+              </a:spcBef>
+              <a:spcAft>
+                <a:spcPts val="0"/>
+              </a:spcAft>
+            </a:pPr>
+            <a:r>
+              <a:rPr sz="1400" b="0">
+                <a:solidFill>
+                  <a:srgbClr val="FFFFFF"/>
+                </a:solidFill>
+                <a:latin typeface="Calibri"/>
+              </a:rPr>
+              <a:t>~0.0  unrelated</a:t>
+            </a:r>
+          </a:p>
+          <a:p>
+            <a:pPr algn="l">
+              <a:spcBef>
+                <a:spcPts val="0"/>
+              </a:spcBef>
+              <a:spcAft>
+                <a:spcPts val="0"/>
+              </a:spcAft>
+            </a:pPr>
+            <a:r>
+              <a:rPr sz="1400" b="0">
+                <a:solidFill>
+                  <a:srgbClr val="FFFFFF"/>
+                </a:solidFill>
+                <a:latin typeface="Calibri"/>
+              </a:rPr>
+              <a:t/>
+            </a:r>
+          </a:p>
+          <a:p>
+            <a:pPr algn="l">
+              <a:spcBef>
+                <a:spcPts val="0"/>
+              </a:spcBef>
+              <a:spcAft>
+                <a:spcPts val="0"/>
+              </a:spcAft>
+            </a:pPr>
+            <a:r>
+              <a:rPr sz="1400" b="0">
+                <a:solidFill>
+                  <a:srgbClr val="FFFFFF"/>
+                </a:solidFill>
+                <a:latin typeface="Calibri"/>
+              </a:rPr>
+              <a:t>You do not need the formula today. Remember: direction = meaning; closer directions = closer meanings.</a:t>
             </a:r>
           </a:p>
         </p:txBody>
@@ -13350,7 +15274,7 @@
         </p:nvSpPr>
         <p:spPr>
           <a:xfrm>
-            <a:off x="822960" y="4709160"/>
+            <a:off x="822960" y="5074920"/>
             <a:ext cx="10058400" cy="457200"/>
           </a:xfrm>
           <a:prstGeom prst="rect">
@@ -13364,15 +15288,22 @@
           </a:bodyPr>
           <a:lstStyle/>
           <a:p>
-            <a:pPr algn="l"/>
-            <a:r>
-              <a:rPr sz="1400" b="1">
+            <a:pPr algn="l">
+              <a:spcBef>
+                <a:spcPts val="0"/>
+              </a:spcBef>
+              <a:spcAft>
+                <a:spcPts val="0"/>
+              </a:spcAft>
+            </a:pPr>
+            <a:r>
+              <a:rPr sz="1300" b="1">
                 <a:solidFill>
                   <a:srgbClr val="0E1B2B"/>
                 </a:solidFill>
                 <a:latin typeface="Calibri"/>
               </a:rPr>
-              <a:t>Same math, same intent: normalize away the scale, then measure how alike two things really are.</a:t>
+              <a:t>Real embeddings use hundreds of dimensions. The intuition is the same as this 2D picture -- just with many more axes.</a:t>
             </a:r>
           </a:p>
         </p:txBody>

--- a/lecture2/L2_Embeddings_VectorDatabases_DevOps.pptx
+++ b/lecture2/L2_Embeddings_VectorDatabases_DevOps.pptx
@@ -5,31 +5,31 @@
     <p:sldMasterId id="2147483648" r:id="rId1"/>
   </p:sldMasterIdLst>
   <p:sldIdLst>
-    <p:sldId id="256" r:id="rId7"/>
-    <p:sldId id="257" r:id="rId8"/>
-    <p:sldId id="258" r:id="rId9"/>
-    <p:sldId id="259" r:id="rId10"/>
-    <p:sldId id="260" r:id="rId11"/>
-    <p:sldId id="261" r:id="rId12"/>
-    <p:sldId id="262" r:id="rId13"/>
-    <p:sldId id="263" r:id="rId14"/>
-    <p:sldId id="264" r:id="rId15"/>
-    <p:sldId id="265" r:id="rId16"/>
-    <p:sldId id="266" r:id="rId17"/>
-    <p:sldId id="267" r:id="rId18"/>
-    <p:sldId id="268" r:id="rId19"/>
-    <p:sldId id="269" r:id="rId20"/>
-    <p:sldId id="270" r:id="rId21"/>
-    <p:sldId id="271" r:id="rId22"/>
-    <p:sldId id="272" r:id="rId23"/>
-    <p:sldId id="273" r:id="rId24"/>
-    <p:sldId id="274" r:id="rId25"/>
-    <p:sldId id="275" r:id="rId26"/>
-    <p:sldId id="276" r:id="rId27"/>
-    <p:sldId id="277" r:id="rId28"/>
-    <p:sldId id="278" r:id="rId29"/>
+    <p:sldId id="256" r:id="rId2"/>
+    <p:sldId id="257" r:id="rId3"/>
+    <p:sldId id="258" r:id="rId4"/>
+    <p:sldId id="259" r:id="rId5"/>
+    <p:sldId id="260" r:id="rId6"/>
+    <p:sldId id="261" r:id="rId7"/>
+    <p:sldId id="262" r:id="rId8"/>
+    <p:sldId id="263" r:id="rId9"/>
+    <p:sldId id="264" r:id="rId10"/>
+    <p:sldId id="265" r:id="rId11"/>
+    <p:sldId id="266" r:id="rId12"/>
+    <p:sldId id="267" r:id="rId13"/>
+    <p:sldId id="268" r:id="rId14"/>
+    <p:sldId id="269" r:id="rId15"/>
+    <p:sldId id="270" r:id="rId16"/>
+    <p:sldId id="271" r:id="rId17"/>
+    <p:sldId id="272" r:id="rId18"/>
+    <p:sldId id="273" r:id="rId19"/>
+    <p:sldId id="274" r:id="rId20"/>
+    <p:sldId id="275" r:id="rId21"/>
+    <p:sldId id="276" r:id="rId22"/>
+    <p:sldId id="277" r:id="rId23"/>
+    <p:sldId id="278" r:id="rId24"/>
   </p:sldIdLst>
-  <p:sldSz cx="12191695" cy="6858000" type="screen4x3"/>
+  <p:sldSz cx="12192000" cy="6858000"/>
   <p:notesSz cx="6858000" cy="9144000"/>
   <p:defaultTextStyle>
     <a:defPPr>
@@ -126,6 +126,22 @@
       </a:defRPr>
     </a:lvl9pPr>
   </p:defaultTextStyle>
+  <p:extLst>
+    <p:ext uri="{EFAFB233-063F-42B5-8137-9DF3F51BA10A}">
+      <p15:sldGuideLst xmlns:p15="http://schemas.microsoft.com/office/powerpoint/2012/main">
+        <p15:guide id="1" orient="horz" pos="2160">
+          <p15:clr>
+            <a:srgbClr val="A4A3A4"/>
+          </p15:clr>
+        </p15:guide>
+        <p15:guide id="2" pos="2880">
+          <p15:clr>
+            <a:srgbClr val="A4A3A4"/>
+          </p15:clr>
+        </p15:guide>
+      </p15:sldGuideLst>
+    </p:ext>
+  </p:extLst>
 </p:presentation>
 </file>
 
@@ -167,10 +183,9 @@
           <a:lstStyle/>
           <a:p>
             <a:r>
-              <a:rPr lang="en-US" smtClean="0"/>
+              <a:rPr lang="en-US"/>
               <a:t>Click to edit Master title style</a:t>
             </a:r>
-            <a:endParaRPr lang="en-US"/>
           </a:p>
         </p:txBody>
       </p:sp>
@@ -286,10 +301,9 @@
           </a:lstStyle>
           <a:p>
             <a:r>
-              <a:rPr lang="en-US" smtClean="0"/>
+              <a:rPr lang="en-US"/>
               <a:t>Click to edit Master subtitle style</a:t>
             </a:r>
-            <a:endParaRPr lang="en-US"/>
           </a:p>
         </p:txBody>
       </p:sp>
@@ -310,7 +324,7 @@
           <a:p>
             <a:fld id="{5BCAD085-E8A6-8845-BD4E-CB4CCA059FC4}" type="datetimeFigureOut">
               <a:rPr lang="en-US" smtClean="0"/>
-              <a:t>1/27/13</a:t>
+              <a:t>8/7/2026</a:t>
             </a:fld>
             <a:endParaRPr lang="en-US"/>
           </a:p>
@@ -404,10 +418,9 @@
           <a:lstStyle/>
           <a:p>
             <a:r>
-              <a:rPr lang="en-US" smtClean="0"/>
+              <a:rPr lang="en-US"/>
               <a:t>Click to edit Master title style</a:t>
             </a:r>
-            <a:endParaRPr lang="en-US"/>
           </a:p>
         </p:txBody>
       </p:sp>
@@ -428,38 +441,37 @@
           <a:p>
             <a:pPr lvl="0"/>
             <a:r>
-              <a:rPr lang="en-US" smtClean="0"/>
+              <a:rPr lang="en-US"/>
               <a:t>Click to edit Master text styles</a:t>
             </a:r>
           </a:p>
           <a:p>
             <a:pPr lvl="1"/>
             <a:r>
-              <a:rPr lang="en-US" smtClean="0"/>
+              <a:rPr lang="en-US"/>
               <a:t>Second level</a:t>
             </a:r>
           </a:p>
           <a:p>
             <a:pPr lvl="2"/>
             <a:r>
-              <a:rPr lang="en-US" smtClean="0"/>
+              <a:rPr lang="en-US"/>
               <a:t>Third level</a:t>
             </a:r>
           </a:p>
           <a:p>
             <a:pPr lvl="3"/>
             <a:r>
-              <a:rPr lang="en-US" smtClean="0"/>
+              <a:rPr lang="en-US"/>
               <a:t>Fourth level</a:t>
             </a:r>
           </a:p>
           <a:p>
             <a:pPr lvl="4"/>
             <a:r>
-              <a:rPr lang="en-US" smtClean="0"/>
+              <a:rPr lang="en-US"/>
               <a:t>Fifth level</a:t>
             </a:r>
-            <a:endParaRPr lang="en-US"/>
           </a:p>
         </p:txBody>
       </p:sp>
@@ -480,7 +492,7 @@
           <a:p>
             <a:fld id="{5BCAD085-E8A6-8845-BD4E-CB4CCA059FC4}" type="datetimeFigureOut">
               <a:rPr lang="en-US" smtClean="0"/>
-              <a:t>1/27/13</a:t>
+              <a:t>8/7/2026</a:t>
             </a:fld>
             <a:endParaRPr lang="en-US"/>
           </a:p>
@@ -579,10 +591,9 @@
           <a:lstStyle/>
           <a:p>
             <a:r>
-              <a:rPr lang="en-US" smtClean="0"/>
+              <a:rPr lang="en-US"/>
               <a:t>Click to edit Master title style</a:t>
             </a:r>
-            <a:endParaRPr lang="en-US"/>
           </a:p>
         </p:txBody>
       </p:sp>
@@ -608,38 +619,37 @@
           <a:p>
             <a:pPr lvl="0"/>
             <a:r>
-              <a:rPr lang="en-US" smtClean="0"/>
+              <a:rPr lang="en-US"/>
               <a:t>Click to edit Master text styles</a:t>
             </a:r>
           </a:p>
           <a:p>
             <a:pPr lvl="1"/>
             <a:r>
-              <a:rPr lang="en-US" smtClean="0"/>
+              <a:rPr lang="en-US"/>
               <a:t>Second level</a:t>
             </a:r>
           </a:p>
           <a:p>
             <a:pPr lvl="2"/>
             <a:r>
-              <a:rPr lang="en-US" smtClean="0"/>
+              <a:rPr lang="en-US"/>
               <a:t>Third level</a:t>
             </a:r>
           </a:p>
           <a:p>
             <a:pPr lvl="3"/>
             <a:r>
-              <a:rPr lang="en-US" smtClean="0"/>
+              <a:rPr lang="en-US"/>
               <a:t>Fourth level</a:t>
             </a:r>
           </a:p>
           <a:p>
             <a:pPr lvl="4"/>
             <a:r>
-              <a:rPr lang="en-US" smtClean="0"/>
+              <a:rPr lang="en-US"/>
               <a:t>Fifth level</a:t>
             </a:r>
-            <a:endParaRPr lang="en-US"/>
           </a:p>
         </p:txBody>
       </p:sp>
@@ -660,7 +670,7 @@
           <a:p>
             <a:fld id="{5BCAD085-E8A6-8845-BD4E-CB4CCA059FC4}" type="datetimeFigureOut">
               <a:rPr lang="en-US" smtClean="0"/>
-              <a:t>1/27/13</a:t>
+              <a:t>8/7/2026</a:t>
             </a:fld>
             <a:endParaRPr lang="en-US"/>
           </a:p>
@@ -754,10 +764,9 @@
           <a:lstStyle/>
           <a:p>
             <a:r>
-              <a:rPr lang="en-US" smtClean="0"/>
+              <a:rPr lang="en-US"/>
               <a:t>Click to edit Master title style</a:t>
             </a:r>
-            <a:endParaRPr lang="en-US"/>
           </a:p>
         </p:txBody>
       </p:sp>
@@ -778,38 +787,37 @@
           <a:p>
             <a:pPr lvl="0"/>
             <a:r>
-              <a:rPr lang="en-US" smtClean="0"/>
+              <a:rPr lang="en-US"/>
               <a:t>Click to edit Master text styles</a:t>
             </a:r>
           </a:p>
           <a:p>
             <a:pPr lvl="1"/>
             <a:r>
-              <a:rPr lang="en-US" smtClean="0"/>
+              <a:rPr lang="en-US"/>
               <a:t>Second level</a:t>
             </a:r>
           </a:p>
           <a:p>
             <a:pPr lvl="2"/>
             <a:r>
-              <a:rPr lang="en-US" smtClean="0"/>
+              <a:rPr lang="en-US"/>
               <a:t>Third level</a:t>
             </a:r>
           </a:p>
           <a:p>
             <a:pPr lvl="3"/>
             <a:r>
-              <a:rPr lang="en-US" smtClean="0"/>
+              <a:rPr lang="en-US"/>
               <a:t>Fourth level</a:t>
             </a:r>
           </a:p>
           <a:p>
             <a:pPr lvl="4"/>
             <a:r>
-              <a:rPr lang="en-US" smtClean="0"/>
+              <a:rPr lang="en-US"/>
               <a:t>Fifth level</a:t>
             </a:r>
-            <a:endParaRPr lang="en-US"/>
           </a:p>
         </p:txBody>
       </p:sp>
@@ -830,7 +838,7 @@
           <a:p>
             <a:fld id="{5BCAD085-E8A6-8845-BD4E-CB4CCA059FC4}" type="datetimeFigureOut">
               <a:rPr lang="en-US" smtClean="0"/>
-              <a:t>1/27/13</a:t>
+              <a:t>8/7/2026</a:t>
             </a:fld>
             <a:endParaRPr lang="en-US"/>
           </a:p>
@@ -933,10 +941,9 @@
           </a:lstStyle>
           <a:p>
             <a:r>
-              <a:rPr lang="en-US" smtClean="0"/>
+              <a:rPr lang="en-US"/>
               <a:t>Click to edit Master title style</a:t>
             </a:r>
-            <a:endParaRPr lang="en-US"/>
           </a:p>
         </p:txBody>
       </p:sp>
@@ -1053,7 +1060,7 @@
           <a:p>
             <a:pPr lvl="0"/>
             <a:r>
-              <a:rPr lang="en-US" smtClean="0"/>
+              <a:rPr lang="en-US"/>
               <a:t>Click to edit Master text styles</a:t>
             </a:r>
           </a:p>
@@ -1076,7 +1083,7 @@
           <a:p>
             <a:fld id="{5BCAD085-E8A6-8845-BD4E-CB4CCA059FC4}" type="datetimeFigureOut">
               <a:rPr lang="en-US" smtClean="0"/>
-              <a:t>1/27/13</a:t>
+              <a:t>8/7/2026</a:t>
             </a:fld>
             <a:endParaRPr lang="en-US"/>
           </a:p>
@@ -1170,10 +1177,9 @@
           <a:lstStyle/>
           <a:p>
             <a:r>
-              <a:rPr lang="en-US" smtClean="0"/>
+              <a:rPr lang="en-US"/>
               <a:t>Click to edit Master title style</a:t>
             </a:r>
-            <a:endParaRPr lang="en-US"/>
           </a:p>
         </p:txBody>
       </p:sp>
@@ -1227,38 +1233,37 @@
           <a:p>
             <a:pPr lvl="0"/>
             <a:r>
-              <a:rPr lang="en-US" smtClean="0"/>
+              <a:rPr lang="en-US"/>
               <a:t>Click to edit Master text styles</a:t>
             </a:r>
           </a:p>
           <a:p>
             <a:pPr lvl="1"/>
             <a:r>
-              <a:rPr lang="en-US" smtClean="0"/>
+              <a:rPr lang="en-US"/>
               <a:t>Second level</a:t>
             </a:r>
           </a:p>
           <a:p>
             <a:pPr lvl="2"/>
             <a:r>
-              <a:rPr lang="en-US" smtClean="0"/>
+              <a:rPr lang="en-US"/>
               <a:t>Third level</a:t>
             </a:r>
           </a:p>
           <a:p>
             <a:pPr lvl="3"/>
             <a:r>
-              <a:rPr lang="en-US" smtClean="0"/>
+              <a:rPr lang="en-US"/>
               <a:t>Fourth level</a:t>
             </a:r>
           </a:p>
           <a:p>
             <a:pPr lvl="4"/>
             <a:r>
-              <a:rPr lang="en-US" smtClean="0"/>
+              <a:rPr lang="en-US"/>
               <a:t>Fifth level</a:t>
             </a:r>
-            <a:endParaRPr lang="en-US"/>
           </a:p>
         </p:txBody>
       </p:sp>
@@ -1312,38 +1317,37 @@
           <a:p>
             <a:pPr lvl="0"/>
             <a:r>
-              <a:rPr lang="en-US" smtClean="0"/>
+              <a:rPr lang="en-US"/>
               <a:t>Click to edit Master text styles</a:t>
             </a:r>
           </a:p>
           <a:p>
             <a:pPr lvl="1"/>
             <a:r>
-              <a:rPr lang="en-US" smtClean="0"/>
+              <a:rPr lang="en-US"/>
               <a:t>Second level</a:t>
             </a:r>
           </a:p>
           <a:p>
             <a:pPr lvl="2"/>
             <a:r>
-              <a:rPr lang="en-US" smtClean="0"/>
+              <a:rPr lang="en-US"/>
               <a:t>Third level</a:t>
             </a:r>
           </a:p>
           <a:p>
             <a:pPr lvl="3"/>
             <a:r>
-              <a:rPr lang="en-US" smtClean="0"/>
+              <a:rPr lang="en-US"/>
               <a:t>Fourth level</a:t>
             </a:r>
           </a:p>
           <a:p>
             <a:pPr lvl="4"/>
             <a:r>
-              <a:rPr lang="en-US" smtClean="0"/>
+              <a:rPr lang="en-US"/>
               <a:t>Fifth level</a:t>
             </a:r>
-            <a:endParaRPr lang="en-US"/>
           </a:p>
         </p:txBody>
       </p:sp>
@@ -1364,7 +1368,7 @@
           <a:p>
             <a:fld id="{5BCAD085-E8A6-8845-BD4E-CB4CCA059FC4}" type="datetimeFigureOut">
               <a:rPr lang="en-US" smtClean="0"/>
-              <a:t>1/27/13</a:t>
+              <a:t>8/7/2026</a:t>
             </a:fld>
             <a:endParaRPr lang="en-US"/>
           </a:p>
@@ -1462,10 +1466,9 @@
           </a:lstStyle>
           <a:p>
             <a:r>
-              <a:rPr lang="en-US" smtClean="0"/>
+              <a:rPr lang="en-US"/>
               <a:t>Click to edit Master title style</a:t>
             </a:r>
-            <a:endParaRPr lang="en-US"/>
           </a:p>
         </p:txBody>
       </p:sp>
@@ -1528,7 +1531,7 @@
           <a:p>
             <a:pPr lvl="0"/>
             <a:r>
-              <a:rPr lang="en-US" smtClean="0"/>
+              <a:rPr lang="en-US"/>
               <a:t>Click to edit Master text styles</a:t>
             </a:r>
           </a:p>
@@ -1584,38 +1587,37 @@
           <a:p>
             <a:pPr lvl="0"/>
             <a:r>
-              <a:rPr lang="en-US" smtClean="0"/>
+              <a:rPr lang="en-US"/>
               <a:t>Click to edit Master text styles</a:t>
             </a:r>
           </a:p>
           <a:p>
             <a:pPr lvl="1"/>
             <a:r>
-              <a:rPr lang="en-US" smtClean="0"/>
+              <a:rPr lang="en-US"/>
               <a:t>Second level</a:t>
             </a:r>
           </a:p>
           <a:p>
             <a:pPr lvl="2"/>
             <a:r>
-              <a:rPr lang="en-US" smtClean="0"/>
+              <a:rPr lang="en-US"/>
               <a:t>Third level</a:t>
             </a:r>
           </a:p>
           <a:p>
             <a:pPr lvl="3"/>
             <a:r>
-              <a:rPr lang="en-US" smtClean="0"/>
+              <a:rPr lang="en-US"/>
               <a:t>Fourth level</a:t>
             </a:r>
           </a:p>
           <a:p>
             <a:pPr lvl="4"/>
             <a:r>
-              <a:rPr lang="en-US" smtClean="0"/>
+              <a:rPr lang="en-US"/>
               <a:t>Fifth level</a:t>
             </a:r>
-            <a:endParaRPr lang="en-US"/>
           </a:p>
         </p:txBody>
       </p:sp>
@@ -1678,7 +1680,7 @@
           <a:p>
             <a:pPr lvl="0"/>
             <a:r>
-              <a:rPr lang="en-US" smtClean="0"/>
+              <a:rPr lang="en-US"/>
               <a:t>Click to edit Master text styles</a:t>
             </a:r>
           </a:p>
@@ -1734,38 +1736,37 @@
           <a:p>
             <a:pPr lvl="0"/>
             <a:r>
-              <a:rPr lang="en-US" smtClean="0"/>
+              <a:rPr lang="en-US"/>
               <a:t>Click to edit Master text styles</a:t>
             </a:r>
           </a:p>
           <a:p>
             <a:pPr lvl="1"/>
             <a:r>
-              <a:rPr lang="en-US" smtClean="0"/>
+              <a:rPr lang="en-US"/>
               <a:t>Second level</a:t>
             </a:r>
           </a:p>
           <a:p>
             <a:pPr lvl="2"/>
             <a:r>
-              <a:rPr lang="en-US" smtClean="0"/>
+              <a:rPr lang="en-US"/>
               <a:t>Third level</a:t>
             </a:r>
           </a:p>
           <a:p>
             <a:pPr lvl="3"/>
             <a:r>
-              <a:rPr lang="en-US" smtClean="0"/>
+              <a:rPr lang="en-US"/>
               <a:t>Fourth level</a:t>
             </a:r>
           </a:p>
           <a:p>
             <a:pPr lvl="4"/>
             <a:r>
-              <a:rPr lang="en-US" smtClean="0"/>
+              <a:rPr lang="en-US"/>
               <a:t>Fifth level</a:t>
             </a:r>
-            <a:endParaRPr lang="en-US"/>
           </a:p>
         </p:txBody>
       </p:sp>
@@ -1786,7 +1787,7 @@
           <a:p>
             <a:fld id="{5BCAD085-E8A6-8845-BD4E-CB4CCA059FC4}" type="datetimeFigureOut">
               <a:rPr lang="en-US" smtClean="0"/>
-              <a:t>1/27/13</a:t>
+              <a:t>8/7/2026</a:t>
             </a:fld>
             <a:endParaRPr lang="en-US"/>
           </a:p>
@@ -1880,10 +1881,9 @@
           <a:lstStyle/>
           <a:p>
             <a:r>
-              <a:rPr lang="en-US" smtClean="0"/>
+              <a:rPr lang="en-US"/>
               <a:t>Click to edit Master title style</a:t>
             </a:r>
-            <a:endParaRPr lang="en-US"/>
           </a:p>
         </p:txBody>
       </p:sp>
@@ -1904,7 +1904,7 @@
           <a:p>
             <a:fld id="{5BCAD085-E8A6-8845-BD4E-CB4CCA059FC4}" type="datetimeFigureOut">
               <a:rPr lang="en-US" smtClean="0"/>
-              <a:t>1/27/13</a:t>
+              <a:t>8/7/2026</a:t>
             </a:fld>
             <a:endParaRPr lang="en-US"/>
           </a:p>
@@ -1999,7 +1999,7 @@
           <a:p>
             <a:fld id="{5BCAD085-E8A6-8845-BD4E-CB4CCA059FC4}" type="datetimeFigureOut">
               <a:rPr lang="en-US" smtClean="0"/>
-              <a:t>1/27/13</a:t>
+              <a:t>8/7/2026</a:t>
             </a:fld>
             <a:endParaRPr lang="en-US"/>
           </a:p>
@@ -2102,10 +2102,9 @@
           </a:lstStyle>
           <a:p>
             <a:r>
-              <a:rPr lang="en-US" smtClean="0"/>
+              <a:rPr lang="en-US"/>
               <a:t>Click to edit Master title style</a:t>
             </a:r>
-            <a:endParaRPr lang="en-US"/>
           </a:p>
         </p:txBody>
       </p:sp>
@@ -2159,38 +2158,37 @@
           <a:p>
             <a:pPr lvl="0"/>
             <a:r>
-              <a:rPr lang="en-US" smtClean="0"/>
+              <a:rPr lang="en-US"/>
               <a:t>Click to edit Master text styles</a:t>
             </a:r>
           </a:p>
           <a:p>
             <a:pPr lvl="1"/>
             <a:r>
-              <a:rPr lang="en-US" smtClean="0"/>
+              <a:rPr lang="en-US"/>
               <a:t>Second level</a:t>
             </a:r>
           </a:p>
           <a:p>
             <a:pPr lvl="2"/>
             <a:r>
-              <a:rPr lang="en-US" smtClean="0"/>
+              <a:rPr lang="en-US"/>
               <a:t>Third level</a:t>
             </a:r>
           </a:p>
           <a:p>
             <a:pPr lvl="3"/>
             <a:r>
-              <a:rPr lang="en-US" smtClean="0"/>
+              <a:rPr lang="en-US"/>
               <a:t>Fourth level</a:t>
             </a:r>
           </a:p>
           <a:p>
             <a:pPr lvl="4"/>
             <a:r>
-              <a:rPr lang="en-US" smtClean="0"/>
+              <a:rPr lang="en-US"/>
               <a:t>Fifth level</a:t>
             </a:r>
-            <a:endParaRPr lang="en-US"/>
           </a:p>
         </p:txBody>
       </p:sp>
@@ -2253,7 +2251,7 @@
           <a:p>
             <a:pPr lvl="0"/>
             <a:r>
-              <a:rPr lang="en-US" smtClean="0"/>
+              <a:rPr lang="en-US"/>
               <a:t>Click to edit Master text styles</a:t>
             </a:r>
           </a:p>
@@ -2276,7 +2274,7 @@
           <a:p>
             <a:fld id="{5BCAD085-E8A6-8845-BD4E-CB4CCA059FC4}" type="datetimeFigureOut">
               <a:rPr lang="en-US" smtClean="0"/>
-              <a:t>1/27/13</a:t>
+              <a:t>8/7/2026</a:t>
             </a:fld>
             <a:endParaRPr lang="en-US"/>
           </a:p>
@@ -2379,10 +2377,9 @@
           </a:lstStyle>
           <a:p>
             <a:r>
-              <a:rPr lang="en-US" smtClean="0"/>
+              <a:rPr lang="en-US"/>
               <a:t>Click to edit Master title style</a:t>
             </a:r>
-            <a:endParaRPr lang="en-US"/>
           </a:p>
         </p:txBody>
       </p:sp>
@@ -2506,7 +2503,7 @@
           <a:p>
             <a:pPr lvl="0"/>
             <a:r>
-              <a:rPr lang="en-US" smtClean="0"/>
+              <a:rPr lang="en-US"/>
               <a:t>Click to edit Master text styles</a:t>
             </a:r>
           </a:p>
@@ -2529,7 +2526,7 @@
           <a:p>
             <a:fld id="{5BCAD085-E8A6-8845-BD4E-CB4CCA059FC4}" type="datetimeFigureOut">
               <a:rPr lang="en-US" smtClean="0"/>
-              <a:t>1/27/13</a:t>
+              <a:t>8/7/2026</a:t>
             </a:fld>
             <a:endParaRPr lang="en-US"/>
           </a:p>
@@ -2638,10 +2635,9 @@
           <a:lstStyle/>
           <a:p>
             <a:r>
-              <a:rPr lang="en-US" smtClean="0"/>
+              <a:rPr lang="en-US"/>
               <a:t>Click to edit Master title style</a:t>
             </a:r>
-            <a:endParaRPr lang="en-US"/>
           </a:p>
         </p:txBody>
       </p:sp>
@@ -2672,38 +2668,37 @@
           <a:p>
             <a:pPr lvl="0"/>
             <a:r>
-              <a:rPr lang="en-US" smtClean="0"/>
+              <a:rPr lang="en-US"/>
               <a:t>Click to edit Master text styles</a:t>
             </a:r>
           </a:p>
           <a:p>
             <a:pPr lvl="1"/>
             <a:r>
-              <a:rPr lang="en-US" smtClean="0"/>
+              <a:rPr lang="en-US"/>
               <a:t>Second level</a:t>
             </a:r>
           </a:p>
           <a:p>
             <a:pPr lvl="2"/>
             <a:r>
-              <a:rPr lang="en-US" smtClean="0"/>
+              <a:rPr lang="en-US"/>
               <a:t>Third level</a:t>
             </a:r>
           </a:p>
           <a:p>
             <a:pPr lvl="3"/>
             <a:r>
-              <a:rPr lang="en-US" smtClean="0"/>
+              <a:rPr lang="en-US"/>
               <a:t>Fourth level</a:t>
             </a:r>
           </a:p>
           <a:p>
             <a:pPr lvl="4"/>
             <a:r>
-              <a:rPr lang="en-US" smtClean="0"/>
+              <a:rPr lang="en-US"/>
               <a:t>Fifth level</a:t>
             </a:r>
-            <a:endParaRPr lang="en-US"/>
           </a:p>
         </p:txBody>
       </p:sp>
@@ -2742,7 +2737,7 @@
           <a:p>
             <a:fld id="{5BCAD085-E8A6-8845-BD4E-CB4CCA059FC4}" type="datetimeFigureOut">
               <a:rPr lang="en-US" smtClean="0"/>
-              <a:t>1/27/13</a:t>
+              <a:t>8/7/2026</a:t>
             </a:fld>
             <a:endParaRPr lang="en-US"/>
           </a:p>
@@ -3101,7 +3096,7 @@
 </file>
 
 <file path=ppt/slides/slide1.xml><?xml version="1.0" encoding="utf-8"?>
-<p:sld xmlns:a="http://schemas.openxmlformats.org/drawingml/2006/main" xmlns:p="http://schemas.openxmlformats.org/presentationml/2006/main" xmlns:r="http://schemas.openxmlformats.org/officeDocument/2006/relationships">
+<p:sld xmlns:a="http://schemas.openxmlformats.org/drawingml/2006/main" xmlns:r="http://schemas.openxmlformats.org/officeDocument/2006/relationships" xmlns:p="http://schemas.openxmlformats.org/presentationml/2006/main">
   <p:cSld>
     <p:bg>
       <p:bgPr>
@@ -3117,7 +3112,14 @@
         <p:cNvGrpSpPr/>
         <p:nvPr/>
       </p:nvGrpSpPr>
-      <p:grpSpPr/>
+      <p:grpSpPr>
+        <a:xfrm>
+          <a:off x="0" y="0"/>
+          <a:ext cx="0" cy="0"/>
+          <a:chOff x="0" y="0"/>
+          <a:chExt cx="0" cy="0"/>
+        </a:xfrm>
+      </p:grpSpPr>
       <p:sp>
         <p:nvSpPr>
           <p:cNvPr id="2" name="TextBox 1"/>
@@ -3589,36 +3591,42 @@
         <p:spPr>
           <a:xfrm>
             <a:off x="822960" y="5074920"/>
-            <a:ext cx="10058400" cy="457200"/>
-          </a:xfrm>
-          <a:prstGeom prst="rect">
-            <a:avLst/>
-          </a:prstGeom>
-          <a:noFill/>
-        </p:spPr>
-        <p:txBody>
-          <a:bodyPr wrap="square">
-            <a:spAutoFit/>
-          </a:bodyPr>
-          <a:lstStyle/>
-          <a:p>
-            <a:pPr algn="l">
-              <a:spcBef>
-                <a:spcPts val="0"/>
-              </a:spcBef>
-              <a:spcAft>
-                <a:spcPts val="0"/>
-              </a:spcAft>
-            </a:pPr>
-            <a:r>
-              <a:rPr sz="1300" b="0">
+            <a:ext cx="10058400" cy="292388"/>
+          </a:xfrm>
+          <a:prstGeom prst="rect">
+            <a:avLst/>
+          </a:prstGeom>
+          <a:noFill/>
+        </p:spPr>
+        <p:txBody>
+          <a:bodyPr wrap="square">
+            <a:spAutoFit/>
+          </a:bodyPr>
+          <a:lstStyle/>
+          <a:p>
+            <a:pPr algn="l">
+              <a:spcBef>
+                <a:spcPts val="0"/>
+              </a:spcBef>
+              <a:spcAft>
+                <a:spcPts val="0"/>
+              </a:spcAft>
+            </a:pPr>
+            <a:r>
+              <a:rPr lang="en-US" sz="1300" b="0">
                 <a:solidFill>
                   <a:srgbClr val="8895A7"/>
                 </a:solidFill>
                 <a:latin typeface="Calibri"/>
               </a:rPr>
-              <a:t>Fully local and offline for demos 1-2 -- Groq only appears in a short bonus preview of Lecture 3</a:t>
-            </a:r>
+              <a:t>Fully local and offline -- no API key needed for any of the three demos</a:t>
+            </a:r>
+            <a:endParaRPr sz="1300" b="0">
+              <a:solidFill>
+                <a:srgbClr val="8895A7"/>
+              </a:solidFill>
+              <a:latin typeface="Calibri"/>
+            </a:endParaRPr>
           </a:p>
         </p:txBody>
       </p:sp>
@@ -3673,7 +3681,7 @@
 </file>
 
 <file path=ppt/slides/slide10.xml><?xml version="1.0" encoding="utf-8"?>
-<p:sld xmlns:a="http://schemas.openxmlformats.org/drawingml/2006/main" xmlns:p="http://schemas.openxmlformats.org/presentationml/2006/main" xmlns:r="http://schemas.openxmlformats.org/officeDocument/2006/relationships">
+<p:sld xmlns:a="http://schemas.openxmlformats.org/drawingml/2006/main" xmlns:r="http://schemas.openxmlformats.org/officeDocument/2006/relationships" xmlns:p="http://schemas.openxmlformats.org/presentationml/2006/main">
   <p:cSld>
     <p:bg>
       <p:bgPr>
@@ -3689,7 +3697,14 @@
         <p:cNvGrpSpPr/>
         <p:nvPr/>
       </p:nvGrpSpPr>
-      <p:grpSpPr/>
+      <p:grpSpPr>
+        <a:xfrm>
+          <a:off x="0" y="0"/>
+          <a:ext cx="0" cy="0"/>
+          <a:chOff x="0" y="0"/>
+          <a:chExt cx="0" cy="0"/>
+        </a:xfrm>
+      </p:grpSpPr>
       <p:sp>
         <p:nvSpPr>
           <p:cNvPr id="2" name="TextBox 1"/>
@@ -3867,7 +3882,7 @@
 </file>
 
 <file path=ppt/slides/slide11.xml><?xml version="1.0" encoding="utf-8"?>
-<p:sld xmlns:a="http://schemas.openxmlformats.org/drawingml/2006/main" xmlns:p="http://schemas.openxmlformats.org/presentationml/2006/main" xmlns:r="http://schemas.openxmlformats.org/officeDocument/2006/relationships">
+<p:sld xmlns:a="http://schemas.openxmlformats.org/drawingml/2006/main" xmlns:r="http://schemas.openxmlformats.org/officeDocument/2006/relationships" xmlns:p="http://schemas.openxmlformats.org/presentationml/2006/main">
   <p:cSld>
     <p:bg>
       <p:bgPr>
@@ -3883,7 +3898,14 @@
         <p:cNvGrpSpPr/>
         <p:nvPr/>
       </p:nvGrpSpPr>
-      <p:grpSpPr/>
+      <p:grpSpPr>
+        <a:xfrm>
+          <a:off x="0" y="0"/>
+          <a:ext cx="0" cy="0"/>
+          <a:chOff x="0" y="0"/>
+          <a:chExt cx="0" cy="0"/>
+        </a:xfrm>
+      </p:grpSpPr>
       <p:sp>
         <p:nvSpPr>
           <p:cNvPr id="2" name="TextBox 1"/>
@@ -4051,6 +4073,7 @@
           <a:lstStyle/>
           <a:p>
             <a:pPr algn="ctr"/>
+            <a:endParaRPr/>
           </a:p>
         </p:txBody>
       </p:sp>
@@ -4137,6 +4160,7 @@
           <a:lstStyle/>
           <a:p>
             <a:pPr algn="ctr"/>
+            <a:endParaRPr/>
           </a:p>
         </p:txBody>
       </p:sp>
@@ -4189,15 +4213,12 @@
                 <a:spcPts val="0"/>
               </a:spcAft>
             </a:pPr>
-            <a:r>
-              <a:rPr sz="1300" b="0">
-                <a:solidFill>
-                  <a:srgbClr val="CADCFC"/>
-                </a:solidFill>
-                <a:latin typeface="Courier New"/>
-              </a:rPr>
-              <a:t/>
-            </a:r>
+            <a:endParaRPr sz="1300" b="0">
+              <a:solidFill>
+                <a:srgbClr val="CADCFC"/>
+              </a:solidFill>
+              <a:latin typeface="Courier New"/>
+            </a:endParaRPr>
           </a:p>
           <a:p>
             <a:pPr>
@@ -4290,7 +4311,7 @@
 </file>
 
 <file path=ppt/slides/slide12.xml><?xml version="1.0" encoding="utf-8"?>
-<p:sld xmlns:a="http://schemas.openxmlformats.org/drawingml/2006/main" xmlns:p="http://schemas.openxmlformats.org/presentationml/2006/main" xmlns:r="http://schemas.openxmlformats.org/officeDocument/2006/relationships">
+<p:sld xmlns:a="http://schemas.openxmlformats.org/drawingml/2006/main" xmlns:r="http://schemas.openxmlformats.org/officeDocument/2006/relationships" xmlns:p="http://schemas.openxmlformats.org/presentationml/2006/main">
   <p:cSld>
     <p:bg>
       <p:bgPr>
@@ -4306,7 +4327,14 @@
         <p:cNvGrpSpPr/>
         <p:nvPr/>
       </p:nvGrpSpPr>
-      <p:grpSpPr/>
+      <p:grpSpPr>
+        <a:xfrm>
+          <a:off x="0" y="0"/>
+          <a:ext cx="0" cy="0"/>
+          <a:chOff x="0" y="0"/>
+          <a:chExt cx="0" cy="0"/>
+        </a:xfrm>
+      </p:grpSpPr>
       <p:sp>
         <p:nvSpPr>
           <p:cNvPr id="2" name="TextBox 1"/>
@@ -4990,7 +5018,7 @@
 </file>
 
 <file path=ppt/slides/slide13.xml><?xml version="1.0" encoding="utf-8"?>
-<p:sld xmlns:a="http://schemas.openxmlformats.org/drawingml/2006/main" xmlns:p="http://schemas.openxmlformats.org/presentationml/2006/main" xmlns:r="http://schemas.openxmlformats.org/officeDocument/2006/relationships">
+<p:sld xmlns:a="http://schemas.openxmlformats.org/drawingml/2006/main" xmlns:r="http://schemas.openxmlformats.org/officeDocument/2006/relationships" xmlns:p="http://schemas.openxmlformats.org/presentationml/2006/main">
   <p:cSld>
     <p:bg>
       <p:bgPr>
@@ -5006,7 +5034,14 @@
         <p:cNvGrpSpPr/>
         <p:nvPr/>
       </p:nvGrpSpPr>
-      <p:grpSpPr/>
+      <p:grpSpPr>
+        <a:xfrm>
+          <a:off x="0" y="0"/>
+          <a:ext cx="0" cy="0"/>
+          <a:chOff x="0" y="0"/>
+          <a:chExt cx="0" cy="0"/>
+        </a:xfrm>
+      </p:grpSpPr>
       <p:sp>
         <p:nvSpPr>
           <p:cNvPr id="2" name="TextBox 1"/>
@@ -5174,6 +5209,7 @@
           <a:lstStyle/>
           <a:p>
             <a:pPr algn="ctr"/>
+            <a:endParaRPr/>
           </a:p>
         </p:txBody>
       </p:sp>
@@ -5287,15 +5323,12 @@
                 <a:spcPts val="0"/>
               </a:spcAft>
             </a:pPr>
-            <a:r>
-              <a:rPr sz="1400" b="0">
-                <a:solidFill>
-                  <a:srgbClr val="0E1B2B"/>
-                </a:solidFill>
-                <a:latin typeface="Calibri"/>
-              </a:rPr>
-              <a:t/>
-            </a:r>
+            <a:endParaRPr sz="1400" b="0">
+              <a:solidFill>
+                <a:srgbClr val="0E1B2B"/>
+              </a:solidFill>
+              <a:latin typeface="Calibri"/>
+            </a:endParaRPr>
           </a:p>
           <a:p>
             <a:pPr algn="l">
@@ -5359,6 +5392,7 @@
           <a:lstStyle/>
           <a:p>
             <a:pPr algn="ctr"/>
+            <a:endParaRPr/>
           </a:p>
         </p:txBody>
       </p:sp>
@@ -5472,15 +5506,12 @@
                 <a:spcPts val="0"/>
               </a:spcAft>
             </a:pPr>
-            <a:r>
-              <a:rPr sz="1400" b="0">
-                <a:solidFill>
-                  <a:srgbClr val="FFFFFF"/>
-                </a:solidFill>
-                <a:latin typeface="Calibri"/>
-              </a:rPr>
-              <a:t/>
-            </a:r>
+            <a:endParaRPr sz="1400" b="0">
+              <a:solidFill>
+                <a:srgbClr val="FFFFFF"/>
+              </a:solidFill>
+              <a:latin typeface="Calibri"/>
+            </a:endParaRPr>
           </a:p>
           <a:p>
             <a:pPr algn="l">
@@ -5554,7 +5585,7 @@
 </file>
 
 <file path=ppt/slides/slide14.xml><?xml version="1.0" encoding="utf-8"?>
-<p:sld xmlns:a="http://schemas.openxmlformats.org/drawingml/2006/main" xmlns:p="http://schemas.openxmlformats.org/presentationml/2006/main" xmlns:r="http://schemas.openxmlformats.org/officeDocument/2006/relationships">
+<p:sld xmlns:a="http://schemas.openxmlformats.org/drawingml/2006/main" xmlns:r="http://schemas.openxmlformats.org/officeDocument/2006/relationships" xmlns:p="http://schemas.openxmlformats.org/presentationml/2006/main">
   <p:cSld>
     <p:bg>
       <p:bgPr>
@@ -5570,7 +5601,14 @@
         <p:cNvGrpSpPr/>
         <p:nvPr/>
       </p:nvGrpSpPr>
-      <p:grpSpPr/>
+      <p:grpSpPr>
+        <a:xfrm>
+          <a:off x="0" y="0"/>
+          <a:ext cx="0" cy="0"/>
+          <a:chOff x="0" y="0"/>
+          <a:chExt cx="0" cy="0"/>
+        </a:xfrm>
+      </p:grpSpPr>
       <p:sp>
         <p:nvSpPr>
           <p:cNvPr id="2" name="TextBox 1"/>
@@ -5748,7 +5786,7 @@
 </file>
 
 <file path=ppt/slides/slide15.xml><?xml version="1.0" encoding="utf-8"?>
-<p:sld xmlns:a="http://schemas.openxmlformats.org/drawingml/2006/main" xmlns:p="http://schemas.openxmlformats.org/presentationml/2006/main" xmlns:r="http://schemas.openxmlformats.org/officeDocument/2006/relationships">
+<p:sld xmlns:a="http://schemas.openxmlformats.org/drawingml/2006/main" xmlns:r="http://schemas.openxmlformats.org/officeDocument/2006/relationships" xmlns:p="http://schemas.openxmlformats.org/presentationml/2006/main">
   <p:cSld>
     <p:bg>
       <p:bgPr>
@@ -5764,7 +5802,14 @@
         <p:cNvGrpSpPr/>
         <p:nvPr/>
       </p:nvGrpSpPr>
-      <p:grpSpPr/>
+      <p:grpSpPr>
+        <a:xfrm>
+          <a:off x="0" y="0"/>
+          <a:ext cx="0" cy="0"/>
+          <a:chOff x="0" y="0"/>
+          <a:chExt cx="0" cy="0"/>
+        </a:xfrm>
+      </p:grpSpPr>
       <p:sp>
         <p:nvSpPr>
           <p:cNvPr id="2" name="TextBox 1"/>
@@ -5932,6 +5977,7 @@
           <a:lstStyle/>
           <a:p>
             <a:pPr algn="ctr"/>
+            <a:endParaRPr/>
           </a:p>
         </p:txBody>
       </p:sp>
@@ -6018,6 +6064,7 @@
           <a:lstStyle/>
           <a:p>
             <a:pPr algn="ctr"/>
+            <a:endParaRPr/>
           </a:p>
         </p:txBody>
       </p:sp>
@@ -6089,14 +6136,30 @@
                 <a:spcPts val="0"/>
               </a:spcAft>
             </a:pPr>
+            <a:endParaRPr sz="1300" b="0">
+              <a:solidFill>
+                <a:srgbClr val="CADCFC"/>
+              </a:solidFill>
+              <a:latin typeface="Courier New"/>
+            </a:endParaRPr>
+          </a:p>
+          <a:p>
+            <a:pPr>
+              <a:spcBef>
+                <a:spcPts val="0"/>
+              </a:spcBef>
+              <a:spcAft>
+                <a:spcPts val="0"/>
+              </a:spcAft>
+            </a:pPr>
             <a:r>
               <a:rPr sz="1300" b="0">
                 <a:solidFill>
-                  <a:srgbClr val="CADCFC"/>
+                  <a:srgbClr val="8895A7"/>
                 </a:solidFill>
                 <a:latin typeface="Courier New"/>
               </a:rPr>
-              <a:t/>
+              <a:t># Persistent -- backed by real files, survives a restart</a:t>
             </a:r>
           </a:p>
           <a:p>
@@ -6109,13 +6172,13 @@
               </a:spcAft>
             </a:pPr>
             <a:r>
-              <a:rPr sz="1300" b="0">
-                <a:solidFill>
-                  <a:srgbClr val="8895A7"/>
+              <a:rPr sz="1300" b="1">
+                <a:solidFill>
+                  <a:srgbClr val="E8A33D"/>
                 </a:solidFill>
                 <a:latin typeface="Courier New"/>
               </a:rPr>
-              <a:t># Persistent -- backed by real files, survives a restart</a:t>
+              <a:t>client = chromadb.PersistentClient(path="./chroma_store")</a:t>
             </a:r>
           </a:p>
           <a:p>
@@ -6127,34 +6190,12 @@
                 <a:spcPts val="0"/>
               </a:spcAft>
             </a:pPr>
-            <a:r>
-              <a:rPr sz="1300" b="1">
-                <a:solidFill>
-                  <a:srgbClr val="E8A33D"/>
-                </a:solidFill>
-                <a:latin typeface="Courier New"/>
-              </a:rPr>
-              <a:t>client = chromadb.PersistentClient(path="./chroma_store")</a:t>
-            </a:r>
-          </a:p>
-          <a:p>
-            <a:pPr>
-              <a:spcBef>
-                <a:spcPts val="0"/>
-              </a:spcBef>
-              <a:spcAft>
-                <a:spcPts val="0"/>
-              </a:spcAft>
-            </a:pPr>
-            <a:r>
-              <a:rPr sz="1300" b="0">
-                <a:solidFill>
-                  <a:srgbClr val="CADCFC"/>
-                </a:solidFill>
-                <a:latin typeface="Courier New"/>
-              </a:rPr>
-              <a:t/>
-            </a:r>
+            <a:endParaRPr sz="1300" b="1">
+              <a:solidFill>
+                <a:srgbClr val="E8A33D"/>
+              </a:solidFill>
+              <a:latin typeface="Courier New"/>
+            </a:endParaRPr>
           </a:p>
           <a:p>
             <a:pPr>
@@ -6186,7 +6227,7 @@
 </file>
 
 <file path=ppt/slides/slide16.xml><?xml version="1.0" encoding="utf-8"?>
-<p:sld xmlns:a="http://schemas.openxmlformats.org/drawingml/2006/main" xmlns:p="http://schemas.openxmlformats.org/presentationml/2006/main" xmlns:r="http://schemas.openxmlformats.org/officeDocument/2006/relationships">
+<p:sld xmlns:a="http://schemas.openxmlformats.org/drawingml/2006/main" xmlns:r="http://schemas.openxmlformats.org/officeDocument/2006/relationships" xmlns:p="http://schemas.openxmlformats.org/presentationml/2006/main">
   <p:cSld>
     <p:bg>
       <p:bgPr>
@@ -6202,7 +6243,14 @@
         <p:cNvGrpSpPr/>
         <p:nvPr/>
       </p:nvGrpSpPr>
-      <p:grpSpPr/>
+      <p:grpSpPr>
+        <a:xfrm>
+          <a:off x="0" y="0"/>
+          <a:ext cx="0" cy="0"/>
+          <a:chOff x="0" y="0"/>
+          <a:chExt cx="0" cy="0"/>
+        </a:xfrm>
+      </p:grpSpPr>
       <p:sp>
         <p:nvSpPr>
           <p:cNvPr id="2" name="TextBox 1"/>
@@ -6370,6 +6418,7 @@
           <a:lstStyle/>
           <a:p>
             <a:pPr algn="ctr"/>
+            <a:endParaRPr/>
           </a:p>
         </p:txBody>
       </p:sp>
@@ -6464,15 +6513,12 @@
                 <a:spcPts val="0"/>
               </a:spcAft>
             </a:pPr>
-            <a:r>
-              <a:rPr sz="1400" b="0">
-                <a:solidFill>
-                  <a:srgbClr val="0E1B2B"/>
-                </a:solidFill>
-                <a:latin typeface="Calibri"/>
-              </a:rPr>
-              <a:t/>
-            </a:r>
+            <a:endParaRPr sz="1400" b="0">
+              <a:solidFill>
+                <a:srgbClr val="0E1B2B"/>
+              </a:solidFill>
+              <a:latin typeface="Calibri"/>
+            </a:endParaRPr>
           </a:p>
           <a:p>
             <a:pPr algn="l">
@@ -6536,6 +6582,7 @@
           <a:lstStyle/>
           <a:p>
             <a:pPr algn="ctr"/>
+            <a:endParaRPr/>
           </a:p>
         </p:txBody>
       </p:sp>
@@ -6630,15 +6677,12 @@
                 <a:spcPts val="0"/>
               </a:spcAft>
             </a:pPr>
-            <a:r>
-              <a:rPr sz="1400" b="0">
-                <a:solidFill>
-                  <a:srgbClr val="FFFFFF"/>
-                </a:solidFill>
-                <a:latin typeface="Calibri"/>
-              </a:rPr>
-              <a:t/>
-            </a:r>
+            <a:endParaRPr sz="1400" b="0">
+              <a:solidFill>
+                <a:srgbClr val="FFFFFF"/>
+              </a:solidFill>
+              <a:latin typeface="Calibri"/>
+            </a:endParaRPr>
           </a:p>
           <a:p>
             <a:pPr algn="l">
@@ -6670,7 +6714,7 @@
 </file>
 
 <file path=ppt/slides/slide17.xml><?xml version="1.0" encoding="utf-8"?>
-<p:sld xmlns:a="http://schemas.openxmlformats.org/drawingml/2006/main" xmlns:p="http://schemas.openxmlformats.org/presentationml/2006/main" xmlns:r="http://schemas.openxmlformats.org/officeDocument/2006/relationships">
+<p:sld xmlns:a="http://schemas.openxmlformats.org/drawingml/2006/main" xmlns:r="http://schemas.openxmlformats.org/officeDocument/2006/relationships" xmlns:p="http://schemas.openxmlformats.org/presentationml/2006/main">
   <p:cSld>
     <p:bg>
       <p:bgPr>
@@ -6686,7 +6730,14 @@
         <p:cNvGrpSpPr/>
         <p:nvPr/>
       </p:nvGrpSpPr>
-      <p:grpSpPr/>
+      <p:grpSpPr>
+        <a:xfrm>
+          <a:off x="0" y="0"/>
+          <a:ext cx="0" cy="0"/>
+          <a:chOff x="0" y="0"/>
+          <a:chExt cx="0" cy="0"/>
+        </a:xfrm>
+      </p:grpSpPr>
       <p:sp>
         <p:nvSpPr>
           <p:cNvPr id="2" name="TextBox 1"/>
@@ -6864,7 +6915,7 @@
 </file>
 
 <file path=ppt/slides/slide18.xml><?xml version="1.0" encoding="utf-8"?>
-<p:sld xmlns:a="http://schemas.openxmlformats.org/drawingml/2006/main" xmlns:p="http://schemas.openxmlformats.org/presentationml/2006/main" xmlns:r="http://schemas.openxmlformats.org/officeDocument/2006/relationships">
+<p:sld xmlns:a="http://schemas.openxmlformats.org/drawingml/2006/main" xmlns:r="http://schemas.openxmlformats.org/officeDocument/2006/relationships" xmlns:p="http://schemas.openxmlformats.org/presentationml/2006/main">
   <p:cSld>
     <p:bg>
       <p:bgPr>
@@ -6880,7 +6931,14 @@
         <p:cNvGrpSpPr/>
         <p:nvPr/>
       </p:nvGrpSpPr>
-      <p:grpSpPr/>
+      <p:grpSpPr>
+        <a:xfrm>
+          <a:off x="0" y="0"/>
+          <a:ext cx="0" cy="0"/>
+          <a:chOff x="0" y="0"/>
+          <a:chExt cx="0" cy="0"/>
+        </a:xfrm>
+      </p:grpSpPr>
       <p:sp>
         <p:nvSpPr>
           <p:cNvPr id="2" name="TextBox 1"/>
@@ -7132,6 +7190,7 @@
           <a:lstStyle/>
           <a:p>
             <a:pPr algn="ctr"/>
+            <a:endParaRPr/>
           </a:p>
         </p:txBody>
       </p:sp>
@@ -7218,6 +7277,7 @@
           <a:lstStyle/>
           <a:p>
             <a:pPr algn="ctr"/>
+            <a:endParaRPr/>
           </a:p>
         </p:txBody>
       </p:sp>
@@ -7304,6 +7364,7 @@
           <a:lstStyle/>
           <a:p>
             <a:pPr algn="ctr"/>
+            <a:endParaRPr/>
           </a:p>
         </p:txBody>
       </p:sp>
@@ -7390,6 +7451,7 @@
           <a:lstStyle/>
           <a:p>
             <a:pPr algn="ctr"/>
+            <a:endParaRPr/>
           </a:p>
         </p:txBody>
       </p:sp>
@@ -7476,6 +7538,7 @@
           <a:lstStyle/>
           <a:p>
             <a:pPr algn="ctr"/>
+            <a:endParaRPr/>
           </a:p>
         </p:txBody>
       </p:sp>
@@ -7562,6 +7625,7 @@
           <a:lstStyle/>
           <a:p>
             <a:pPr algn="ctr"/>
+            <a:endParaRPr/>
           </a:p>
         </p:txBody>
       </p:sp>
@@ -7616,7 +7680,7 @@
 </file>
 
 <file path=ppt/slides/slide19.xml><?xml version="1.0" encoding="utf-8"?>
-<p:sld xmlns:a="http://schemas.openxmlformats.org/drawingml/2006/main" xmlns:p="http://schemas.openxmlformats.org/presentationml/2006/main" xmlns:r="http://schemas.openxmlformats.org/officeDocument/2006/relationships">
+<p:sld xmlns:a="http://schemas.openxmlformats.org/drawingml/2006/main" xmlns:r="http://schemas.openxmlformats.org/officeDocument/2006/relationships" xmlns:p="http://schemas.openxmlformats.org/presentationml/2006/main">
   <p:cSld>
     <p:bg>
       <p:bgPr>
@@ -7632,7 +7696,14 @@
         <p:cNvGrpSpPr/>
         <p:nvPr/>
       </p:nvGrpSpPr>
-      <p:grpSpPr/>
+      <p:grpSpPr>
+        <a:xfrm>
+          <a:off x="0" y="0"/>
+          <a:ext cx="0" cy="0"/>
+          <a:chOff x="0" y="0"/>
+          <a:chExt cx="0" cy="0"/>
+        </a:xfrm>
+      </p:grpSpPr>
       <p:sp>
         <p:nvSpPr>
           <p:cNvPr id="2" name="TextBox 1"/>
@@ -7800,6 +7871,7 @@
           <a:lstStyle/>
           <a:p>
             <a:pPr algn="ctr"/>
+            <a:endParaRPr/>
           </a:p>
         </p:txBody>
       </p:sp>
@@ -7894,15 +7966,12 @@
                 <a:spcPts val="0"/>
               </a:spcAft>
             </a:pPr>
-            <a:r>
-              <a:rPr sz="1400" b="0">
-                <a:solidFill>
-                  <a:srgbClr val="0E1B2B"/>
-                </a:solidFill>
-                <a:latin typeface="Calibri"/>
-              </a:rPr>
-              <a:t/>
-            </a:r>
+            <a:endParaRPr sz="1400" b="0">
+              <a:solidFill>
+                <a:srgbClr val="0E1B2B"/>
+              </a:solidFill>
+              <a:latin typeface="Calibri"/>
+            </a:endParaRPr>
           </a:p>
           <a:p>
             <a:pPr algn="l">
@@ -7966,6 +8035,7 @@
           <a:lstStyle/>
           <a:p>
             <a:pPr algn="ctr"/>
+            <a:endParaRPr/>
           </a:p>
         </p:txBody>
       </p:sp>
@@ -8060,15 +8130,12 @@
                 <a:spcPts val="0"/>
               </a:spcAft>
             </a:pPr>
-            <a:r>
-              <a:rPr sz="1400" b="0">
-                <a:solidFill>
-                  <a:srgbClr val="FFFFFF"/>
-                </a:solidFill>
-                <a:latin typeface="Calibri"/>
-              </a:rPr>
-              <a:t/>
-            </a:r>
+            <a:endParaRPr sz="1400" b="0">
+              <a:solidFill>
+                <a:srgbClr val="FFFFFF"/>
+              </a:solidFill>
+              <a:latin typeface="Calibri"/>
+            </a:endParaRPr>
           </a:p>
           <a:p>
             <a:pPr algn="l">
@@ -8100,7 +8167,7 @@
 </file>
 
 <file path=ppt/slides/slide2.xml><?xml version="1.0" encoding="utf-8"?>
-<p:sld xmlns:a="http://schemas.openxmlformats.org/drawingml/2006/main" xmlns:p="http://schemas.openxmlformats.org/presentationml/2006/main" xmlns:r="http://schemas.openxmlformats.org/officeDocument/2006/relationships">
+<p:sld xmlns:a="http://schemas.openxmlformats.org/drawingml/2006/main" xmlns:r="http://schemas.openxmlformats.org/officeDocument/2006/relationships" xmlns:p="http://schemas.openxmlformats.org/presentationml/2006/main">
   <p:cSld>
     <p:bg>
       <p:bgPr>
@@ -8116,7 +8183,14 @@
         <p:cNvGrpSpPr/>
         <p:nvPr/>
       </p:nvGrpSpPr>
-      <p:grpSpPr/>
+      <p:grpSpPr>
+        <a:xfrm>
+          <a:off x="0" y="0"/>
+          <a:ext cx="0" cy="0"/>
+          <a:chOff x="0" y="0"/>
+          <a:chExt cx="0" cy="0"/>
+        </a:xfrm>
+      </p:grpSpPr>
       <p:sp>
         <p:nvSpPr>
           <p:cNvPr id="2" name="TextBox 1"/>
@@ -9074,7 +9148,7 @@
 </file>
 
 <file path=ppt/slides/slide20.xml><?xml version="1.0" encoding="utf-8"?>
-<p:sld xmlns:a="http://schemas.openxmlformats.org/drawingml/2006/main" xmlns:p="http://schemas.openxmlformats.org/presentationml/2006/main" xmlns:r="http://schemas.openxmlformats.org/officeDocument/2006/relationships">
+<p:sld xmlns:a="http://schemas.openxmlformats.org/drawingml/2006/main" xmlns:r="http://schemas.openxmlformats.org/officeDocument/2006/relationships" xmlns:p="http://schemas.openxmlformats.org/presentationml/2006/main">
   <p:cSld>
     <p:bg>
       <p:bgPr>
@@ -9090,7 +9164,14 @@
         <p:cNvGrpSpPr/>
         <p:nvPr/>
       </p:nvGrpSpPr>
-      <p:grpSpPr/>
+      <p:grpSpPr>
+        <a:xfrm>
+          <a:off x="0" y="0"/>
+          <a:ext cx="0" cy="0"/>
+          <a:chOff x="0" y="0"/>
+          <a:chExt cx="0" cy="0"/>
+        </a:xfrm>
+      </p:grpSpPr>
       <p:sp>
         <p:nvSpPr>
           <p:cNvPr id="2" name="TextBox 1"/>
@@ -9342,6 +9423,7 @@
           <a:lstStyle/>
           <a:p>
             <a:pPr algn="ctr"/>
+            <a:endParaRPr/>
           </a:p>
         </p:txBody>
       </p:sp>
@@ -9470,6 +9552,7 @@
           <a:lstStyle/>
           <a:p>
             <a:pPr algn="ctr"/>
+            <a:endParaRPr/>
           </a:p>
         </p:txBody>
       </p:sp>
@@ -9598,6 +9681,7 @@
           <a:lstStyle/>
           <a:p>
             <a:pPr algn="ctr"/>
+            <a:endParaRPr/>
           </a:p>
         </p:txBody>
       </p:sp>
@@ -9726,6 +9810,7 @@
           <a:lstStyle/>
           <a:p>
             <a:pPr algn="ctr"/>
+            <a:endParaRPr/>
           </a:p>
         </p:txBody>
       </p:sp>
@@ -9854,6 +9939,7 @@
           <a:lstStyle/>
           <a:p>
             <a:pPr algn="ctr"/>
+            <a:endParaRPr/>
           </a:p>
         </p:txBody>
       </p:sp>
@@ -9992,7 +10078,7 @@
 </file>
 
 <file path=ppt/slides/slide21.xml><?xml version="1.0" encoding="utf-8"?>
-<p:sld xmlns:a="http://schemas.openxmlformats.org/drawingml/2006/main" xmlns:p="http://schemas.openxmlformats.org/presentationml/2006/main" xmlns:r="http://schemas.openxmlformats.org/officeDocument/2006/relationships">
+<p:sld xmlns:a="http://schemas.openxmlformats.org/drawingml/2006/main" xmlns:r="http://schemas.openxmlformats.org/officeDocument/2006/relationships" xmlns:p="http://schemas.openxmlformats.org/presentationml/2006/main">
   <p:cSld>
     <p:bg>
       <p:bgPr>
@@ -10008,7 +10094,14 @@
         <p:cNvGrpSpPr/>
         <p:nvPr/>
       </p:nvGrpSpPr>
-      <p:grpSpPr/>
+      <p:grpSpPr>
+        <a:xfrm>
+          <a:off x="0" y="0"/>
+          <a:ext cx="0" cy="0"/>
+          <a:chOff x="0" y="0"/>
+          <a:chExt cx="0" cy="0"/>
+        </a:xfrm>
+      </p:grpSpPr>
       <p:sp>
         <p:nvSpPr>
           <p:cNvPr id="2" name="TextBox 1"/>
@@ -10471,36 +10564,42 @@
         <p:spPr>
           <a:xfrm>
             <a:off x="1600200" y="5093208"/>
-            <a:ext cx="8961120" cy="457200"/>
-          </a:xfrm>
-          <a:prstGeom prst="rect">
-            <a:avLst/>
-          </a:prstGeom>
-          <a:noFill/>
-        </p:spPr>
-        <p:txBody>
-          <a:bodyPr wrap="square">
-            <a:spAutoFit/>
-          </a:bodyPr>
-          <a:lstStyle/>
-          <a:p>
-            <a:pPr algn="l">
-              <a:spcBef>
-                <a:spcPts val="0"/>
-              </a:spcBef>
-              <a:spcAft>
-                <a:spcPts val="0"/>
-              </a:spcAft>
-            </a:pPr>
-            <a:r>
-              <a:rPr sz="1300" b="0">
+            <a:ext cx="8961120" cy="292388"/>
+          </a:xfrm>
+          <a:prstGeom prst="rect">
+            <a:avLst/>
+          </a:prstGeom>
+          <a:noFill/>
+        </p:spPr>
+        <p:txBody>
+          <a:bodyPr wrap="square">
+            <a:spAutoFit/>
+          </a:bodyPr>
+          <a:lstStyle/>
+          <a:p>
+            <a:pPr algn="l">
+              <a:spcBef>
+                <a:spcPts val="0"/>
+              </a:spcBef>
+              <a:spcAft>
+                <a:spcPts val="0"/>
+              </a:spcAft>
+            </a:pPr>
+            <a:r>
+              <a:rPr lang="en-US" sz="1300" b="0">
                 <a:solidFill>
                   <a:srgbClr val="CADCFC"/>
                 </a:solidFill>
                 <a:latin typeface="Calibri"/>
               </a:rPr>
-              <a:t>50-document knowledge base: semantic search vs. keyword search, plus a Groq RAG preview</a:t>
-            </a:r>
+              <a:t>50-document knowledge base: semantic search vs. keyword search</a:t>
+            </a:r>
+            <a:endParaRPr sz="1300" b="0">
+              <a:solidFill>
+                <a:srgbClr val="CADCFC"/>
+              </a:solidFill>
+              <a:latin typeface="Calibri"/>
+            </a:endParaRPr>
           </a:p>
         </p:txBody>
       </p:sp>
@@ -10555,7 +10654,7 @@
 </file>
 
 <file path=ppt/slides/slide22.xml><?xml version="1.0" encoding="utf-8"?>
-<p:sld xmlns:a="http://schemas.openxmlformats.org/drawingml/2006/main" xmlns:p="http://schemas.openxmlformats.org/presentationml/2006/main" xmlns:r="http://schemas.openxmlformats.org/officeDocument/2006/relationships">
+<p:sld xmlns:a="http://schemas.openxmlformats.org/drawingml/2006/main" xmlns:r="http://schemas.openxmlformats.org/officeDocument/2006/relationships" xmlns:p="http://schemas.openxmlformats.org/presentationml/2006/main">
   <p:cSld>
     <p:bg>
       <p:bgPr>
@@ -10571,7 +10670,14 @@
         <p:cNvGrpSpPr/>
         <p:nvPr/>
       </p:nvGrpSpPr>
-      <p:grpSpPr/>
+      <p:grpSpPr>
+        <a:xfrm>
+          <a:off x="0" y="0"/>
+          <a:ext cx="0" cy="0"/>
+          <a:chOff x="0" y="0"/>
+          <a:chExt cx="0" cy="0"/>
+        </a:xfrm>
+      </p:grpSpPr>
       <p:sp>
         <p:nvSpPr>
           <p:cNvPr id="2" name="TextBox 1"/>
@@ -10739,6 +10845,7 @@
           <a:lstStyle/>
           <a:p>
             <a:pPr algn="ctr"/>
+            <a:endParaRPr/>
           </a:p>
         </p:txBody>
       </p:sp>
@@ -10867,6 +10974,7 @@
           <a:lstStyle/>
           <a:p>
             <a:pPr algn="ctr"/>
+            <a:endParaRPr/>
           </a:p>
         </p:txBody>
       </p:sp>
@@ -10995,6 +11103,7 @@
           <a:lstStyle/>
           <a:p>
             <a:pPr algn="ctr"/>
+            <a:endParaRPr/>
           </a:p>
         </p:txBody>
       </p:sp>
@@ -11123,6 +11232,7 @@
           <a:lstStyle/>
           <a:p>
             <a:pPr algn="ctr"/>
+            <a:endParaRPr/>
           </a:p>
         </p:txBody>
       </p:sp>
@@ -11219,7 +11329,7 @@
 </file>
 
 <file path=ppt/slides/slide23.xml><?xml version="1.0" encoding="utf-8"?>
-<p:sld xmlns:a="http://schemas.openxmlformats.org/drawingml/2006/main" xmlns:p="http://schemas.openxmlformats.org/presentationml/2006/main" xmlns:r="http://schemas.openxmlformats.org/officeDocument/2006/relationships">
+<p:sld xmlns:a="http://schemas.openxmlformats.org/drawingml/2006/main" xmlns:r="http://schemas.openxmlformats.org/officeDocument/2006/relationships" xmlns:p="http://schemas.openxmlformats.org/presentationml/2006/main">
   <p:cSld>
     <p:bg>
       <p:bgPr>
@@ -11235,7 +11345,14 @@
         <p:cNvGrpSpPr/>
         <p:nvPr/>
       </p:nvGrpSpPr>
-      <p:grpSpPr/>
+      <p:grpSpPr>
+        <a:xfrm>
+          <a:off x="0" y="0"/>
+          <a:ext cx="0" cy="0"/>
+          <a:chOff x="0" y="0"/>
+          <a:chExt cx="0" cy="0"/>
+        </a:xfrm>
+      </p:grpSpPr>
       <p:sp>
         <p:nvSpPr>
           <p:cNvPr id="2" name="TextBox 1"/>
@@ -11498,6 +11615,7 @@
           <a:lstStyle/>
           <a:p>
             <a:pPr algn="ctr"/>
+            <a:endParaRPr/>
           </a:p>
         </p:txBody>
       </p:sp>
@@ -11594,7 +11712,7 @@
 </file>
 
 <file path=ppt/slides/slide3.xml><?xml version="1.0" encoding="utf-8"?>
-<p:sld xmlns:a="http://schemas.openxmlformats.org/drawingml/2006/main" xmlns:p="http://schemas.openxmlformats.org/presentationml/2006/main" xmlns:r="http://schemas.openxmlformats.org/officeDocument/2006/relationships">
+<p:sld xmlns:a="http://schemas.openxmlformats.org/drawingml/2006/main" xmlns:r="http://schemas.openxmlformats.org/officeDocument/2006/relationships" xmlns:p="http://schemas.openxmlformats.org/presentationml/2006/main">
   <p:cSld>
     <p:bg>
       <p:bgPr>
@@ -11610,7 +11728,14 @@
         <p:cNvGrpSpPr/>
         <p:nvPr/>
       </p:nvGrpSpPr>
-      <p:grpSpPr/>
+      <p:grpSpPr>
+        <a:xfrm>
+          <a:off x="0" y="0"/>
+          <a:ext cx="0" cy="0"/>
+          <a:chOff x="0" y="0"/>
+          <a:chExt cx="0" cy="0"/>
+        </a:xfrm>
+      </p:grpSpPr>
       <p:sp>
         <p:nvSpPr>
           <p:cNvPr id="2" name="TextBox 1"/>
@@ -11778,6 +11903,7 @@
           <a:lstStyle/>
           <a:p>
             <a:pPr algn="ctr"/>
+            <a:endParaRPr/>
           </a:p>
         </p:txBody>
       </p:sp>
@@ -11948,6 +12074,7 @@
           <a:lstStyle/>
           <a:p>
             <a:pPr algn="ctr"/>
+            <a:endParaRPr/>
           </a:p>
         </p:txBody>
       </p:sp>
@@ -12076,6 +12203,7 @@
           <a:lstStyle/>
           <a:p>
             <a:pPr algn="ctr"/>
+            <a:endParaRPr/>
           </a:p>
         </p:txBody>
       </p:sp>
@@ -12162,6 +12290,7 @@
           <a:lstStyle/>
           <a:p>
             <a:pPr algn="ctr"/>
+            <a:endParaRPr/>
           </a:p>
         </p:txBody>
       </p:sp>
@@ -12290,6 +12419,7 @@
           <a:lstStyle/>
           <a:p>
             <a:pPr algn="ctr"/>
+            <a:endParaRPr/>
           </a:p>
         </p:txBody>
       </p:sp>
@@ -12376,6 +12506,7 @@
           <a:lstStyle/>
           <a:p>
             <a:pPr algn="ctr"/>
+            <a:endParaRPr/>
           </a:p>
         </p:txBody>
       </p:sp>
@@ -12504,6 +12635,7 @@
           <a:lstStyle/>
           <a:p>
             <a:pPr algn="ctr"/>
+            <a:endParaRPr/>
           </a:p>
         </p:txBody>
       </p:sp>
@@ -12590,6 +12722,7 @@
           <a:lstStyle/>
           <a:p>
             <a:pPr algn="ctr"/>
+            <a:endParaRPr/>
           </a:p>
         </p:txBody>
       </p:sp>
@@ -12718,6 +12851,7 @@
           <a:lstStyle/>
           <a:p>
             <a:pPr algn="ctr"/>
+            <a:endParaRPr/>
           </a:p>
         </p:txBody>
       </p:sp>
@@ -12804,6 +12938,7 @@
           <a:lstStyle/>
           <a:p>
             <a:pPr algn="ctr"/>
+            <a:endParaRPr/>
           </a:p>
         </p:txBody>
       </p:sp>
@@ -12932,6 +13067,7 @@
           <a:lstStyle/>
           <a:p>
             <a:pPr algn="ctr"/>
+            <a:endParaRPr/>
           </a:p>
         </p:txBody>
       </p:sp>
@@ -12986,7 +13122,7 @@
 </file>
 
 <file path=ppt/slides/slide4.xml><?xml version="1.0" encoding="utf-8"?>
-<p:sld xmlns:a="http://schemas.openxmlformats.org/drawingml/2006/main" xmlns:p="http://schemas.openxmlformats.org/presentationml/2006/main" xmlns:r="http://schemas.openxmlformats.org/officeDocument/2006/relationships">
+<p:sld xmlns:a="http://schemas.openxmlformats.org/drawingml/2006/main" xmlns:r="http://schemas.openxmlformats.org/officeDocument/2006/relationships" xmlns:p="http://schemas.openxmlformats.org/presentationml/2006/main">
   <p:cSld>
     <p:bg>
       <p:bgPr>
@@ -13002,7 +13138,14 @@
         <p:cNvGrpSpPr/>
         <p:nvPr/>
       </p:nvGrpSpPr>
-      <p:grpSpPr/>
+      <p:grpSpPr>
+        <a:xfrm>
+          <a:off x="0" y="0"/>
+          <a:ext cx="0" cy="0"/>
+          <a:chOff x="0" y="0"/>
+          <a:chExt cx="0" cy="0"/>
+        </a:xfrm>
+      </p:grpSpPr>
       <p:sp>
         <p:nvSpPr>
           <p:cNvPr id="2" name="TextBox 1"/>
@@ -13180,7 +13323,7 @@
 </file>
 
 <file path=ppt/slides/slide5.xml><?xml version="1.0" encoding="utf-8"?>
-<p:sld xmlns:a="http://schemas.openxmlformats.org/drawingml/2006/main" xmlns:p="http://schemas.openxmlformats.org/presentationml/2006/main" xmlns:r="http://schemas.openxmlformats.org/officeDocument/2006/relationships">
+<p:sld xmlns:a="http://schemas.openxmlformats.org/drawingml/2006/main" xmlns:r="http://schemas.openxmlformats.org/officeDocument/2006/relationships" xmlns:p="http://schemas.openxmlformats.org/presentationml/2006/main">
   <p:cSld>
     <p:bg>
       <p:bgPr>
@@ -13196,7 +13339,14 @@
         <p:cNvGrpSpPr/>
         <p:nvPr/>
       </p:nvGrpSpPr>
-      <p:grpSpPr/>
+      <p:grpSpPr>
+        <a:xfrm>
+          <a:off x="0" y="0"/>
+          <a:ext cx="0" cy="0"/>
+          <a:chOff x="0" y="0"/>
+          <a:chExt cx="0" cy="0"/>
+        </a:xfrm>
+      </p:grpSpPr>
       <p:sp>
         <p:nvSpPr>
           <p:cNvPr id="2" name="TextBox 1"/>
@@ -13364,6 +13514,7 @@
           <a:lstStyle/>
           <a:p>
             <a:pPr algn="ctr"/>
+            <a:endParaRPr/>
           </a:p>
         </p:txBody>
       </p:sp>
@@ -13450,6 +13601,7 @@
           <a:lstStyle/>
           <a:p>
             <a:pPr algn="ctr"/>
+            <a:endParaRPr/>
           </a:p>
         </p:txBody>
       </p:sp>
@@ -13502,15 +13654,12 @@
                 <a:spcPts val="0"/>
               </a:spcAft>
             </a:pPr>
-            <a:r>
-              <a:rPr sz="1300" b="0">
-                <a:solidFill>
-                  <a:srgbClr val="CADCFC"/>
-                </a:solidFill>
-                <a:latin typeface="Courier New"/>
-              </a:rPr>
-              <a:t/>
-            </a:r>
+            <a:endParaRPr sz="1300" b="0">
+              <a:solidFill>
+                <a:srgbClr val="CADCFC"/>
+              </a:solidFill>
+              <a:latin typeface="Courier New"/>
+            </a:endParaRPr>
           </a:p>
           <a:p>
             <a:pPr>
@@ -13603,7 +13752,7 @@
 </file>
 
 <file path=ppt/slides/slide6.xml><?xml version="1.0" encoding="utf-8"?>
-<p:sld xmlns:a="http://schemas.openxmlformats.org/drawingml/2006/main" xmlns:p="http://schemas.openxmlformats.org/presentationml/2006/main" xmlns:r="http://schemas.openxmlformats.org/officeDocument/2006/relationships">
+<p:sld xmlns:a="http://schemas.openxmlformats.org/drawingml/2006/main" xmlns:r="http://schemas.openxmlformats.org/officeDocument/2006/relationships" xmlns:p="http://schemas.openxmlformats.org/presentationml/2006/main">
   <p:cSld>
     <p:bg>
       <p:bgPr>
@@ -13619,7 +13768,14 @@
         <p:cNvGrpSpPr/>
         <p:nvPr/>
       </p:nvGrpSpPr>
-      <p:grpSpPr/>
+      <p:grpSpPr>
+        <a:xfrm>
+          <a:off x="0" y="0"/>
+          <a:ext cx="0" cy="0"/>
+          <a:chOff x="0" y="0"/>
+          <a:chExt cx="0" cy="0"/>
+        </a:xfrm>
+      </p:grpSpPr>
       <p:sp>
         <p:nvSpPr>
           <p:cNvPr id="2" name="TextBox 1"/>
@@ -13787,6 +13943,7 @@
           <a:lstStyle/>
           <a:p>
             <a:pPr algn="ctr"/>
+            <a:endParaRPr/>
           </a:p>
         </p:txBody>
       </p:sp>
@@ -13873,6 +14030,7 @@
           <a:lstStyle/>
           <a:p>
             <a:pPr algn="ctr"/>
+            <a:endParaRPr/>
           </a:p>
         </p:txBody>
       </p:sp>
@@ -13982,15 +14140,12 @@
                 <a:spcPts val="0"/>
               </a:spcAft>
             </a:pPr>
-            <a:r>
-              <a:rPr sz="1300" b="0">
-                <a:solidFill>
-                  <a:srgbClr val="CADCFC"/>
-                </a:solidFill>
-                <a:latin typeface="Courier New"/>
-              </a:rPr>
-              <a:t/>
-            </a:r>
+            <a:endParaRPr sz="1300" b="0">
+              <a:solidFill>
+                <a:srgbClr val="8895A7"/>
+              </a:solidFill>
+              <a:latin typeface="Courier New"/>
+            </a:endParaRPr>
           </a:p>
           <a:p>
             <a:pPr>
@@ -14041,7 +14196,7 @@
 </file>
 
 <file path=ppt/slides/slide7.xml><?xml version="1.0" encoding="utf-8"?>
-<p:sld xmlns:a="http://schemas.openxmlformats.org/drawingml/2006/main" xmlns:p="http://schemas.openxmlformats.org/presentationml/2006/main" xmlns:r="http://schemas.openxmlformats.org/officeDocument/2006/relationships">
+<p:sld xmlns:a="http://schemas.openxmlformats.org/drawingml/2006/main" xmlns:r="http://schemas.openxmlformats.org/officeDocument/2006/relationships" xmlns:p="http://schemas.openxmlformats.org/presentationml/2006/main">
   <p:cSld>
     <p:bg>
       <p:bgPr>
@@ -14057,7 +14212,14 @@
         <p:cNvGrpSpPr/>
         <p:nvPr/>
       </p:nvGrpSpPr>
-      <p:grpSpPr/>
+      <p:grpSpPr>
+        <a:xfrm>
+          <a:off x="0" y="0"/>
+          <a:ext cx="0" cy="0"/>
+          <a:chOff x="0" y="0"/>
+          <a:chExt cx="0" cy="0"/>
+        </a:xfrm>
+      </p:grpSpPr>
       <p:sp>
         <p:nvSpPr>
           <p:cNvPr id="2" name="TextBox 1"/>
@@ -14235,7 +14397,7 @@
 </file>
 
 <file path=ppt/slides/slide8.xml><?xml version="1.0" encoding="utf-8"?>
-<p:sld xmlns:a="http://schemas.openxmlformats.org/drawingml/2006/main" xmlns:p="http://schemas.openxmlformats.org/presentationml/2006/main" xmlns:r="http://schemas.openxmlformats.org/officeDocument/2006/relationships">
+<p:sld xmlns:a="http://schemas.openxmlformats.org/drawingml/2006/main" xmlns:r="http://schemas.openxmlformats.org/officeDocument/2006/relationships" xmlns:p="http://schemas.openxmlformats.org/presentationml/2006/main">
   <p:cSld>
     <p:bg>
       <p:bgPr>
@@ -14251,7 +14413,14 @@
         <p:cNvGrpSpPr/>
         <p:nvPr/>
       </p:nvGrpSpPr>
-      <p:grpSpPr/>
+      <p:grpSpPr>
+        <a:xfrm>
+          <a:off x="0" y="0"/>
+          <a:ext cx="0" cy="0"/>
+          <a:chOff x="0" y="0"/>
+          <a:chExt cx="0" cy="0"/>
+        </a:xfrm>
+      </p:grpSpPr>
       <p:sp>
         <p:nvSpPr>
           <p:cNvPr id="2" name="TextBox 1"/>
@@ -14419,6 +14588,7 @@
           <a:lstStyle/>
           <a:p>
             <a:pPr algn="ctr"/>
+            <a:endParaRPr/>
           </a:p>
         </p:txBody>
       </p:sp>
@@ -14505,6 +14675,7 @@
           <a:lstStyle/>
           <a:p>
             <a:pPr algn="ctr"/>
+            <a:endParaRPr/>
           </a:p>
         </p:txBody>
       </p:sp>
@@ -14595,15 +14766,12 @@
                 <a:spcPts val="0"/>
               </a:spcAft>
             </a:pPr>
-            <a:r>
-              <a:rPr sz="1300" b="0">
-                <a:solidFill>
-                  <a:srgbClr val="CADCFC"/>
-                </a:solidFill>
-                <a:latin typeface="Courier New"/>
-              </a:rPr>
-              <a:t/>
-            </a:r>
+            <a:endParaRPr sz="1300" b="1">
+              <a:solidFill>
+                <a:srgbClr val="E8A33D"/>
+              </a:solidFill>
+              <a:latin typeface="Courier New"/>
+            </a:endParaRPr>
           </a:p>
           <a:p>
             <a:pPr>
@@ -14696,7 +14864,7 @@
 </file>
 
 <file path=ppt/slides/slide9.xml><?xml version="1.0" encoding="utf-8"?>
-<p:sld xmlns:a="http://schemas.openxmlformats.org/drawingml/2006/main" xmlns:p="http://schemas.openxmlformats.org/presentationml/2006/main" xmlns:r="http://schemas.openxmlformats.org/officeDocument/2006/relationships">
+<p:sld xmlns:a="http://schemas.openxmlformats.org/drawingml/2006/main" xmlns:r="http://schemas.openxmlformats.org/officeDocument/2006/relationships" xmlns:p="http://schemas.openxmlformats.org/presentationml/2006/main">
   <p:cSld>
     <p:bg>
       <p:bgPr>
@@ -14712,7 +14880,14 @@
         <p:cNvGrpSpPr/>
         <p:nvPr/>
       </p:nvGrpSpPr>
-      <p:grpSpPr/>
+      <p:grpSpPr>
+        <a:xfrm>
+          <a:off x="0" y="0"/>
+          <a:ext cx="0" cy="0"/>
+          <a:chOff x="0" y="0"/>
+          <a:chExt cx="0" cy="0"/>
+        </a:xfrm>
+      </p:grpSpPr>
       <p:sp>
         <p:nvSpPr>
           <p:cNvPr id="2" name="TextBox 1"/>
@@ -14880,6 +15055,7 @@
           <a:lstStyle/>
           <a:p>
             <a:pPr algn="ctr"/>
+            <a:endParaRPr/>
           </a:p>
         </p:txBody>
       </p:sp>
@@ -14993,6 +15169,22 @@
                 <a:spcPts val="0"/>
               </a:spcAft>
             </a:pPr>
+            <a:endParaRPr sz="1400" b="0">
+              <a:solidFill>
+                <a:srgbClr val="0E1B2B"/>
+              </a:solidFill>
+              <a:latin typeface="Calibri"/>
+            </a:endParaRPr>
+          </a:p>
+          <a:p>
+            <a:pPr algn="l">
+              <a:spcBef>
+                <a:spcPts val="0"/>
+              </a:spcBef>
+              <a:spcAft>
+                <a:spcPts val="0"/>
+              </a:spcAft>
+            </a:pPr>
             <a:r>
               <a:rPr sz="1400" b="0">
                 <a:solidFill>
@@ -15000,25 +15192,6 @@
                 </a:solidFill>
                 <a:latin typeface="Calibri"/>
               </a:rPr>
-              <a:t/>
-            </a:r>
-          </a:p>
-          <a:p>
-            <a:pPr algn="l">
-              <a:spcBef>
-                <a:spcPts val="0"/>
-              </a:spcBef>
-              <a:spcAft>
-                <a:spcPts val="0"/>
-              </a:spcAft>
-            </a:pPr>
-            <a:r>
-              <a:rPr sz="1400" b="0">
-                <a:solidFill>
-                  <a:srgbClr val="0E1B2B"/>
-                </a:solidFill>
-                <a:latin typeface="Calibri"/>
-              </a:rPr>
               <a:t>Those two arrows point almost the same way -- high cosine similarity.</a:t>
             </a:r>
           </a:p>
@@ -15031,15 +15204,12 @@
                 <a:spcPts val="0"/>
               </a:spcAft>
             </a:pPr>
-            <a:r>
-              <a:rPr sz="1400" b="0">
-                <a:solidFill>
-                  <a:srgbClr val="0E1B2B"/>
-                </a:solidFill>
-                <a:latin typeface="Calibri"/>
-              </a:rPr>
-              <a:t/>
-            </a:r>
+            <a:endParaRPr sz="1400" b="0">
+              <a:solidFill>
+                <a:srgbClr val="0E1B2B"/>
+              </a:solidFill>
+              <a:latin typeface="Calibri"/>
+            </a:endParaRPr>
           </a:p>
           <a:p>
             <a:pPr algn="l">
@@ -15103,6 +15273,7 @@
           <a:lstStyle/>
           <a:p>
             <a:pPr algn="ctr"/>
+            <a:endParaRPr/>
           </a:p>
         </p:txBody>
       </p:sp>
@@ -15235,15 +15406,12 @@
                 <a:spcPts val="0"/>
               </a:spcAft>
             </a:pPr>
-            <a:r>
-              <a:rPr sz="1400" b="0">
-                <a:solidFill>
-                  <a:srgbClr val="FFFFFF"/>
-                </a:solidFill>
-                <a:latin typeface="Calibri"/>
-              </a:rPr>
-              <a:t/>
-            </a:r>
+            <a:endParaRPr sz="1400" b="0">
+              <a:solidFill>
+                <a:srgbClr val="FFFFFF"/>
+              </a:solidFill>
+              <a:latin typeface="Calibri"/>
+            </a:endParaRPr>
           </a:p>
           <a:p>
             <a:pPr algn="l">
